--- a/LabBook_3.pptx
+++ b/LabBook_3.pptx
@@ -5,19 +5,21 @@
     <p:sldMasterId id="2147483648" r:id="rId1"/>
   </p:sldMasterIdLst>
   <p:notesMasterIdLst>
-    <p:notesMasterId r:id="rId9"/>
+    <p:notesMasterId r:id="rId11"/>
   </p:notesMasterIdLst>
   <p:handoutMasterIdLst>
-    <p:handoutMasterId r:id="rId10"/>
+    <p:handoutMasterId r:id="rId12"/>
   </p:handoutMasterIdLst>
   <p:sldIdLst>
     <p:sldId id="256" r:id="rId2"/>
     <p:sldId id="289" r:id="rId3"/>
     <p:sldId id="290" r:id="rId4"/>
-    <p:sldId id="295" r:id="rId5"/>
-    <p:sldId id="296" r:id="rId6"/>
-    <p:sldId id="293" r:id="rId7"/>
-    <p:sldId id="288" r:id="rId8"/>
+    <p:sldId id="297" r:id="rId5"/>
+    <p:sldId id="298" r:id="rId6"/>
+    <p:sldId id="295" r:id="rId7"/>
+    <p:sldId id="296" r:id="rId8"/>
+    <p:sldId id="293" r:id="rId9"/>
+    <p:sldId id="288" r:id="rId10"/>
   </p:sldIdLst>
   <p:sldSz cx="12192000" cy="6858000"/>
   <p:notesSz cx="12192000" cy="6858000"/>
@@ -232,7 +234,7 @@
           <a:p>
             <a:fld id="{8438F8DC-35B0-48E6-A86E-42F1F08DD00F}" type="datetimeFigureOut">
               <a:rPr lang="es-ES" smtClean="0"/>
-              <a:t>02/03/2026</a:t>
+              <a:t>09/03/2026</a:t>
             </a:fld>
             <a:endParaRPr lang="es-ES"/>
           </a:p>
@@ -409,7 +411,7 @@
           <a:p>
             <a:fld id="{FACBDC12-F39B-4B97-8F4D-6734F9D366FF}" type="datetimeFigureOut">
               <a:rPr lang="es-ES" smtClean="0"/>
-              <a:t>02/03/2026</a:t>
+              <a:t>09/03/2026</a:t>
             </a:fld>
             <a:endParaRPr lang="es-ES"/>
           </a:p>
@@ -849,7 +851,7 @@
           <a:p>
             <a:fld id="{676223B9-C868-4436-87D9-1A3152E1157A}" type="slidenum">
               <a:rPr lang="es-ES" smtClean="0"/>
-              <a:t>4</a:t>
+              <a:t>6</a:t>
             </a:fld>
             <a:endParaRPr lang="es-ES"/>
           </a:p>
@@ -957,7 +959,7 @@
           <a:p>
             <a:fld id="{676223B9-C868-4436-87D9-1A3152E1157A}" type="slidenum">
               <a:rPr lang="es-ES" smtClean="0"/>
-              <a:t>5</a:t>
+              <a:t>7</a:t>
             </a:fld>
             <a:endParaRPr lang="es-ES"/>
           </a:p>
@@ -1065,7 +1067,7 @@
           <a:p>
             <a:fld id="{676223B9-C868-4436-87D9-1A3152E1157A}" type="slidenum">
               <a:rPr lang="es-ES" smtClean="0"/>
-              <a:t>6</a:t>
+              <a:t>8</a:t>
             </a:fld>
             <a:endParaRPr lang="es-ES"/>
           </a:p>
@@ -2643,14 +2645,14 @@
                 <a:latin typeface="Arial"/>
                 <a:cs typeface="Arial"/>
               </a:rPr>
-              <a:t>Student</a:t>
+              <a:t>Student:Nadia</a:t>
             </a:r>
             <a:r>
               <a:rPr lang="es-ES" spc="165" dirty="0">
                 <a:latin typeface="Arial"/>
                 <a:cs typeface="Arial"/>
               </a:rPr>
-              <a:t>: </a:t>
+              <a:t> Martí García </a:t>
             </a:r>
             <a:endParaRPr sz="1800" dirty="0">
               <a:latin typeface="Arial"/>
@@ -4746,8 +4748,8 @@
         </p:nvSpPr>
         <p:spPr>
           <a:xfrm>
-            <a:off x="609441" y="4860334"/>
-            <a:ext cx="11199971" cy="1200329"/>
+            <a:off x="5630943" y="3581400"/>
+            <a:ext cx="5823638" cy="1015663"/>
           </a:xfrm>
           <a:prstGeom prst="rect">
             <a:avLst/>
@@ -4813,20 +4815,6 @@
               <a:cs typeface="Arial" panose="020B0604020202020204" pitchFamily="34" charset="0"/>
             </a:endParaRPr>
           </a:p>
-          <a:p>
-            <a:pPr algn="just"/>
-            <a:endParaRPr lang="en-US" sz="1200" dirty="0">
-              <a:latin typeface="Arial" panose="020B0604020202020204" pitchFamily="34" charset="0"/>
-              <a:cs typeface="Arial" panose="020B0604020202020204" pitchFamily="34" charset="0"/>
-            </a:endParaRPr>
-          </a:p>
-          <a:p>
-            <a:pPr algn="just"/>
-            <a:endParaRPr lang="en-US" sz="1200" dirty="0">
-              <a:latin typeface="Arial" panose="020B0604020202020204" pitchFamily="34" charset="0"/>
-              <a:cs typeface="Arial" panose="020B0604020202020204" pitchFamily="34" charset="0"/>
-            </a:endParaRPr>
-          </a:p>
         </p:txBody>
       </p:sp>
       <p:sp>
@@ -4865,6 +4853,99 @@
               <a:t>LAB 3. INTERFEROMETERS I</a:t>
             </a:r>
             <a:endParaRPr lang="es-ES" spc="-5" dirty="0"/>
+          </a:p>
+        </p:txBody>
+      </p:sp>
+      <p:pic>
+        <p:nvPicPr>
+          <p:cNvPr id="6" name="Imagen 5">
+            <a:extLst>
+              <a:ext uri="{FF2B5EF4-FFF2-40B4-BE49-F238E27FC236}">
+                <a16:creationId xmlns:a16="http://schemas.microsoft.com/office/drawing/2014/main" id="{930DDFDE-D4BB-44A6-9659-4E85986F9C87}"/>
+              </a:ext>
+            </a:extLst>
+          </p:cNvPr>
+          <p:cNvPicPr>
+            <a:picLocks noChangeAspect="1"/>
+          </p:cNvPicPr>
+          <p:nvPr/>
+        </p:nvPicPr>
+        <p:blipFill>
+          <a:blip r:embed="rId6"/>
+          <a:stretch>
+            <a:fillRect/>
+          </a:stretch>
+        </p:blipFill>
+        <p:spPr>
+          <a:xfrm>
+            <a:off x="1295400" y="3808665"/>
+            <a:ext cx="3124200" cy="2507074"/>
+          </a:xfrm>
+          <a:prstGeom prst="rect">
+            <a:avLst/>
+          </a:prstGeom>
+        </p:spPr>
+      </p:pic>
+      <p:sp>
+        <p:nvSpPr>
+          <p:cNvPr id="10" name="Título 1">
+            <a:extLst>
+              <a:ext uri="{FF2B5EF4-FFF2-40B4-BE49-F238E27FC236}">
+                <a16:creationId xmlns:a16="http://schemas.microsoft.com/office/drawing/2014/main" id="{BEC0ECB6-5073-4E2C-9AC6-86DC831FE3FA}"/>
+              </a:ext>
+            </a:extLst>
+          </p:cNvPr>
+          <p:cNvSpPr txBox="1">
+            <a:spLocks/>
+          </p:cNvSpPr>
+          <p:nvPr/>
+        </p:nvSpPr>
+        <p:spPr>
+          <a:xfrm>
+            <a:off x="636586" y="3423863"/>
+            <a:ext cx="10991850" cy="307777"/>
+          </a:xfrm>
+          <a:prstGeom prst="rect">
+            <a:avLst/>
+          </a:prstGeom>
+        </p:spPr>
+        <p:txBody>
+          <a:bodyPr wrap="square" lIns="0" tIns="0" rIns="0" bIns="0">
+            <a:spAutoFit/>
+          </a:bodyPr>
+          <a:lstStyle>
+            <a:lvl1pPr>
+              <a:defRPr sz="2000" b="1" i="0">
+                <a:solidFill>
+                  <a:schemeClr val="tx1"/>
+                </a:solidFill>
+                <a:latin typeface="Calibri"/>
+                <a:ea typeface="+mj-ea"/>
+                <a:cs typeface="Calibri"/>
+              </a:defRPr>
+            </a:lvl1pPr>
+          </a:lstStyle>
+          <a:p>
+            <a:r>
+              <a:rPr lang="es-ES" kern="0" dirty="0"/>
+              <a:t>1. </a:t>
+            </a:r>
+            <a:r>
+              <a:rPr lang="es-ES" kern="0" dirty="0" err="1"/>
+              <a:t>Balanced</a:t>
+            </a:r>
+            <a:r>
+              <a:rPr lang="es-ES" kern="0" dirty="0"/>
+              <a:t> </a:t>
+            </a:r>
+            <a:r>
+              <a:rPr lang="es-ES" kern="0" dirty="0" err="1"/>
+              <a:t>configuration</a:t>
+            </a:r>
+            <a:r>
+              <a:rPr lang="es-ES" kern="0" dirty="0"/>
+              <a:t>: </a:t>
+            </a:r>
           </a:p>
         </p:txBody>
       </p:sp>
@@ -4882,6 +4963,1009 @@
 </file>
 
 <file path=ppt/slides/slide4.xml><?xml version="1.0" encoding="utf-8"?>
+<p:sld xmlns:a="http://schemas.openxmlformats.org/drawingml/2006/main" xmlns:r="http://schemas.openxmlformats.org/officeDocument/2006/relationships" xmlns:p="http://schemas.openxmlformats.org/presentationml/2006/main">
+  <p:cSld>
+    <p:spTree>
+      <p:nvGrpSpPr>
+        <p:cNvPr id="1" name=""/>
+        <p:cNvGrpSpPr/>
+        <p:nvPr/>
+      </p:nvGrpSpPr>
+      <p:grpSpPr>
+        <a:xfrm>
+          <a:off x="0" y="0"/>
+          <a:ext cx="0" cy="0"/>
+          <a:chOff x="0" y="0"/>
+          <a:chExt cx="0" cy="0"/>
+        </a:xfrm>
+      </p:grpSpPr>
+      <p:sp>
+        <p:nvSpPr>
+          <p:cNvPr id="2" name="Título 1">
+            <a:extLst>
+              <a:ext uri="{FF2B5EF4-FFF2-40B4-BE49-F238E27FC236}">
+                <a16:creationId xmlns:a16="http://schemas.microsoft.com/office/drawing/2014/main" id="{6F8AD5E1-0F25-4EFE-94F9-DFCD598C324C}"/>
+              </a:ext>
+            </a:extLst>
+          </p:cNvPr>
+          <p:cNvSpPr>
+            <a:spLocks noGrp="1"/>
+          </p:cNvSpPr>
+          <p:nvPr>
+            <p:ph type="title"/>
+          </p:nvPr>
+        </p:nvSpPr>
+        <p:spPr/>
+        <p:txBody>
+          <a:bodyPr/>
+          <a:lstStyle/>
+          <a:p>
+            <a:r>
+              <a:rPr lang="es-ES" dirty="0"/>
+              <a:t>2. </a:t>
+            </a:r>
+            <a:r>
+              <a:rPr lang="es-ES" dirty="0" err="1"/>
+              <a:t>Unbalanced</a:t>
+            </a:r>
+            <a:r>
+              <a:rPr lang="es-ES" dirty="0"/>
+              <a:t> </a:t>
+            </a:r>
+            <a:r>
+              <a:rPr lang="es-ES" dirty="0" err="1"/>
+              <a:t>configurations</a:t>
+            </a:r>
+            <a:r>
+              <a:rPr lang="es-ES" dirty="0"/>
+              <a:t>: </a:t>
+            </a:r>
+          </a:p>
+        </p:txBody>
+      </p:sp>
+      <p:sp>
+        <p:nvSpPr>
+          <p:cNvPr id="4" name="Marcador de pie de página 3">
+            <a:extLst>
+              <a:ext uri="{FF2B5EF4-FFF2-40B4-BE49-F238E27FC236}">
+                <a16:creationId xmlns:a16="http://schemas.microsoft.com/office/drawing/2014/main" id="{1FF19CD4-1B0E-4AAF-BD30-A588E1F94978}"/>
+              </a:ext>
+            </a:extLst>
+          </p:cNvPr>
+          <p:cNvSpPr>
+            <a:spLocks noGrp="1"/>
+          </p:cNvSpPr>
+          <p:nvPr>
+            <p:ph type="ftr" sz="quarter" idx="5"/>
+          </p:nvPr>
+        </p:nvSpPr>
+        <p:spPr/>
+        <p:txBody>
+          <a:bodyPr/>
+          <a:lstStyle/>
+          <a:p>
+            <a:pPr marL="12700">
+              <a:spcBef>
+                <a:spcPts val="15"/>
+              </a:spcBef>
+            </a:pPr>
+            <a:r>
+              <a:rPr lang="es-ES" spc="-5"/>
+              <a:t>LAB 3. INTERFEROMETERS I</a:t>
+            </a:r>
+            <a:endParaRPr lang="es-ES" spc="-5" dirty="0"/>
+          </a:p>
+        </p:txBody>
+      </p:sp>
+      <p:sp>
+        <p:nvSpPr>
+          <p:cNvPr id="5" name="Marcador de número de diapositiva 4">
+            <a:extLst>
+              <a:ext uri="{FF2B5EF4-FFF2-40B4-BE49-F238E27FC236}">
+                <a16:creationId xmlns:a16="http://schemas.microsoft.com/office/drawing/2014/main" id="{18E2570A-1347-4545-9540-B9B10CC337BE}"/>
+              </a:ext>
+            </a:extLst>
+          </p:cNvPr>
+          <p:cNvSpPr>
+            <a:spLocks noGrp="1"/>
+          </p:cNvSpPr>
+          <p:nvPr>
+            <p:ph type="sldNum" sz="quarter" idx="7"/>
+          </p:nvPr>
+        </p:nvSpPr>
+        <p:spPr>
+          <a:xfrm>
+            <a:off x="9220200" y="6343696"/>
+            <a:ext cx="2804160" cy="342900"/>
+          </a:xfrm>
+        </p:spPr>
+        <p:txBody>
+          <a:bodyPr/>
+          <a:lstStyle/>
+          <a:p>
+            <a:fld id="{B6F15528-21DE-4FAA-801E-634DDDAF4B2B}" type="slidenum">
+              <a:rPr lang="es-ES" smtClean="0"/>
+              <a:t>4</a:t>
+            </a:fld>
+            <a:endParaRPr lang="es-ES"/>
+          </a:p>
+        </p:txBody>
+      </p:sp>
+      <p:pic>
+        <p:nvPicPr>
+          <p:cNvPr id="7" name="Imagen 6">
+            <a:extLst>
+              <a:ext uri="{FF2B5EF4-FFF2-40B4-BE49-F238E27FC236}">
+                <a16:creationId xmlns:a16="http://schemas.microsoft.com/office/drawing/2014/main" id="{681895D7-2447-4AD1-BB1E-A5C3546DF407}"/>
+              </a:ext>
+            </a:extLst>
+          </p:cNvPr>
+          <p:cNvPicPr>
+            <a:picLocks noChangeAspect="1"/>
+          </p:cNvPicPr>
+          <p:nvPr/>
+        </p:nvPicPr>
+        <p:blipFill>
+          <a:blip r:embed="rId2"/>
+          <a:stretch>
+            <a:fillRect/>
+          </a:stretch>
+        </p:blipFill>
+        <p:spPr>
+          <a:xfrm>
+            <a:off x="1828800" y="1049610"/>
+            <a:ext cx="2743200" cy="2166938"/>
+          </a:xfrm>
+          <a:prstGeom prst="rect">
+            <a:avLst/>
+          </a:prstGeom>
+        </p:spPr>
+      </p:pic>
+      <p:sp>
+        <p:nvSpPr>
+          <p:cNvPr id="8" name="CuadroTexto 7">
+            <a:extLst>
+              <a:ext uri="{FF2B5EF4-FFF2-40B4-BE49-F238E27FC236}">
+                <a16:creationId xmlns:a16="http://schemas.microsoft.com/office/drawing/2014/main" id="{30965779-8202-4E20-9CCE-165839CA5027}"/>
+              </a:ext>
+            </a:extLst>
+          </p:cNvPr>
+          <p:cNvSpPr txBox="1"/>
+          <p:nvPr/>
+        </p:nvSpPr>
+        <p:spPr>
+          <a:xfrm>
+            <a:off x="1187374" y="683687"/>
+            <a:ext cx="2089226" cy="369332"/>
+          </a:xfrm>
+          <a:prstGeom prst="rect">
+            <a:avLst/>
+          </a:prstGeom>
+          <a:noFill/>
+        </p:spPr>
+        <p:txBody>
+          <a:bodyPr wrap="none" rtlCol="0">
+            <a:spAutoFit/>
+          </a:bodyPr>
+          <a:lstStyle/>
+          <a:p>
+            <a:r>
+              <a:rPr lang="es-ES" dirty="0"/>
+              <a:t>2.2 </a:t>
+            </a:r>
+            <a:r>
+              <a:rPr lang="es-ES" dirty="0" err="1"/>
+              <a:t>Phase</a:t>
+            </a:r>
+            <a:r>
+              <a:rPr lang="es-ES" dirty="0"/>
+              <a:t> </a:t>
+            </a:r>
+            <a:r>
+              <a:rPr lang="es-ES" dirty="0" err="1"/>
+              <a:t>difference</a:t>
+            </a:r>
+            <a:endParaRPr lang="es-ES" dirty="0"/>
+          </a:p>
+        </p:txBody>
+      </p:sp>
+      <p:sp>
+        <p:nvSpPr>
+          <p:cNvPr id="9" name="CuadroTexto 8">
+            <a:extLst>
+              <a:ext uri="{FF2B5EF4-FFF2-40B4-BE49-F238E27FC236}">
+                <a16:creationId xmlns:a16="http://schemas.microsoft.com/office/drawing/2014/main" id="{2301A52B-2B4D-4D61-84CC-4119C75189E9}"/>
+              </a:ext>
+            </a:extLst>
+          </p:cNvPr>
+          <p:cNvSpPr txBox="1"/>
+          <p:nvPr/>
+        </p:nvSpPr>
+        <p:spPr>
+          <a:xfrm>
+            <a:off x="5486400" y="1295400"/>
+            <a:ext cx="5823638" cy="1015663"/>
+          </a:xfrm>
+          <a:prstGeom prst="rect">
+            <a:avLst/>
+          </a:prstGeom>
+          <a:solidFill>
+            <a:schemeClr val="bg1">
+              <a:lumMod val="95000"/>
+            </a:schemeClr>
+          </a:solidFill>
+          <a:ln w="28575">
+            <a:solidFill>
+              <a:srgbClr val="E0700D"/>
+            </a:solidFill>
+          </a:ln>
+        </p:spPr>
+        <p:txBody>
+          <a:bodyPr wrap="square" rtlCol="0">
+            <a:spAutoFit/>
+          </a:bodyPr>
+          <a:lstStyle/>
+          <a:p>
+            <a:pPr algn="just"/>
+            <a:r>
+              <a:rPr lang="en-US" sz="1200" dirty="0">
+                <a:latin typeface="Arial" panose="020B0604020202020204" pitchFamily="34" charset="0"/>
+                <a:cs typeface="Arial" panose="020B0604020202020204" pitchFamily="34" charset="0"/>
+              </a:rPr>
+              <a:t>Document all your results (</a:t>
+            </a:r>
+            <a:r>
+              <a:rPr lang="en-US" sz="1200" dirty="0" err="1">
+                <a:latin typeface="Arial" panose="020B0604020202020204" pitchFamily="34" charset="0"/>
+                <a:cs typeface="Arial" panose="020B0604020202020204" pitchFamily="34" charset="0"/>
+              </a:rPr>
+              <a:t>neff</a:t>
+            </a:r>
+            <a:r>
+              <a:rPr lang="en-US" sz="1200" dirty="0">
+                <a:latin typeface="Arial" panose="020B0604020202020204" pitchFamily="34" charset="0"/>
+                <a:cs typeface="Arial" panose="020B0604020202020204" pitchFamily="34" charset="0"/>
+              </a:rPr>
+              <a:t>, alpha, gamma, transfer function plots, etc.) and comment on the obtained results (in terms of FSR, amplitude, losses, etc.).</a:t>
+            </a:r>
+          </a:p>
+          <a:p>
+            <a:pPr algn="just"/>
+            <a:endParaRPr lang="en-US" sz="1200" dirty="0">
+              <a:latin typeface="Arial" panose="020B0604020202020204" pitchFamily="34" charset="0"/>
+              <a:cs typeface="Arial" panose="020B0604020202020204" pitchFamily="34" charset="0"/>
+            </a:endParaRPr>
+          </a:p>
+          <a:p>
+            <a:pPr algn="just"/>
+            <a:endParaRPr lang="en-US" sz="1200" dirty="0">
+              <a:latin typeface="Arial" panose="020B0604020202020204" pitchFamily="34" charset="0"/>
+              <a:cs typeface="Arial" panose="020B0604020202020204" pitchFamily="34" charset="0"/>
+            </a:endParaRPr>
+          </a:p>
+          <a:p>
+            <a:pPr algn="just"/>
+            <a:endParaRPr lang="en-US" sz="1200" dirty="0">
+              <a:latin typeface="Arial" panose="020B0604020202020204" pitchFamily="34" charset="0"/>
+              <a:cs typeface="Arial" panose="020B0604020202020204" pitchFamily="34" charset="0"/>
+            </a:endParaRPr>
+          </a:p>
+        </p:txBody>
+      </p:sp>
+      <p:sp>
+        <p:nvSpPr>
+          <p:cNvPr id="10" name="CuadroTexto 9">
+            <a:extLst>
+              <a:ext uri="{FF2B5EF4-FFF2-40B4-BE49-F238E27FC236}">
+                <a16:creationId xmlns:a16="http://schemas.microsoft.com/office/drawing/2014/main" id="{0FAC6029-1577-41C3-BBFA-14C21952442A}"/>
+              </a:ext>
+            </a:extLst>
+          </p:cNvPr>
+          <p:cNvSpPr txBox="1"/>
+          <p:nvPr/>
+        </p:nvSpPr>
+        <p:spPr>
+          <a:xfrm>
+            <a:off x="1228432" y="3570372"/>
+            <a:ext cx="2129622" cy="369332"/>
+          </a:xfrm>
+          <a:prstGeom prst="rect">
+            <a:avLst/>
+          </a:prstGeom>
+          <a:noFill/>
+        </p:spPr>
+        <p:txBody>
+          <a:bodyPr wrap="none" rtlCol="0">
+            <a:spAutoFit/>
+          </a:bodyPr>
+          <a:lstStyle/>
+          <a:p>
+            <a:r>
+              <a:rPr lang="es-ES" dirty="0"/>
+              <a:t>2.3. </a:t>
+            </a:r>
+            <a:r>
+              <a:rPr lang="es-ES" dirty="0" err="1"/>
+              <a:t>Delay</a:t>
+            </a:r>
+            <a:r>
+              <a:rPr lang="es-ES" dirty="0"/>
+              <a:t> </a:t>
+            </a:r>
+            <a:r>
+              <a:rPr lang="es-ES" dirty="0" err="1"/>
+              <a:t>imbalance</a:t>
+            </a:r>
+            <a:endParaRPr lang="es-ES" dirty="0"/>
+          </a:p>
+        </p:txBody>
+      </p:sp>
+      <p:pic>
+        <p:nvPicPr>
+          <p:cNvPr id="12" name="Imagen 11">
+            <a:extLst>
+              <a:ext uri="{FF2B5EF4-FFF2-40B4-BE49-F238E27FC236}">
+                <a16:creationId xmlns:a16="http://schemas.microsoft.com/office/drawing/2014/main" id="{2FEF3F82-C8DE-460D-90BA-DDABD3421B82}"/>
+              </a:ext>
+            </a:extLst>
+          </p:cNvPr>
+          <p:cNvPicPr>
+            <a:picLocks noChangeAspect="1"/>
+          </p:cNvPicPr>
+          <p:nvPr/>
+        </p:nvPicPr>
+        <p:blipFill>
+          <a:blip r:embed="rId3"/>
+          <a:stretch>
+            <a:fillRect/>
+          </a:stretch>
+        </p:blipFill>
+        <p:spPr>
+          <a:xfrm>
+            <a:off x="1828800" y="3958918"/>
+            <a:ext cx="2971800" cy="2384778"/>
+          </a:xfrm>
+          <a:prstGeom prst="rect">
+            <a:avLst/>
+          </a:prstGeom>
+        </p:spPr>
+      </p:pic>
+      <p:sp>
+        <p:nvSpPr>
+          <p:cNvPr id="13" name="CuadroTexto 12">
+            <a:extLst>
+              <a:ext uri="{FF2B5EF4-FFF2-40B4-BE49-F238E27FC236}">
+                <a16:creationId xmlns:a16="http://schemas.microsoft.com/office/drawing/2014/main" id="{E2E8C070-9AF3-400F-BEA5-FF0A837A9043}"/>
+              </a:ext>
+            </a:extLst>
+          </p:cNvPr>
+          <p:cNvSpPr txBox="1"/>
+          <p:nvPr/>
+        </p:nvSpPr>
+        <p:spPr>
+          <a:xfrm>
+            <a:off x="5486400" y="4148021"/>
+            <a:ext cx="5823638" cy="1015663"/>
+          </a:xfrm>
+          <a:prstGeom prst="rect">
+            <a:avLst/>
+          </a:prstGeom>
+          <a:solidFill>
+            <a:schemeClr val="bg1">
+              <a:lumMod val="95000"/>
+            </a:schemeClr>
+          </a:solidFill>
+          <a:ln w="28575">
+            <a:solidFill>
+              <a:srgbClr val="E0700D"/>
+            </a:solidFill>
+          </a:ln>
+        </p:spPr>
+        <p:txBody>
+          <a:bodyPr wrap="square" rtlCol="0">
+            <a:spAutoFit/>
+          </a:bodyPr>
+          <a:lstStyle/>
+          <a:p>
+            <a:pPr algn="just"/>
+            <a:r>
+              <a:rPr lang="en-US" sz="1200" dirty="0">
+                <a:latin typeface="Arial" panose="020B0604020202020204" pitchFamily="34" charset="0"/>
+                <a:cs typeface="Arial" panose="020B0604020202020204" pitchFamily="34" charset="0"/>
+              </a:rPr>
+              <a:t>Document all your results (</a:t>
+            </a:r>
+            <a:r>
+              <a:rPr lang="en-US" sz="1200" dirty="0" err="1">
+                <a:latin typeface="Arial" panose="020B0604020202020204" pitchFamily="34" charset="0"/>
+                <a:cs typeface="Arial" panose="020B0604020202020204" pitchFamily="34" charset="0"/>
+              </a:rPr>
+              <a:t>neff</a:t>
+            </a:r>
+            <a:r>
+              <a:rPr lang="en-US" sz="1200" dirty="0">
+                <a:latin typeface="Arial" panose="020B0604020202020204" pitchFamily="34" charset="0"/>
+                <a:cs typeface="Arial" panose="020B0604020202020204" pitchFamily="34" charset="0"/>
+              </a:rPr>
+              <a:t>, alpha, gamma, transfer function plots, etc.) and comment on the obtained results (in terms of FSR, amplitude, losses, etc.).</a:t>
+            </a:r>
+          </a:p>
+          <a:p>
+            <a:pPr algn="just"/>
+            <a:endParaRPr lang="en-US" sz="1200" dirty="0">
+              <a:latin typeface="Arial" panose="020B0604020202020204" pitchFamily="34" charset="0"/>
+              <a:cs typeface="Arial" panose="020B0604020202020204" pitchFamily="34" charset="0"/>
+            </a:endParaRPr>
+          </a:p>
+          <a:p>
+            <a:pPr algn="just"/>
+            <a:endParaRPr lang="en-US" sz="1200" dirty="0">
+              <a:latin typeface="Arial" panose="020B0604020202020204" pitchFamily="34" charset="0"/>
+              <a:cs typeface="Arial" panose="020B0604020202020204" pitchFamily="34" charset="0"/>
+            </a:endParaRPr>
+          </a:p>
+          <a:p>
+            <a:pPr algn="just"/>
+            <a:endParaRPr lang="en-US" sz="1200" dirty="0">
+              <a:latin typeface="Arial" panose="020B0604020202020204" pitchFamily="34" charset="0"/>
+              <a:cs typeface="Arial" panose="020B0604020202020204" pitchFamily="34" charset="0"/>
+            </a:endParaRPr>
+          </a:p>
+        </p:txBody>
+      </p:sp>
+    </p:spTree>
+    <p:extLst>
+      <p:ext uri="{BB962C8B-B14F-4D97-AF65-F5344CB8AC3E}">
+        <p14:creationId xmlns:p14="http://schemas.microsoft.com/office/powerpoint/2010/main" val="804987281"/>
+      </p:ext>
+    </p:extLst>
+  </p:cSld>
+  <p:clrMapOvr>
+    <a:masterClrMapping/>
+  </p:clrMapOvr>
+</p:sld>
+</file>
+
+<file path=ppt/slides/slide5.xml><?xml version="1.0" encoding="utf-8"?>
+<p:sld xmlns:a="http://schemas.openxmlformats.org/drawingml/2006/main" xmlns:r="http://schemas.openxmlformats.org/officeDocument/2006/relationships" xmlns:p="http://schemas.openxmlformats.org/presentationml/2006/main">
+  <p:cSld>
+    <p:spTree>
+      <p:nvGrpSpPr>
+        <p:cNvPr id="1" name=""/>
+        <p:cNvGrpSpPr/>
+        <p:nvPr/>
+      </p:nvGrpSpPr>
+      <p:grpSpPr>
+        <a:xfrm>
+          <a:off x="0" y="0"/>
+          <a:ext cx="0" cy="0"/>
+          <a:chOff x="0" y="0"/>
+          <a:chExt cx="0" cy="0"/>
+        </a:xfrm>
+      </p:grpSpPr>
+      <mc:AlternateContent xmlns:mc="http://schemas.openxmlformats.org/markup-compatibility/2006">
+        <mc:Choice xmlns:a14="http://schemas.microsoft.com/office/drawing/2010/main" Requires="a14">
+          <p:sp>
+            <p:nvSpPr>
+              <p:cNvPr id="3" name="Marcador de texto 2">
+                <a:extLst>
+                  <a:ext uri="{FF2B5EF4-FFF2-40B4-BE49-F238E27FC236}">
+                    <a16:creationId xmlns:a16="http://schemas.microsoft.com/office/drawing/2014/main" id="{E2FBD92A-428D-44A9-B4D8-2CCBC8BEC787}"/>
+                  </a:ext>
+                </a:extLst>
+              </p:cNvPr>
+              <p:cNvSpPr>
+                <a:spLocks noGrp="1"/>
+              </p:cNvSpPr>
+              <p:nvPr>
+                <p:ph type="body" idx="1"/>
+              </p:nvPr>
+            </p:nvSpPr>
+            <p:spPr>
+              <a:xfrm>
+                <a:off x="1066800" y="589339"/>
+                <a:ext cx="1066800" cy="276999"/>
+              </a:xfrm>
+            </p:spPr>
+            <p:txBody>
+              <a:bodyPr/>
+              <a:lstStyle/>
+              <a:p>
+                <a14:m>
+                  <m:oMathPara xmlns:m="http://schemas.openxmlformats.org/officeDocument/2006/math">
+                    <m:oMathParaPr>
+                      <m:jc m:val="centerGroup"/>
+                    </m:oMathParaPr>
+                    <m:oMath xmlns:m="http://schemas.openxmlformats.org/officeDocument/2006/math">
+                      <m:r>
+                        <m:rPr>
+                          <m:sty m:val="p"/>
+                        </m:rPr>
+                        <a:rPr lang="es-ES" sz="1800" b="0" i="1" smtClean="0">
+                          <a:latin typeface="Cambria Math" panose="02040503050406030204" pitchFamily="18" charset="0"/>
+                        </a:rPr>
+                        <m:t>α</m:t>
+                      </m:r>
+                      <m:r>
+                        <a:rPr lang="es-ES" sz="1800" b="0" i="1" smtClean="0">
+                          <a:latin typeface="Cambria Math" panose="02040503050406030204" pitchFamily="18" charset="0"/>
+                        </a:rPr>
+                        <m:t>=0.7</m:t>
+                      </m:r>
+                    </m:oMath>
+                  </m:oMathPara>
+                </a14:m>
+                <a:endParaRPr lang="es-ES" dirty="0"/>
+              </a:p>
+            </p:txBody>
+          </p:sp>
+        </mc:Choice>
+        <mc:Fallback>
+          <p:sp>
+            <p:nvSpPr>
+              <p:cNvPr id="3" name="Marcador de texto 2">
+                <a:extLst>
+                  <a:ext uri="{FF2B5EF4-FFF2-40B4-BE49-F238E27FC236}">
+                    <a16:creationId xmlns:a16="http://schemas.microsoft.com/office/drawing/2014/main" id="{E2FBD92A-428D-44A9-B4D8-2CCBC8BEC787}"/>
+                  </a:ext>
+                </a:extLst>
+              </p:cNvPr>
+              <p:cNvSpPr>
+                <a:spLocks noGrp="1" noRot="1" noChangeAspect="1" noMove="1" noResize="1" noEditPoints="1" noAdjustHandles="1" noChangeArrowheads="1" noChangeShapeType="1" noTextEdit="1"/>
+              </p:cNvSpPr>
+              <p:nvPr>
+                <p:ph type="body" idx="1"/>
+              </p:nvPr>
+            </p:nvSpPr>
+            <p:spPr>
+              <a:xfrm>
+                <a:off x="1066800" y="589339"/>
+                <a:ext cx="1066800" cy="276999"/>
+              </a:xfrm>
+              <a:blipFill>
+                <a:blip r:embed="rId2"/>
+                <a:stretch>
+                  <a:fillRect b="-6667"/>
+                </a:stretch>
+              </a:blipFill>
+            </p:spPr>
+            <p:txBody>
+              <a:bodyPr/>
+              <a:lstStyle/>
+              <a:p>
+                <a:r>
+                  <a:rPr lang="es-ES">
+                    <a:noFill/>
+                  </a:rPr>
+                  <a:t> </a:t>
+                </a:r>
+              </a:p>
+            </p:txBody>
+          </p:sp>
+        </mc:Fallback>
+      </mc:AlternateContent>
+      <p:sp>
+        <p:nvSpPr>
+          <p:cNvPr id="4" name="Marcador de pie de página 3">
+            <a:extLst>
+              <a:ext uri="{FF2B5EF4-FFF2-40B4-BE49-F238E27FC236}">
+                <a16:creationId xmlns:a16="http://schemas.microsoft.com/office/drawing/2014/main" id="{18DEB5E0-EC07-4509-A203-60E8690966AD}"/>
+              </a:ext>
+            </a:extLst>
+          </p:cNvPr>
+          <p:cNvSpPr>
+            <a:spLocks noGrp="1"/>
+          </p:cNvSpPr>
+          <p:nvPr>
+            <p:ph type="ftr" sz="quarter" idx="5"/>
+          </p:nvPr>
+        </p:nvSpPr>
+        <p:spPr/>
+        <p:txBody>
+          <a:bodyPr/>
+          <a:lstStyle/>
+          <a:p>
+            <a:pPr marL="12700">
+              <a:spcBef>
+                <a:spcPts val="15"/>
+              </a:spcBef>
+            </a:pPr>
+            <a:r>
+              <a:rPr lang="es-ES" spc="-5"/>
+              <a:t>LAB 3. INTERFEROMETERS I</a:t>
+            </a:r>
+            <a:endParaRPr lang="es-ES" spc="-5" dirty="0"/>
+          </a:p>
+        </p:txBody>
+      </p:sp>
+      <p:sp>
+        <p:nvSpPr>
+          <p:cNvPr id="5" name="Marcador de número de diapositiva 4">
+            <a:extLst>
+              <a:ext uri="{FF2B5EF4-FFF2-40B4-BE49-F238E27FC236}">
+                <a16:creationId xmlns:a16="http://schemas.microsoft.com/office/drawing/2014/main" id="{0E37DA95-1EB3-44E7-8F2B-FB1C0DCB6446}"/>
+              </a:ext>
+            </a:extLst>
+          </p:cNvPr>
+          <p:cNvSpPr>
+            <a:spLocks noGrp="1"/>
+          </p:cNvSpPr>
+          <p:nvPr>
+            <p:ph type="sldNum" sz="quarter" idx="7"/>
+          </p:nvPr>
+        </p:nvSpPr>
+        <p:spPr/>
+        <p:txBody>
+          <a:bodyPr/>
+          <a:lstStyle/>
+          <a:p>
+            <a:fld id="{B6F15528-21DE-4FAA-801E-634DDDAF4B2B}" type="slidenum">
+              <a:rPr lang="es-ES" smtClean="0"/>
+              <a:t>5</a:t>
+            </a:fld>
+            <a:endParaRPr lang="es-ES"/>
+          </a:p>
+        </p:txBody>
+      </p:sp>
+      <p:pic>
+        <p:nvPicPr>
+          <p:cNvPr id="7" name="Imagen 6">
+            <a:extLst>
+              <a:ext uri="{FF2B5EF4-FFF2-40B4-BE49-F238E27FC236}">
+                <a16:creationId xmlns:a16="http://schemas.microsoft.com/office/drawing/2014/main" id="{35F24F7B-8A42-4DBC-9AA0-65607CAA1546}"/>
+              </a:ext>
+            </a:extLst>
+          </p:cNvPr>
+          <p:cNvPicPr>
+            <a:picLocks noChangeAspect="1"/>
+          </p:cNvPicPr>
+          <p:nvPr/>
+        </p:nvPicPr>
+        <p:blipFill>
+          <a:blip r:embed="rId3"/>
+          <a:stretch>
+            <a:fillRect/>
+          </a:stretch>
+        </p:blipFill>
+        <p:spPr>
+          <a:xfrm>
+            <a:off x="958162" y="900906"/>
+            <a:ext cx="3200400" cy="2528094"/>
+          </a:xfrm>
+          <a:prstGeom prst="rect">
+            <a:avLst/>
+          </a:prstGeom>
+        </p:spPr>
+      </p:pic>
+      <p:sp>
+        <p:nvSpPr>
+          <p:cNvPr id="8" name="CuadroTexto 7">
+            <a:extLst>
+              <a:ext uri="{FF2B5EF4-FFF2-40B4-BE49-F238E27FC236}">
+                <a16:creationId xmlns:a16="http://schemas.microsoft.com/office/drawing/2014/main" id="{A3016BFD-32A5-437E-A3F7-5663748A47D3}"/>
+              </a:ext>
+            </a:extLst>
+          </p:cNvPr>
+          <p:cNvSpPr txBox="1"/>
+          <p:nvPr/>
+        </p:nvSpPr>
+        <p:spPr>
+          <a:xfrm>
+            <a:off x="5410200" y="1143000"/>
+            <a:ext cx="5823638" cy="1015663"/>
+          </a:xfrm>
+          <a:prstGeom prst="rect">
+            <a:avLst/>
+          </a:prstGeom>
+          <a:solidFill>
+            <a:schemeClr val="bg1">
+              <a:lumMod val="95000"/>
+            </a:schemeClr>
+          </a:solidFill>
+          <a:ln w="28575">
+            <a:solidFill>
+              <a:srgbClr val="E0700D"/>
+            </a:solidFill>
+          </a:ln>
+        </p:spPr>
+        <p:txBody>
+          <a:bodyPr wrap="square" rtlCol="0">
+            <a:spAutoFit/>
+          </a:bodyPr>
+          <a:lstStyle/>
+          <a:p>
+            <a:pPr algn="just"/>
+            <a:r>
+              <a:rPr lang="en-US" sz="1200" dirty="0">
+                <a:latin typeface="Arial" panose="020B0604020202020204" pitchFamily="34" charset="0"/>
+                <a:cs typeface="Arial" panose="020B0604020202020204" pitchFamily="34" charset="0"/>
+              </a:rPr>
+              <a:t>Document all your results (</a:t>
+            </a:r>
+            <a:r>
+              <a:rPr lang="en-US" sz="1200" dirty="0" err="1">
+                <a:latin typeface="Arial" panose="020B0604020202020204" pitchFamily="34" charset="0"/>
+                <a:cs typeface="Arial" panose="020B0604020202020204" pitchFamily="34" charset="0"/>
+              </a:rPr>
+              <a:t>neff</a:t>
+            </a:r>
+            <a:r>
+              <a:rPr lang="en-US" sz="1200" dirty="0">
+                <a:latin typeface="Arial" panose="020B0604020202020204" pitchFamily="34" charset="0"/>
+                <a:cs typeface="Arial" panose="020B0604020202020204" pitchFamily="34" charset="0"/>
+              </a:rPr>
+              <a:t>, alpha, gamma, transfer function plots, etc.) and comment on the obtained results (in terms of FSR, amplitude, losses, etc.).</a:t>
+            </a:r>
+          </a:p>
+          <a:p>
+            <a:pPr algn="just"/>
+            <a:endParaRPr lang="en-US" sz="1200" dirty="0">
+              <a:latin typeface="Arial" panose="020B0604020202020204" pitchFamily="34" charset="0"/>
+              <a:cs typeface="Arial" panose="020B0604020202020204" pitchFamily="34" charset="0"/>
+            </a:endParaRPr>
+          </a:p>
+          <a:p>
+            <a:pPr algn="just"/>
+            <a:endParaRPr lang="en-US" sz="1200" dirty="0">
+              <a:latin typeface="Arial" panose="020B0604020202020204" pitchFamily="34" charset="0"/>
+              <a:cs typeface="Arial" panose="020B0604020202020204" pitchFamily="34" charset="0"/>
+            </a:endParaRPr>
+          </a:p>
+          <a:p>
+            <a:pPr algn="just"/>
+            <a:endParaRPr lang="en-US" sz="1200" dirty="0">
+              <a:latin typeface="Arial" panose="020B0604020202020204" pitchFamily="34" charset="0"/>
+              <a:cs typeface="Arial" panose="020B0604020202020204" pitchFamily="34" charset="0"/>
+            </a:endParaRPr>
+          </a:p>
+        </p:txBody>
+      </p:sp>
+      <mc:AlternateContent xmlns:mc="http://schemas.openxmlformats.org/markup-compatibility/2006">
+        <mc:Choice xmlns:a14="http://schemas.microsoft.com/office/drawing/2010/main" Requires="a14">
+          <p:sp>
+            <p:nvSpPr>
+              <p:cNvPr id="10" name="CuadroTexto 9">
+                <a:extLst>
+                  <a:ext uri="{FF2B5EF4-FFF2-40B4-BE49-F238E27FC236}">
+                    <a16:creationId xmlns:a16="http://schemas.microsoft.com/office/drawing/2014/main" id="{F2403C49-8B32-4433-92CE-37E15DA15B60}"/>
+                  </a:ext>
+                </a:extLst>
+              </p:cNvPr>
+              <p:cNvSpPr txBox="1"/>
+              <p:nvPr/>
+            </p:nvSpPr>
+            <p:spPr>
+              <a:xfrm>
+                <a:off x="1295400" y="3455803"/>
+                <a:ext cx="974725" cy="369332"/>
+              </a:xfrm>
+              <a:prstGeom prst="rect">
+                <a:avLst/>
+              </a:prstGeom>
+              <a:noFill/>
+            </p:spPr>
+            <p:txBody>
+              <a:bodyPr wrap="square">
+                <a:spAutoFit/>
+              </a:bodyPr>
+              <a:lstStyle/>
+              <a:p>
+                <a:pPr/>
+                <a14:m>
+                  <m:oMathPara xmlns:m="http://schemas.openxmlformats.org/officeDocument/2006/math">
+                    <m:oMathParaPr>
+                      <m:jc m:val="centerGroup"/>
+                    </m:oMathParaPr>
+                    <m:oMath xmlns:m="http://schemas.openxmlformats.org/officeDocument/2006/math">
+                      <m:r>
+                        <m:rPr>
+                          <m:sty m:val="p"/>
+                        </m:rPr>
+                        <a:rPr lang="es-ES" sz="1800" i="1" smtClean="0">
+                          <a:latin typeface="Cambria Math" panose="02040503050406030204" pitchFamily="18" charset="0"/>
+                        </a:rPr>
+                        <m:t>γ</m:t>
+                      </m:r>
+                      <m:r>
+                        <a:rPr lang="es-ES" sz="1800" b="0" i="1" smtClean="0">
+                          <a:latin typeface="Cambria Math" panose="02040503050406030204" pitchFamily="18" charset="0"/>
+                        </a:rPr>
+                        <m:t>=</m:t>
+                      </m:r>
+                      <m:r>
+                        <a:rPr lang="es-ES" sz="1800" i="1">
+                          <a:latin typeface="Cambria Math" panose="02040503050406030204" pitchFamily="18" charset="0"/>
+                          <a:ea typeface="Cambria Math" panose="02040503050406030204" pitchFamily="18" charset="0"/>
+                        </a:rPr>
+                        <m:t>0</m:t>
+                      </m:r>
+                      <m:r>
+                        <a:rPr lang="es-ES" sz="1800" b="0" i="1" smtClean="0">
+                          <a:latin typeface="Cambria Math" panose="02040503050406030204" pitchFamily="18" charset="0"/>
+                          <a:ea typeface="Cambria Math" panose="02040503050406030204" pitchFamily="18" charset="0"/>
+                        </a:rPr>
+                        <m:t>.4</m:t>
+                      </m:r>
+                    </m:oMath>
+                  </m:oMathPara>
+                </a14:m>
+                <a:endParaRPr lang="es-ES" dirty="0"/>
+              </a:p>
+            </p:txBody>
+          </p:sp>
+        </mc:Choice>
+        <mc:Fallback>
+          <p:sp>
+            <p:nvSpPr>
+              <p:cNvPr id="10" name="CuadroTexto 9">
+                <a:extLst>
+                  <a:ext uri="{FF2B5EF4-FFF2-40B4-BE49-F238E27FC236}">
+                    <a16:creationId xmlns:a16="http://schemas.microsoft.com/office/drawing/2014/main" id="{F2403C49-8B32-4433-92CE-37E15DA15B60}"/>
+                  </a:ext>
+                </a:extLst>
+              </p:cNvPr>
+              <p:cNvSpPr txBox="1">
+                <a:spLocks noRot="1" noChangeAspect="1" noMove="1" noResize="1" noEditPoints="1" noAdjustHandles="1" noChangeArrowheads="1" noChangeShapeType="1" noTextEdit="1"/>
+              </p:cNvSpPr>
+              <p:nvPr/>
+            </p:nvSpPr>
+            <p:spPr>
+              <a:xfrm>
+                <a:off x="1295400" y="3455803"/>
+                <a:ext cx="974725" cy="369332"/>
+              </a:xfrm>
+              <a:prstGeom prst="rect">
+                <a:avLst/>
+              </a:prstGeom>
+              <a:blipFill>
+                <a:blip r:embed="rId4"/>
+                <a:stretch>
+                  <a:fillRect b="-5000"/>
+                </a:stretch>
+              </a:blipFill>
+            </p:spPr>
+            <p:txBody>
+              <a:bodyPr/>
+              <a:lstStyle/>
+              <a:p>
+                <a:r>
+                  <a:rPr lang="es-ES">
+                    <a:noFill/>
+                  </a:rPr>
+                  <a:t> </a:t>
+                </a:r>
+              </a:p>
+            </p:txBody>
+          </p:sp>
+        </mc:Fallback>
+      </mc:AlternateContent>
+      <p:pic>
+        <p:nvPicPr>
+          <p:cNvPr id="12" name="Imagen 11">
+            <a:extLst>
+              <a:ext uri="{FF2B5EF4-FFF2-40B4-BE49-F238E27FC236}">
+                <a16:creationId xmlns:a16="http://schemas.microsoft.com/office/drawing/2014/main" id="{C6D71D96-52F7-49DE-8681-E3C528396B8B}"/>
+              </a:ext>
+            </a:extLst>
+          </p:cNvPr>
+          <p:cNvPicPr>
+            <a:picLocks noChangeAspect="1"/>
+          </p:cNvPicPr>
+          <p:nvPr/>
+        </p:nvPicPr>
+        <p:blipFill>
+          <a:blip r:embed="rId5"/>
+          <a:stretch>
+            <a:fillRect/>
+          </a:stretch>
+        </p:blipFill>
+        <p:spPr>
+          <a:xfrm>
+            <a:off x="1080615" y="3810516"/>
+            <a:ext cx="3094880" cy="2483545"/>
+          </a:xfrm>
+          <a:prstGeom prst="rect">
+            <a:avLst/>
+          </a:prstGeom>
+        </p:spPr>
+      </p:pic>
+      <p:sp>
+        <p:nvSpPr>
+          <p:cNvPr id="13" name="CuadroTexto 12">
+            <a:extLst>
+              <a:ext uri="{FF2B5EF4-FFF2-40B4-BE49-F238E27FC236}">
+                <a16:creationId xmlns:a16="http://schemas.microsoft.com/office/drawing/2014/main" id="{90B18193-D0F9-4387-B789-E09B38E10542}"/>
+              </a:ext>
+            </a:extLst>
+          </p:cNvPr>
+          <p:cNvSpPr txBox="1"/>
+          <p:nvPr/>
+        </p:nvSpPr>
+        <p:spPr>
+          <a:xfrm>
+            <a:off x="5321614" y="4036625"/>
+            <a:ext cx="5823638" cy="1015663"/>
+          </a:xfrm>
+          <a:prstGeom prst="rect">
+            <a:avLst/>
+          </a:prstGeom>
+          <a:solidFill>
+            <a:schemeClr val="bg1">
+              <a:lumMod val="95000"/>
+            </a:schemeClr>
+          </a:solidFill>
+          <a:ln w="28575">
+            <a:solidFill>
+              <a:srgbClr val="E0700D"/>
+            </a:solidFill>
+          </a:ln>
+        </p:spPr>
+        <p:txBody>
+          <a:bodyPr wrap="square" rtlCol="0">
+            <a:spAutoFit/>
+          </a:bodyPr>
+          <a:lstStyle/>
+          <a:p>
+            <a:pPr algn="just"/>
+            <a:r>
+              <a:rPr lang="en-US" sz="1200" dirty="0">
+                <a:latin typeface="Arial" panose="020B0604020202020204" pitchFamily="34" charset="0"/>
+                <a:cs typeface="Arial" panose="020B0604020202020204" pitchFamily="34" charset="0"/>
+              </a:rPr>
+              <a:t>Document all your results (</a:t>
+            </a:r>
+            <a:r>
+              <a:rPr lang="en-US" sz="1200" dirty="0" err="1">
+                <a:latin typeface="Arial" panose="020B0604020202020204" pitchFamily="34" charset="0"/>
+                <a:cs typeface="Arial" panose="020B0604020202020204" pitchFamily="34" charset="0"/>
+              </a:rPr>
+              <a:t>neff</a:t>
+            </a:r>
+            <a:r>
+              <a:rPr lang="en-US" sz="1200" dirty="0">
+                <a:latin typeface="Arial" panose="020B0604020202020204" pitchFamily="34" charset="0"/>
+                <a:cs typeface="Arial" panose="020B0604020202020204" pitchFamily="34" charset="0"/>
+              </a:rPr>
+              <a:t>, alpha, gamma, transfer function plots, etc.) and comment on the obtained results (in terms of FSR, amplitude, losses, etc.).</a:t>
+            </a:r>
+          </a:p>
+          <a:p>
+            <a:pPr algn="just"/>
+            <a:endParaRPr lang="en-US" sz="1200" dirty="0">
+              <a:latin typeface="Arial" panose="020B0604020202020204" pitchFamily="34" charset="0"/>
+              <a:cs typeface="Arial" panose="020B0604020202020204" pitchFamily="34" charset="0"/>
+            </a:endParaRPr>
+          </a:p>
+          <a:p>
+            <a:pPr algn="just"/>
+            <a:endParaRPr lang="en-US" sz="1200" dirty="0">
+              <a:latin typeface="Arial" panose="020B0604020202020204" pitchFamily="34" charset="0"/>
+              <a:cs typeface="Arial" panose="020B0604020202020204" pitchFamily="34" charset="0"/>
+            </a:endParaRPr>
+          </a:p>
+          <a:p>
+            <a:pPr algn="just"/>
+            <a:endParaRPr lang="en-US" sz="1200" dirty="0">
+              <a:latin typeface="Arial" panose="020B0604020202020204" pitchFamily="34" charset="0"/>
+              <a:cs typeface="Arial" panose="020B0604020202020204" pitchFamily="34" charset="0"/>
+            </a:endParaRPr>
+          </a:p>
+        </p:txBody>
+      </p:sp>
+    </p:spTree>
+    <p:extLst>
+      <p:ext uri="{BB962C8B-B14F-4D97-AF65-F5344CB8AC3E}">
+        <p14:creationId xmlns:p14="http://schemas.microsoft.com/office/powerpoint/2010/main" val="3669302299"/>
+      </p:ext>
+    </p:extLst>
+  </p:cSld>
+  <p:clrMapOvr>
+    <a:masterClrMapping/>
+  </p:clrMapOvr>
+</p:sld>
+</file>
+
+<file path=ppt/slides/slide6.xml><?xml version="1.0" encoding="utf-8"?>
 <p:sld xmlns:a="http://schemas.openxmlformats.org/drawingml/2006/main" xmlns:r="http://schemas.openxmlformats.org/officeDocument/2006/relationships" xmlns:p="http://schemas.openxmlformats.org/presentationml/2006/main">
   <p:cSld>
     <p:spTree>
@@ -5096,7 +6180,7 @@
           <a:p>
             <a:fld id="{B6F15528-21DE-4FAA-801E-634DDDAF4B2B}" type="slidenum">
               <a:rPr lang="es-ES" smtClean="0"/>
-              <a:t>4</a:t>
+              <a:t>6</a:t>
             </a:fld>
             <a:endParaRPr lang="es-ES"/>
           </a:p>
@@ -5417,8 +6501,8 @@
         </p:nvSpPr>
         <p:spPr>
           <a:xfrm>
-            <a:off x="609441" y="4860334"/>
-            <a:ext cx="11199971" cy="1384995"/>
+            <a:off x="6096000" y="3628904"/>
+            <a:ext cx="5487988" cy="1569660"/>
           </a:xfrm>
           <a:prstGeom prst="rect">
             <a:avLst/>
@@ -5532,6 +6616,66 @@
           </a:p>
         </p:txBody>
       </p:sp>
+      <p:pic>
+        <p:nvPicPr>
+          <p:cNvPr id="6" name="Imagen 5">
+            <a:extLst>
+              <a:ext uri="{FF2B5EF4-FFF2-40B4-BE49-F238E27FC236}">
+                <a16:creationId xmlns:a16="http://schemas.microsoft.com/office/drawing/2014/main" id="{8B6812ED-C19E-4322-B404-9DF3D2B1F072}"/>
+              </a:ext>
+            </a:extLst>
+          </p:cNvPr>
+          <p:cNvPicPr>
+            <a:picLocks noChangeAspect="1"/>
+          </p:cNvPicPr>
+          <p:nvPr/>
+        </p:nvPicPr>
+        <p:blipFill>
+          <a:blip r:embed="rId7"/>
+          <a:stretch>
+            <a:fillRect/>
+          </a:stretch>
+        </p:blipFill>
+        <p:spPr>
+          <a:xfrm>
+            <a:off x="719667" y="3124200"/>
+            <a:ext cx="5601482" cy="228632"/>
+          </a:xfrm>
+          <a:prstGeom prst="rect">
+            <a:avLst/>
+          </a:prstGeom>
+        </p:spPr>
+      </p:pic>
+      <p:pic>
+        <p:nvPicPr>
+          <p:cNvPr id="8" name="Imagen 7">
+            <a:extLst>
+              <a:ext uri="{FF2B5EF4-FFF2-40B4-BE49-F238E27FC236}">
+                <a16:creationId xmlns:a16="http://schemas.microsoft.com/office/drawing/2014/main" id="{5F8CA90C-DF89-4163-BFFC-701458D81376}"/>
+              </a:ext>
+            </a:extLst>
+          </p:cNvPr>
+          <p:cNvPicPr>
+            <a:picLocks noChangeAspect="1"/>
+          </p:cNvPicPr>
+          <p:nvPr/>
+        </p:nvPicPr>
+        <p:blipFill>
+          <a:blip r:embed="rId8"/>
+          <a:stretch>
+            <a:fillRect/>
+          </a:stretch>
+        </p:blipFill>
+        <p:spPr>
+          <a:xfrm>
+            <a:off x="1545431" y="3455352"/>
+            <a:ext cx="3499575" cy="2808301"/>
+          </a:xfrm>
+          <a:prstGeom prst="rect">
+            <a:avLst/>
+          </a:prstGeom>
+        </p:spPr>
+      </p:pic>
     </p:spTree>
     <p:extLst>
       <p:ext uri="{BB962C8B-B14F-4D97-AF65-F5344CB8AC3E}">
@@ -5545,7 +6689,7 @@
 </p:sld>
 </file>
 
-<file path=ppt/slides/slide5.xml><?xml version="1.0" encoding="utf-8"?>
+<file path=ppt/slides/slide7.xml><?xml version="1.0" encoding="utf-8"?>
 <p:sld xmlns:a="http://schemas.openxmlformats.org/drawingml/2006/main" xmlns:r="http://schemas.openxmlformats.org/officeDocument/2006/relationships" xmlns:p="http://schemas.openxmlformats.org/presentationml/2006/main">
   <p:cSld>
     <p:spTree>
@@ -5687,7 +6831,7 @@
           <a:p>
             <a:fld id="{B6F15528-21DE-4FAA-801E-634DDDAF4B2B}" type="slidenum">
               <a:rPr lang="es-ES" smtClean="0"/>
-              <a:t>5</a:t>
+              <a:t>7</a:t>
             </a:fld>
             <a:endParaRPr lang="es-ES"/>
           </a:p>
@@ -6273,7 +7417,7 @@
 </p:sld>
 </file>
 
-<file path=ppt/slides/slide6.xml><?xml version="1.0" encoding="utf-8"?>
+<file path=ppt/slides/slide8.xml><?xml version="1.0" encoding="utf-8"?>
 <p:sld xmlns:a="http://schemas.openxmlformats.org/drawingml/2006/main" xmlns:r="http://schemas.openxmlformats.org/officeDocument/2006/relationships" xmlns:p="http://schemas.openxmlformats.org/presentationml/2006/main">
   <p:cSld>
     <p:spTree>
@@ -6405,7 +7549,7 @@
           <a:p>
             <a:fld id="{B6F15528-21DE-4FAA-801E-634DDDAF4B2B}" type="slidenum">
               <a:rPr lang="es-ES" smtClean="0"/>
-              <a:t>6</a:t>
+              <a:t>8</a:t>
             </a:fld>
             <a:endParaRPr lang="es-ES"/>
           </a:p>
@@ -6702,7 +7846,7 @@
 </p:sld>
 </file>
 
-<file path=ppt/slides/slide7.xml><?xml version="1.0" encoding="utf-8"?>
+<file path=ppt/slides/slide9.xml><?xml version="1.0" encoding="utf-8"?>
 <p:sld xmlns:a="http://schemas.openxmlformats.org/drawingml/2006/main" xmlns:r="http://schemas.openxmlformats.org/officeDocument/2006/relationships" xmlns:p="http://schemas.openxmlformats.org/presentationml/2006/main">
   <p:cSld>
     <p:spTree>
@@ -6841,7 +7985,7 @@
           <a:p>
             <a:fld id="{B6F15528-21DE-4FAA-801E-634DDDAF4B2B}" type="slidenum">
               <a:rPr lang="es-ES" smtClean="0"/>
-              <a:t>7</a:t>
+              <a:t>9</a:t>
             </a:fld>
             <a:endParaRPr lang="es-ES"/>
           </a:p>

--- a/LabBook_3.pptx
+++ b/LabBook_3.pptx
@@ -5,10 +5,10 @@
     <p:sldMasterId id="2147483648" r:id="rId1"/>
   </p:sldMasterIdLst>
   <p:notesMasterIdLst>
-    <p:notesMasterId r:id="rId11"/>
+    <p:notesMasterId r:id="rId14"/>
   </p:notesMasterIdLst>
   <p:handoutMasterIdLst>
-    <p:handoutMasterId r:id="rId12"/>
+    <p:handoutMasterId r:id="rId15"/>
   </p:handoutMasterIdLst>
   <p:sldIdLst>
     <p:sldId id="256" r:id="rId2"/>
@@ -18,8 +18,11 @@
     <p:sldId id="298" r:id="rId6"/>
     <p:sldId id="295" r:id="rId7"/>
     <p:sldId id="296" r:id="rId8"/>
-    <p:sldId id="293" r:id="rId9"/>
-    <p:sldId id="288" r:id="rId10"/>
+    <p:sldId id="299" r:id="rId9"/>
+    <p:sldId id="293" r:id="rId10"/>
+    <p:sldId id="300" r:id="rId11"/>
+    <p:sldId id="301" r:id="rId12"/>
+    <p:sldId id="288" r:id="rId13"/>
   </p:sldIdLst>
   <p:sldSz cx="12192000" cy="6858000"/>
   <p:notesSz cx="12192000" cy="6858000"/>
@@ -234,7 +237,7 @@
           <a:p>
             <a:fld id="{8438F8DC-35B0-48E6-A86E-42F1F08DD00F}" type="datetimeFigureOut">
               <a:rPr lang="es-ES" smtClean="0"/>
-              <a:t>09/03/2026</a:t>
+              <a:t>23/03/2026</a:t>
             </a:fld>
             <a:endParaRPr lang="es-ES"/>
           </a:p>
@@ -411,7 +414,7 @@
           <a:p>
             <a:fld id="{FACBDC12-F39B-4B97-8F4D-6734F9D366FF}" type="datetimeFigureOut">
               <a:rPr lang="es-ES" smtClean="0"/>
-              <a:t>09/03/2026</a:t>
+              <a:t>23/03/2026</a:t>
             </a:fld>
             <a:endParaRPr lang="es-ES"/>
           </a:p>
@@ -1067,7 +1070,7 @@
           <a:p>
             <a:fld id="{676223B9-C868-4436-87D9-1A3152E1157A}" type="slidenum">
               <a:rPr lang="es-ES" smtClean="0"/>
-              <a:t>8</a:t>
+              <a:t>9</a:t>
             </a:fld>
             <a:endParaRPr lang="es-ES"/>
           </a:p>
@@ -2645,14 +2648,14 @@
                 <a:latin typeface="Arial"/>
                 <a:cs typeface="Arial"/>
               </a:rPr>
-              <a:t>Student:Nadia</a:t>
+              <a:t>Student</a:t>
             </a:r>
             <a:r>
               <a:rPr lang="es-ES" spc="165" dirty="0">
                 <a:latin typeface="Arial"/>
                 <a:cs typeface="Arial"/>
               </a:rPr>
-              <a:t> Martí García </a:t>
+              <a:t>: Nadia Martí García </a:t>
             </a:r>
             <a:endParaRPr sz="1800" dirty="0">
               <a:latin typeface="Arial"/>
@@ -2714,6 +2717,529 @@
             <a:fld id="{B6F15528-21DE-4FAA-801E-634DDDAF4B2B}" type="slidenum">
               <a:rPr lang="es-ES" smtClean="0"/>
               <a:t>1</a:t>
+            </a:fld>
+            <a:endParaRPr lang="es-ES"/>
+          </a:p>
+        </p:txBody>
+      </p:sp>
+    </p:spTree>
+  </p:cSld>
+  <p:clrMapOvr>
+    <a:masterClrMapping/>
+  </p:clrMapOvr>
+</p:sld>
+</file>
+
+<file path=ppt/slides/slide10.xml><?xml version="1.0" encoding="utf-8"?>
+<p:sld xmlns:a="http://schemas.openxmlformats.org/drawingml/2006/main" xmlns:r="http://schemas.openxmlformats.org/officeDocument/2006/relationships" xmlns:p="http://schemas.openxmlformats.org/presentationml/2006/main">
+  <p:cSld>
+    <p:spTree>
+      <p:nvGrpSpPr>
+        <p:cNvPr id="1" name=""/>
+        <p:cNvGrpSpPr/>
+        <p:nvPr/>
+      </p:nvGrpSpPr>
+      <p:grpSpPr>
+        <a:xfrm>
+          <a:off x="0" y="0"/>
+          <a:ext cx="0" cy="0"/>
+          <a:chOff x="0" y="0"/>
+          <a:chExt cx="0" cy="0"/>
+        </a:xfrm>
+      </p:grpSpPr>
+      <p:sp>
+        <p:nvSpPr>
+          <p:cNvPr id="4" name="Marcador de pie de página 3">
+            <a:extLst>
+              <a:ext uri="{FF2B5EF4-FFF2-40B4-BE49-F238E27FC236}">
+                <a16:creationId xmlns:a16="http://schemas.microsoft.com/office/drawing/2014/main" id="{45F26DE0-DD7D-472D-ACD1-B85D9BAB2F81}"/>
+              </a:ext>
+            </a:extLst>
+          </p:cNvPr>
+          <p:cNvSpPr>
+            <a:spLocks noGrp="1"/>
+          </p:cNvSpPr>
+          <p:nvPr>
+            <p:ph type="ftr" sz="quarter" idx="5"/>
+          </p:nvPr>
+        </p:nvSpPr>
+        <p:spPr/>
+        <p:txBody>
+          <a:bodyPr/>
+          <a:lstStyle/>
+          <a:p>
+            <a:pPr marL="12700">
+              <a:spcBef>
+                <a:spcPts val="15"/>
+              </a:spcBef>
+            </a:pPr>
+            <a:r>
+              <a:rPr lang="es-ES" spc="-5"/>
+              <a:t>LAB 3. INTERFEROMETERS I</a:t>
+            </a:r>
+            <a:endParaRPr lang="es-ES" spc="-5" dirty="0"/>
+          </a:p>
+        </p:txBody>
+      </p:sp>
+      <p:sp>
+        <p:nvSpPr>
+          <p:cNvPr id="5" name="Marcador de número de diapositiva 4">
+            <a:extLst>
+              <a:ext uri="{FF2B5EF4-FFF2-40B4-BE49-F238E27FC236}">
+                <a16:creationId xmlns:a16="http://schemas.microsoft.com/office/drawing/2014/main" id="{3440B72E-4B1E-4F32-B53E-B3ECD2184D3F}"/>
+              </a:ext>
+            </a:extLst>
+          </p:cNvPr>
+          <p:cNvSpPr>
+            <a:spLocks noGrp="1"/>
+          </p:cNvSpPr>
+          <p:nvPr>
+            <p:ph type="sldNum" sz="quarter" idx="7"/>
+          </p:nvPr>
+        </p:nvSpPr>
+        <p:spPr/>
+        <p:txBody>
+          <a:bodyPr/>
+          <a:lstStyle/>
+          <a:p>
+            <a:fld id="{B6F15528-21DE-4FAA-801E-634DDDAF4B2B}" type="slidenum">
+              <a:rPr lang="es-ES" smtClean="0"/>
+              <a:t>10</a:t>
+            </a:fld>
+            <a:endParaRPr lang="es-ES"/>
+          </a:p>
+        </p:txBody>
+      </p:sp>
+      <p:sp>
+        <p:nvSpPr>
+          <p:cNvPr id="11" name="Título 10">
+            <a:extLst>
+              <a:ext uri="{FF2B5EF4-FFF2-40B4-BE49-F238E27FC236}">
+                <a16:creationId xmlns:a16="http://schemas.microsoft.com/office/drawing/2014/main" id="{96CC4C8E-D9F7-4082-95B3-A5C8204A9F39}"/>
+              </a:ext>
+            </a:extLst>
+          </p:cNvPr>
+          <p:cNvSpPr>
+            <a:spLocks noGrp="1"/>
+          </p:cNvSpPr>
+          <p:nvPr>
+            <p:ph type="title"/>
+          </p:nvPr>
+        </p:nvSpPr>
+        <p:spPr>
+          <a:xfrm>
+            <a:off x="592667" y="685800"/>
+            <a:ext cx="10991850" cy="923330"/>
+          </a:xfrm>
+        </p:spPr>
+        <p:txBody>
+          <a:bodyPr/>
+          <a:lstStyle/>
+          <a:p>
+            <a:r>
+              <a:rPr lang="en-US" b="1" dirty="0"/>
+              <a:t>Assessment 4</a:t>
+            </a:r>
+            <a:r>
+              <a:rPr lang="en-US" dirty="0"/>
+              <a:t>. </a:t>
+            </a:r>
+            <a:r>
+              <a:rPr lang="en-US" b="0" dirty="0"/>
+              <a:t>Design an MZI for filtering at a specific wavelength. Calculate and adjust the arm lengths to configure the MZI to have a maximum transmission at 1550 nm.</a:t>
+            </a:r>
+            <a:br>
+              <a:rPr lang="en-US" dirty="0"/>
+            </a:br>
+            <a:endParaRPr lang="es-ES" dirty="0"/>
+          </a:p>
+        </p:txBody>
+      </p:sp>
+      <p:pic>
+        <p:nvPicPr>
+          <p:cNvPr id="15" name="Imagen 14">
+            <a:extLst>
+              <a:ext uri="{FF2B5EF4-FFF2-40B4-BE49-F238E27FC236}">
+                <a16:creationId xmlns:a16="http://schemas.microsoft.com/office/drawing/2014/main" id="{BA54FDD2-21DF-4A6B-9DB0-C01ADE704A0A}"/>
+              </a:ext>
+            </a:extLst>
+          </p:cNvPr>
+          <p:cNvPicPr>
+            <a:picLocks noChangeAspect="1"/>
+          </p:cNvPicPr>
+          <p:nvPr/>
+        </p:nvPicPr>
+        <p:blipFill>
+          <a:blip r:embed="rId2"/>
+          <a:stretch>
+            <a:fillRect/>
+          </a:stretch>
+        </p:blipFill>
+        <p:spPr>
+          <a:xfrm>
+            <a:off x="3810000" y="1667116"/>
+            <a:ext cx="4706007" cy="485843"/>
+          </a:xfrm>
+          <a:prstGeom prst="rect">
+            <a:avLst/>
+          </a:prstGeom>
+        </p:spPr>
+      </p:pic>
+      <p:pic>
+        <p:nvPicPr>
+          <p:cNvPr id="17" name="Imagen 16">
+            <a:extLst>
+              <a:ext uri="{FF2B5EF4-FFF2-40B4-BE49-F238E27FC236}">
+                <a16:creationId xmlns:a16="http://schemas.microsoft.com/office/drawing/2014/main" id="{F325C41D-971D-459E-B563-C948717C07FA}"/>
+              </a:ext>
+            </a:extLst>
+          </p:cNvPr>
+          <p:cNvPicPr>
+            <a:picLocks noChangeAspect="1"/>
+          </p:cNvPicPr>
+          <p:nvPr/>
+        </p:nvPicPr>
+        <p:blipFill>
+          <a:blip r:embed="rId3"/>
+          <a:stretch>
+            <a:fillRect/>
+          </a:stretch>
+        </p:blipFill>
+        <p:spPr>
+          <a:xfrm>
+            <a:off x="3962400" y="2362200"/>
+            <a:ext cx="4651073" cy="3732342"/>
+          </a:xfrm>
+          <a:prstGeom prst="rect">
+            <a:avLst/>
+          </a:prstGeom>
+        </p:spPr>
+      </p:pic>
+    </p:spTree>
+    <p:extLst>
+      <p:ext uri="{BB962C8B-B14F-4D97-AF65-F5344CB8AC3E}">
+        <p14:creationId xmlns:p14="http://schemas.microsoft.com/office/powerpoint/2010/main" val="3345206339"/>
+      </p:ext>
+    </p:extLst>
+  </p:cSld>
+  <p:clrMapOvr>
+    <a:masterClrMapping/>
+  </p:clrMapOvr>
+</p:sld>
+</file>
+
+<file path=ppt/slides/slide11.xml><?xml version="1.0" encoding="utf-8"?>
+<p:sld xmlns:a="http://schemas.openxmlformats.org/drawingml/2006/main" xmlns:r="http://schemas.openxmlformats.org/officeDocument/2006/relationships" xmlns:p="http://schemas.openxmlformats.org/presentationml/2006/main">
+  <p:cSld>
+    <p:spTree>
+      <p:nvGrpSpPr>
+        <p:cNvPr id="1" name=""/>
+        <p:cNvGrpSpPr/>
+        <p:nvPr/>
+      </p:nvGrpSpPr>
+      <p:grpSpPr>
+        <a:xfrm>
+          <a:off x="0" y="0"/>
+          <a:ext cx="0" cy="0"/>
+          <a:chOff x="0" y="0"/>
+          <a:chExt cx="0" cy="0"/>
+        </a:xfrm>
+      </p:grpSpPr>
+      <p:sp>
+        <p:nvSpPr>
+          <p:cNvPr id="2" name="Título 1">
+            <a:extLst>
+              <a:ext uri="{FF2B5EF4-FFF2-40B4-BE49-F238E27FC236}">
+                <a16:creationId xmlns:a16="http://schemas.microsoft.com/office/drawing/2014/main" id="{F3B0508F-5AB9-411F-A74B-C851E6DCB5C3}"/>
+              </a:ext>
+            </a:extLst>
+          </p:cNvPr>
+          <p:cNvSpPr>
+            <a:spLocks noGrp="1"/>
+          </p:cNvSpPr>
+          <p:nvPr>
+            <p:ph type="title"/>
+          </p:nvPr>
+        </p:nvSpPr>
+        <p:spPr>
+          <a:xfrm>
+            <a:off x="600075" y="457200"/>
+            <a:ext cx="10991850" cy="1231106"/>
+          </a:xfrm>
+        </p:spPr>
+        <p:txBody>
+          <a:bodyPr/>
+          <a:lstStyle/>
+          <a:p>
+            <a:r>
+              <a:rPr lang="en-US" b="1" dirty="0"/>
+              <a:t>Assessment 5.</a:t>
+            </a:r>
+            <a:r>
+              <a:rPr lang="en-US" b="0" dirty="0"/>
+              <a:t> Let's see how the response of the MZI varies with the effective index. Vary the effective index of one of the arms and analyze how the spectrum shifts. To do this, you can use the data provided in the .txt files entitled ‘</a:t>
+            </a:r>
+            <a:r>
+              <a:rPr lang="en-US" b="0" dirty="0" err="1"/>
+              <a:t>SiN</a:t>
+            </a:r>
+            <a:r>
+              <a:rPr lang="en-US" b="0" dirty="0"/>
+              <a:t>’. Can you give an example of an application where this configuration is used?</a:t>
+            </a:r>
+            <a:br>
+              <a:rPr lang="en-US" dirty="0"/>
+            </a:br>
+            <a:endParaRPr lang="es-ES" dirty="0"/>
+          </a:p>
+        </p:txBody>
+      </p:sp>
+      <p:sp>
+        <p:nvSpPr>
+          <p:cNvPr id="4" name="Marcador de pie de página 3">
+            <a:extLst>
+              <a:ext uri="{FF2B5EF4-FFF2-40B4-BE49-F238E27FC236}">
+                <a16:creationId xmlns:a16="http://schemas.microsoft.com/office/drawing/2014/main" id="{3A0B5358-C841-4729-BF0A-2477A0E169F6}"/>
+              </a:ext>
+            </a:extLst>
+          </p:cNvPr>
+          <p:cNvSpPr>
+            <a:spLocks noGrp="1"/>
+          </p:cNvSpPr>
+          <p:nvPr>
+            <p:ph type="ftr" sz="quarter" idx="5"/>
+          </p:nvPr>
+        </p:nvSpPr>
+        <p:spPr/>
+        <p:txBody>
+          <a:bodyPr/>
+          <a:lstStyle/>
+          <a:p>
+            <a:pPr marL="12700">
+              <a:spcBef>
+                <a:spcPts val="15"/>
+              </a:spcBef>
+            </a:pPr>
+            <a:r>
+              <a:rPr lang="es-ES" spc="-5"/>
+              <a:t>LAB 3. INTERFEROMETERS I</a:t>
+            </a:r>
+            <a:endParaRPr lang="es-ES" spc="-5" dirty="0"/>
+          </a:p>
+        </p:txBody>
+      </p:sp>
+      <p:sp>
+        <p:nvSpPr>
+          <p:cNvPr id="5" name="Marcador de número de diapositiva 4">
+            <a:extLst>
+              <a:ext uri="{FF2B5EF4-FFF2-40B4-BE49-F238E27FC236}">
+                <a16:creationId xmlns:a16="http://schemas.microsoft.com/office/drawing/2014/main" id="{AB433985-F4C5-4FED-9BC7-B20EEAC99C39}"/>
+              </a:ext>
+            </a:extLst>
+          </p:cNvPr>
+          <p:cNvSpPr>
+            <a:spLocks noGrp="1"/>
+          </p:cNvSpPr>
+          <p:nvPr>
+            <p:ph type="sldNum" sz="quarter" idx="7"/>
+          </p:nvPr>
+        </p:nvSpPr>
+        <p:spPr/>
+        <p:txBody>
+          <a:bodyPr/>
+          <a:lstStyle/>
+          <a:p>
+            <a:fld id="{B6F15528-21DE-4FAA-801E-634DDDAF4B2B}" type="slidenum">
+              <a:rPr lang="es-ES" smtClean="0"/>
+              <a:t>11</a:t>
+            </a:fld>
+            <a:endParaRPr lang="es-ES"/>
+          </a:p>
+        </p:txBody>
+      </p:sp>
+      <p:pic>
+        <p:nvPicPr>
+          <p:cNvPr id="7" name="Imagen 6">
+            <a:extLst>
+              <a:ext uri="{FF2B5EF4-FFF2-40B4-BE49-F238E27FC236}">
+                <a16:creationId xmlns:a16="http://schemas.microsoft.com/office/drawing/2014/main" id="{7697C202-56FF-48CC-B291-90EC35B95450}"/>
+              </a:ext>
+            </a:extLst>
+          </p:cNvPr>
+          <p:cNvPicPr>
+            <a:picLocks noChangeAspect="1"/>
+          </p:cNvPicPr>
+          <p:nvPr/>
+        </p:nvPicPr>
+        <p:blipFill>
+          <a:blip r:embed="rId2"/>
+          <a:stretch>
+            <a:fillRect/>
+          </a:stretch>
+        </p:blipFill>
+        <p:spPr>
+          <a:xfrm>
+            <a:off x="3505200" y="1905000"/>
+            <a:ext cx="5181600" cy="4093105"/>
+          </a:xfrm>
+          <a:prstGeom prst="rect">
+            <a:avLst/>
+          </a:prstGeom>
+        </p:spPr>
+      </p:pic>
+    </p:spTree>
+    <p:extLst>
+      <p:ext uri="{BB962C8B-B14F-4D97-AF65-F5344CB8AC3E}">
+        <p14:creationId xmlns:p14="http://schemas.microsoft.com/office/powerpoint/2010/main" val="1828790139"/>
+      </p:ext>
+    </p:extLst>
+  </p:cSld>
+  <p:clrMapOvr>
+    <a:masterClrMapping/>
+  </p:clrMapOvr>
+</p:sld>
+</file>
+
+<file path=ppt/slides/slide12.xml><?xml version="1.0" encoding="utf-8"?>
+<p:sld xmlns:a="http://schemas.openxmlformats.org/drawingml/2006/main" xmlns:r="http://schemas.openxmlformats.org/officeDocument/2006/relationships" xmlns:p="http://schemas.openxmlformats.org/presentationml/2006/main">
+  <p:cSld>
+    <p:spTree>
+      <p:nvGrpSpPr>
+        <p:cNvPr id="1" name=""/>
+        <p:cNvGrpSpPr/>
+        <p:nvPr/>
+      </p:nvGrpSpPr>
+      <p:grpSpPr>
+        <a:xfrm>
+          <a:off x="0" y="0"/>
+          <a:ext cx="0" cy="0"/>
+          <a:chOff x="0" y="0"/>
+          <a:chExt cx="0" cy="0"/>
+        </a:xfrm>
+      </p:grpSpPr>
+      <p:sp>
+        <p:nvSpPr>
+          <p:cNvPr id="3" name="object 3"/>
+          <p:cNvSpPr/>
+          <p:nvPr/>
+        </p:nvSpPr>
+        <p:spPr>
+          <a:xfrm>
+            <a:off x="3945635" y="2636520"/>
+            <a:ext cx="8246363" cy="1584959"/>
+          </a:xfrm>
+          <a:prstGeom prst="rect">
+            <a:avLst/>
+          </a:prstGeom>
+          <a:blipFill>
+            <a:blip r:embed="rId2" cstate="print"/>
+            <a:stretch>
+              <a:fillRect/>
+            </a:stretch>
+          </a:blipFill>
+        </p:spPr>
+        <p:txBody>
+          <a:bodyPr wrap="square" lIns="0" tIns="0" rIns="0" bIns="0" rtlCol="0"/>
+          <a:lstStyle/>
+          <a:p>
+            <a:endParaRPr/>
+          </a:p>
+        </p:txBody>
+      </p:sp>
+      <p:sp>
+        <p:nvSpPr>
+          <p:cNvPr id="4" name="object 4"/>
+          <p:cNvSpPr txBox="1">
+            <a:spLocks noGrp="1"/>
+          </p:cNvSpPr>
+          <p:nvPr>
+            <p:ph type="title"/>
+          </p:nvPr>
+        </p:nvSpPr>
+        <p:spPr>
+          <a:xfrm>
+            <a:off x="4513326" y="3165729"/>
+            <a:ext cx="2233295" cy="513715"/>
+          </a:xfrm>
+          <a:prstGeom prst="rect">
+            <a:avLst/>
+          </a:prstGeom>
+        </p:spPr>
+        <p:txBody>
+          <a:bodyPr vert="horz" wrap="square" lIns="0" tIns="13335" rIns="0" bIns="0" rtlCol="0">
+            <a:spAutoFit/>
+          </a:bodyPr>
+          <a:lstStyle/>
+          <a:p>
+            <a:pPr marL="12700">
+              <a:lnSpc>
+                <a:spcPct val="100000"/>
+              </a:lnSpc>
+              <a:spcBef>
+                <a:spcPts val="105"/>
+              </a:spcBef>
+            </a:pPr>
+            <a:r>
+              <a:rPr sz="3200" b="1" spc="-5" dirty="0">
+                <a:solidFill>
+                  <a:srgbClr val="FFFFFF"/>
+                </a:solidFill>
+                <a:latin typeface="Lucida Sans"/>
+                <a:cs typeface="Lucida Sans"/>
+              </a:rPr>
+              <a:t>Thank</a:t>
+            </a:r>
+            <a:r>
+              <a:rPr sz="3200" b="1" spc="-55" dirty="0">
+                <a:solidFill>
+                  <a:srgbClr val="FFFFFF"/>
+                </a:solidFill>
+                <a:latin typeface="Lucida Sans"/>
+                <a:cs typeface="Lucida Sans"/>
+              </a:rPr>
+              <a:t> </a:t>
+            </a:r>
+            <a:r>
+              <a:rPr sz="3200" b="1" dirty="0">
+                <a:solidFill>
+                  <a:srgbClr val="FFFFFF"/>
+                </a:solidFill>
+                <a:latin typeface="Lucida Sans"/>
+                <a:cs typeface="Lucida Sans"/>
+              </a:rPr>
+              <a:t>you</a:t>
+            </a:r>
+            <a:endParaRPr sz="3200">
+              <a:latin typeface="Lucida Sans"/>
+              <a:cs typeface="Lucida Sans"/>
+            </a:endParaRPr>
+          </a:p>
+        </p:txBody>
+      </p:sp>
+      <p:sp>
+        <p:nvSpPr>
+          <p:cNvPr id="5" name="Marcador de número de diapositiva 4">
+            <a:extLst>
+              <a:ext uri="{FF2B5EF4-FFF2-40B4-BE49-F238E27FC236}">
+                <a16:creationId xmlns:a16="http://schemas.microsoft.com/office/drawing/2014/main" id="{B052DA19-AD24-7D24-2AE9-51F8F5A7F5E0}"/>
+              </a:ext>
+            </a:extLst>
+          </p:cNvPr>
+          <p:cNvSpPr>
+            <a:spLocks noGrp="1"/>
+          </p:cNvSpPr>
+          <p:nvPr>
+            <p:ph type="sldNum" sz="quarter" idx="7"/>
+          </p:nvPr>
+        </p:nvSpPr>
+        <p:spPr/>
+        <p:txBody>
+          <a:bodyPr/>
+          <a:lstStyle/>
+          <a:p>
+            <a:fld id="{B6F15528-21DE-4FAA-801E-634DDDAF4B2B}" type="slidenum">
+              <a:rPr lang="es-ES" smtClean="0"/>
+              <a:t>12</a:t>
             </a:fld>
             <a:endParaRPr lang="es-ES"/>
           </a:p>
@@ -4748,8 +5274,8 @@
         </p:nvSpPr>
         <p:spPr>
           <a:xfrm>
-            <a:off x="5630943" y="3581400"/>
-            <a:ext cx="5823638" cy="1015663"/>
+            <a:off x="5718440" y="3962400"/>
+            <a:ext cx="5823638" cy="1384995"/>
           </a:xfrm>
           <a:prstGeom prst="rect">
             <a:avLst/>
@@ -4803,10 +5329,272 @@
           </a:p>
           <a:p>
             <a:pPr algn="just"/>
-            <a:endParaRPr lang="en-US" sz="1200" dirty="0">
-              <a:latin typeface="Arial" panose="020B0604020202020204" pitchFamily="34" charset="0"/>
-              <a:cs typeface="Arial" panose="020B0604020202020204" pitchFamily="34" charset="0"/>
-            </a:endParaRPr>
+            <a:r>
+              <a:rPr lang="en-US" sz="1200" dirty="0" err="1">
+                <a:latin typeface="Arial" panose="020B0604020202020204" pitchFamily="34" charset="0"/>
+                <a:cs typeface="Arial" panose="020B0604020202020204" pitchFamily="34" charset="0"/>
+              </a:rPr>
+              <a:t>En</a:t>
+            </a:r>
+            <a:r>
+              <a:rPr lang="en-US" sz="1200" dirty="0">
+                <a:latin typeface="Arial" panose="020B0604020202020204" pitchFamily="34" charset="0"/>
+                <a:cs typeface="Arial" panose="020B0604020202020204" pitchFamily="34" charset="0"/>
+              </a:rPr>
+              <a:t> </a:t>
+            </a:r>
+            <a:r>
+              <a:rPr lang="en-US" sz="1200" dirty="0" err="1">
+                <a:latin typeface="Arial" panose="020B0604020202020204" pitchFamily="34" charset="0"/>
+                <a:cs typeface="Arial" panose="020B0604020202020204" pitchFamily="34" charset="0"/>
+              </a:rPr>
+              <a:t>este</a:t>
+            </a:r>
+            <a:r>
+              <a:rPr lang="en-US" sz="1200" dirty="0">
+                <a:latin typeface="Arial" panose="020B0604020202020204" pitchFamily="34" charset="0"/>
+                <a:cs typeface="Arial" panose="020B0604020202020204" pitchFamily="34" charset="0"/>
+              </a:rPr>
+              <a:t> primer </a:t>
+            </a:r>
+            <a:r>
+              <a:rPr lang="en-US" sz="1200" dirty="0" err="1">
+                <a:latin typeface="Arial" panose="020B0604020202020204" pitchFamily="34" charset="0"/>
+                <a:cs typeface="Arial" panose="020B0604020202020204" pitchFamily="34" charset="0"/>
+              </a:rPr>
+              <a:t>caso</a:t>
+            </a:r>
+            <a:r>
+              <a:rPr lang="en-US" sz="1200" dirty="0">
+                <a:latin typeface="Arial" panose="020B0604020202020204" pitchFamily="34" charset="0"/>
+                <a:cs typeface="Arial" panose="020B0604020202020204" pitchFamily="34" charset="0"/>
+              </a:rPr>
+              <a:t> </a:t>
+            </a:r>
+            <a:r>
+              <a:rPr lang="en-US" sz="1200" dirty="0" err="1">
+                <a:latin typeface="Arial" panose="020B0604020202020204" pitchFamily="34" charset="0"/>
+                <a:cs typeface="Arial" panose="020B0604020202020204" pitchFamily="34" charset="0"/>
+              </a:rPr>
+              <a:t>tenemos</a:t>
+            </a:r>
+            <a:r>
+              <a:rPr lang="en-US" sz="1200" dirty="0">
+                <a:latin typeface="Arial" panose="020B0604020202020204" pitchFamily="34" charset="0"/>
+                <a:cs typeface="Arial" panose="020B0604020202020204" pitchFamily="34" charset="0"/>
+              </a:rPr>
+              <a:t> un MZI </a:t>
+            </a:r>
+            <a:r>
+              <a:rPr lang="en-US" sz="1200" dirty="0" err="1">
+                <a:latin typeface="Arial" panose="020B0604020202020204" pitchFamily="34" charset="0"/>
+                <a:cs typeface="Arial" panose="020B0604020202020204" pitchFamily="34" charset="0"/>
+              </a:rPr>
+              <a:t>completamente</a:t>
+            </a:r>
+            <a:r>
+              <a:rPr lang="en-US" sz="1200" dirty="0">
+                <a:latin typeface="Arial" panose="020B0604020202020204" pitchFamily="34" charset="0"/>
+                <a:cs typeface="Arial" panose="020B0604020202020204" pitchFamily="34" charset="0"/>
+              </a:rPr>
+              <a:t> </a:t>
+            </a:r>
+            <a:r>
+              <a:rPr lang="en-US" sz="1200" dirty="0" err="1">
+                <a:latin typeface="Arial" panose="020B0604020202020204" pitchFamily="34" charset="0"/>
+                <a:cs typeface="Arial" panose="020B0604020202020204" pitchFamily="34" charset="0"/>
+              </a:rPr>
+              <a:t>balanceado</a:t>
+            </a:r>
+            <a:r>
+              <a:rPr lang="en-US" sz="1200" dirty="0">
+                <a:latin typeface="Arial" panose="020B0604020202020204" pitchFamily="34" charset="0"/>
+                <a:cs typeface="Arial" panose="020B0604020202020204" pitchFamily="34" charset="0"/>
+              </a:rPr>
+              <a:t>, por </a:t>
+            </a:r>
+            <a:r>
+              <a:rPr lang="en-US" sz="1200" dirty="0" err="1">
+                <a:latin typeface="Arial" panose="020B0604020202020204" pitchFamily="34" charset="0"/>
+                <a:cs typeface="Arial" panose="020B0604020202020204" pitchFamily="34" charset="0"/>
+              </a:rPr>
+              <a:t>ello</a:t>
+            </a:r>
+            <a:r>
+              <a:rPr lang="en-US" sz="1200" dirty="0">
+                <a:latin typeface="Arial" panose="020B0604020202020204" pitchFamily="34" charset="0"/>
+                <a:cs typeface="Arial" panose="020B0604020202020204" pitchFamily="34" charset="0"/>
+              </a:rPr>
+              <a:t> </a:t>
+            </a:r>
+            <a:r>
+              <a:rPr lang="en-US" sz="1200" dirty="0" err="1">
+                <a:latin typeface="Arial" panose="020B0604020202020204" pitchFamily="34" charset="0"/>
+                <a:cs typeface="Arial" panose="020B0604020202020204" pitchFamily="34" charset="0"/>
+              </a:rPr>
+              <a:t>vemos</a:t>
+            </a:r>
+            <a:r>
+              <a:rPr lang="en-US" sz="1200" dirty="0">
+                <a:latin typeface="Arial" panose="020B0604020202020204" pitchFamily="34" charset="0"/>
+                <a:cs typeface="Arial" panose="020B0604020202020204" pitchFamily="34" charset="0"/>
+              </a:rPr>
+              <a:t> </a:t>
+            </a:r>
+            <a:r>
+              <a:rPr lang="en-US" sz="1200" dirty="0" err="1">
+                <a:latin typeface="Arial" panose="020B0604020202020204" pitchFamily="34" charset="0"/>
+                <a:cs typeface="Arial" panose="020B0604020202020204" pitchFamily="34" charset="0"/>
+              </a:rPr>
+              <a:t>esta</a:t>
+            </a:r>
+            <a:r>
+              <a:rPr lang="en-US" sz="1200" dirty="0">
+                <a:latin typeface="Arial" panose="020B0604020202020204" pitchFamily="34" charset="0"/>
+                <a:cs typeface="Arial" panose="020B0604020202020204" pitchFamily="34" charset="0"/>
+              </a:rPr>
+              <a:t> </a:t>
+            </a:r>
+            <a:r>
+              <a:rPr lang="en-US" sz="1200" dirty="0" err="1">
+                <a:latin typeface="Arial" panose="020B0604020202020204" pitchFamily="34" charset="0"/>
+                <a:cs typeface="Arial" panose="020B0604020202020204" pitchFamily="34" charset="0"/>
+              </a:rPr>
+              <a:t>respuesta</a:t>
+            </a:r>
+            <a:r>
+              <a:rPr lang="en-US" sz="1200" dirty="0">
+                <a:latin typeface="Arial" panose="020B0604020202020204" pitchFamily="34" charset="0"/>
+                <a:cs typeface="Arial" panose="020B0604020202020204" pitchFamily="34" charset="0"/>
+              </a:rPr>
+              <a:t>, </a:t>
+            </a:r>
+            <a:r>
+              <a:rPr lang="en-US" sz="1200" dirty="0" err="1">
+                <a:latin typeface="Arial" panose="020B0604020202020204" pitchFamily="34" charset="0"/>
+                <a:cs typeface="Arial" panose="020B0604020202020204" pitchFamily="34" charset="0"/>
+              </a:rPr>
+              <a:t>donde</a:t>
+            </a:r>
+            <a:r>
+              <a:rPr lang="en-US" sz="1200" dirty="0">
+                <a:latin typeface="Arial" panose="020B0604020202020204" pitchFamily="34" charset="0"/>
+                <a:cs typeface="Arial" panose="020B0604020202020204" pitchFamily="34" charset="0"/>
+              </a:rPr>
+              <a:t> se </a:t>
+            </a:r>
+            <a:r>
+              <a:rPr lang="en-US" sz="1200" dirty="0" err="1">
+                <a:latin typeface="Arial" panose="020B0604020202020204" pitchFamily="34" charset="0"/>
+                <a:cs typeface="Arial" panose="020B0604020202020204" pitchFamily="34" charset="0"/>
+              </a:rPr>
+              <a:t>mantiene</a:t>
+            </a:r>
+            <a:r>
+              <a:rPr lang="en-US" sz="1200" dirty="0">
+                <a:latin typeface="Arial" panose="020B0604020202020204" pitchFamily="34" charset="0"/>
+                <a:cs typeface="Arial" panose="020B0604020202020204" pitchFamily="34" charset="0"/>
+              </a:rPr>
+              <a:t> una </a:t>
+            </a:r>
+            <a:r>
+              <a:rPr lang="en-US" sz="1200" dirty="0" err="1">
+                <a:latin typeface="Arial" panose="020B0604020202020204" pitchFamily="34" charset="0"/>
+                <a:cs typeface="Arial" panose="020B0604020202020204" pitchFamily="34" charset="0"/>
+              </a:rPr>
+              <a:t>potencia</a:t>
+            </a:r>
+            <a:r>
+              <a:rPr lang="en-US" sz="1200" dirty="0">
+                <a:latin typeface="Arial" panose="020B0604020202020204" pitchFamily="34" charset="0"/>
+                <a:cs typeface="Arial" panose="020B0604020202020204" pitchFamily="34" charset="0"/>
+              </a:rPr>
+              <a:t> </a:t>
+            </a:r>
+            <a:r>
+              <a:rPr lang="en-US" sz="1200" dirty="0" err="1">
+                <a:latin typeface="Arial" panose="020B0604020202020204" pitchFamily="34" charset="0"/>
+                <a:cs typeface="Arial" panose="020B0604020202020204" pitchFamily="34" charset="0"/>
+              </a:rPr>
+              <a:t>máxima</a:t>
+            </a:r>
+            <a:r>
+              <a:rPr lang="en-US" sz="1200" dirty="0">
+                <a:latin typeface="Arial" panose="020B0604020202020204" pitchFamily="34" charset="0"/>
+                <a:cs typeface="Arial" panose="020B0604020202020204" pitchFamily="34" charset="0"/>
+              </a:rPr>
+              <a:t> (1) </a:t>
+            </a:r>
+            <a:r>
+              <a:rPr lang="en-US" sz="1200" dirty="0" err="1">
+                <a:latin typeface="Arial" panose="020B0604020202020204" pitchFamily="34" charset="0"/>
+                <a:cs typeface="Arial" panose="020B0604020202020204" pitchFamily="34" charset="0"/>
+              </a:rPr>
+              <a:t>en</a:t>
+            </a:r>
+            <a:r>
+              <a:rPr lang="en-US" sz="1200" dirty="0">
+                <a:latin typeface="Arial" panose="020B0604020202020204" pitchFamily="34" charset="0"/>
+                <a:cs typeface="Arial" panose="020B0604020202020204" pitchFamily="34" charset="0"/>
+              </a:rPr>
+              <a:t> </a:t>
+            </a:r>
+            <a:r>
+              <a:rPr lang="en-US" sz="1200" dirty="0" err="1">
+                <a:latin typeface="Arial" panose="020B0604020202020204" pitchFamily="34" charset="0"/>
+                <a:cs typeface="Arial" panose="020B0604020202020204" pitchFamily="34" charset="0"/>
+              </a:rPr>
+              <a:t>el</a:t>
+            </a:r>
+            <a:r>
+              <a:rPr lang="en-US" sz="1200" dirty="0">
+                <a:latin typeface="Arial" panose="020B0604020202020204" pitchFamily="34" charset="0"/>
+                <a:cs typeface="Arial" panose="020B0604020202020204" pitchFamily="34" charset="0"/>
+              </a:rPr>
+              <a:t> Puerto BAR y minima (0) </a:t>
+            </a:r>
+            <a:r>
+              <a:rPr lang="en-US" sz="1200" dirty="0" err="1">
+                <a:latin typeface="Arial" panose="020B0604020202020204" pitchFamily="34" charset="0"/>
+                <a:cs typeface="Arial" panose="020B0604020202020204" pitchFamily="34" charset="0"/>
+              </a:rPr>
+              <a:t>en</a:t>
+            </a:r>
+            <a:r>
+              <a:rPr lang="en-US" sz="1200" dirty="0">
+                <a:latin typeface="Arial" panose="020B0604020202020204" pitchFamily="34" charset="0"/>
+                <a:cs typeface="Arial" panose="020B0604020202020204" pitchFamily="34" charset="0"/>
+              </a:rPr>
+              <a:t> </a:t>
+            </a:r>
+            <a:r>
+              <a:rPr lang="en-US" sz="1200" dirty="0" err="1">
+                <a:latin typeface="Arial" panose="020B0604020202020204" pitchFamily="34" charset="0"/>
+                <a:cs typeface="Arial" panose="020B0604020202020204" pitchFamily="34" charset="0"/>
+              </a:rPr>
+              <a:t>el</a:t>
+            </a:r>
+            <a:r>
+              <a:rPr lang="en-US" sz="1200" dirty="0">
+                <a:latin typeface="Arial" panose="020B0604020202020204" pitchFamily="34" charset="0"/>
+                <a:cs typeface="Arial" panose="020B0604020202020204" pitchFamily="34" charset="0"/>
+              </a:rPr>
+              <a:t> CROSS.  No hay </a:t>
+            </a:r>
+            <a:r>
+              <a:rPr lang="en-US" sz="1200" dirty="0" err="1">
+                <a:latin typeface="Arial" panose="020B0604020202020204" pitchFamily="34" charset="0"/>
+                <a:cs typeface="Arial" panose="020B0604020202020204" pitchFamily="34" charset="0"/>
+              </a:rPr>
+              <a:t>interferencias</a:t>
+            </a:r>
+            <a:r>
+              <a:rPr lang="en-US" sz="1200" dirty="0">
+                <a:latin typeface="Arial" panose="020B0604020202020204" pitchFamily="34" charset="0"/>
+                <a:cs typeface="Arial" panose="020B0604020202020204" pitchFamily="34" charset="0"/>
+              </a:rPr>
+              <a:t>.</a:t>
+            </a:r>
           </a:p>
           <a:p>
             <a:pPr algn="just"/>
@@ -5184,7 +5972,7 @@
         <p:spPr>
           <a:xfrm>
             <a:off x="5486400" y="1295400"/>
-            <a:ext cx="5823638" cy="1015663"/>
+            <a:ext cx="5823638" cy="1200329"/>
           </a:xfrm>
           <a:prstGeom prst="rect">
             <a:avLst/>
@@ -5212,36 +6000,358 @@
                 <a:latin typeface="Arial" panose="020B0604020202020204" pitchFamily="34" charset="0"/>
                 <a:cs typeface="Arial" panose="020B0604020202020204" pitchFamily="34" charset="0"/>
               </a:rPr>
-              <a:t>Document all your results (</a:t>
+              <a:t>Al </a:t>
             </a:r>
             <a:r>
               <a:rPr lang="en-US" sz="1200" dirty="0" err="1">
                 <a:latin typeface="Arial" panose="020B0604020202020204" pitchFamily="34" charset="0"/>
                 <a:cs typeface="Arial" panose="020B0604020202020204" pitchFamily="34" charset="0"/>
               </a:rPr>
-              <a:t>neff</a:t>
+              <a:t>introducir</a:t>
             </a:r>
             <a:r>
               <a:rPr lang="en-US" sz="1200" dirty="0">
                 <a:latin typeface="Arial" panose="020B0604020202020204" pitchFamily="34" charset="0"/>
                 <a:cs typeface="Arial" panose="020B0604020202020204" pitchFamily="34" charset="0"/>
               </a:rPr>
-              <a:t>, alpha, gamma, transfer function plots, etc.) and comment on the obtained results (in terms of FSR, amplitude, losses, etc.).</a:t>
-            </a:r>
-          </a:p>
-          <a:p>
-            <a:pPr algn="just"/>
-            <a:endParaRPr lang="en-US" sz="1200" dirty="0">
-              <a:latin typeface="Arial" panose="020B0604020202020204" pitchFamily="34" charset="0"/>
-              <a:cs typeface="Arial" panose="020B0604020202020204" pitchFamily="34" charset="0"/>
-            </a:endParaRPr>
-          </a:p>
-          <a:p>
-            <a:pPr algn="just"/>
-            <a:endParaRPr lang="en-US" sz="1200" dirty="0">
-              <a:latin typeface="Arial" panose="020B0604020202020204" pitchFamily="34" charset="0"/>
-              <a:cs typeface="Arial" panose="020B0604020202020204" pitchFamily="34" charset="0"/>
-            </a:endParaRPr>
+              <a:t> un </a:t>
+            </a:r>
+            <a:r>
+              <a:rPr lang="en-US" sz="1200" dirty="0" err="1">
+                <a:latin typeface="Arial" panose="020B0604020202020204" pitchFamily="34" charset="0"/>
+                <a:cs typeface="Arial" panose="020B0604020202020204" pitchFamily="34" charset="0"/>
+              </a:rPr>
+              <a:t>desequilibrio</a:t>
+            </a:r>
+            <a:r>
+              <a:rPr lang="en-US" sz="1200" dirty="0">
+                <a:latin typeface="Arial" panose="020B0604020202020204" pitchFamily="34" charset="0"/>
+                <a:cs typeface="Arial" panose="020B0604020202020204" pitchFamily="34" charset="0"/>
+              </a:rPr>
+              <a:t> entre los </a:t>
+            </a:r>
+            <a:r>
+              <a:rPr lang="en-US" sz="1200" dirty="0" err="1">
+                <a:latin typeface="Arial" panose="020B0604020202020204" pitchFamily="34" charset="0"/>
+                <a:cs typeface="Arial" panose="020B0604020202020204" pitchFamily="34" charset="0"/>
+              </a:rPr>
+              <a:t>brazos</a:t>
+            </a:r>
+            <a:r>
+              <a:rPr lang="en-US" sz="1200" dirty="0">
+                <a:latin typeface="Arial" panose="020B0604020202020204" pitchFamily="34" charset="0"/>
+                <a:cs typeface="Arial" panose="020B0604020202020204" pitchFamily="34" charset="0"/>
+              </a:rPr>
+              <a:t> </a:t>
+            </a:r>
+            <a:r>
+              <a:rPr lang="en-US" sz="1200" dirty="0" err="1">
+                <a:latin typeface="Arial" panose="020B0604020202020204" pitchFamily="34" charset="0"/>
+                <a:cs typeface="Arial" panose="020B0604020202020204" pitchFamily="34" charset="0"/>
+              </a:rPr>
+              <a:t>modificando</a:t>
+            </a:r>
+            <a:r>
+              <a:rPr lang="en-US" sz="1200" dirty="0">
+                <a:latin typeface="Arial" panose="020B0604020202020204" pitchFamily="34" charset="0"/>
+                <a:cs typeface="Arial" panose="020B0604020202020204" pitchFamily="34" charset="0"/>
+              </a:rPr>
+              <a:t> los </a:t>
+            </a:r>
+            <a:r>
+              <a:rPr lang="en-US" sz="1200" dirty="0" err="1">
+                <a:latin typeface="Arial" panose="020B0604020202020204" pitchFamily="34" charset="0"/>
+                <a:cs typeface="Arial" panose="020B0604020202020204" pitchFamily="34" charset="0"/>
+              </a:rPr>
+              <a:t>materiales</a:t>
+            </a:r>
+            <a:r>
+              <a:rPr lang="en-US" sz="1200" dirty="0">
+                <a:latin typeface="Arial" panose="020B0604020202020204" pitchFamily="34" charset="0"/>
+                <a:cs typeface="Arial" panose="020B0604020202020204" pitchFamily="34" charset="0"/>
+              </a:rPr>
+              <a:t>, </a:t>
+            </a:r>
+            <a:r>
+              <a:rPr lang="en-US" sz="1200" dirty="0" err="1">
+                <a:latin typeface="Arial" panose="020B0604020202020204" pitchFamily="34" charset="0"/>
+                <a:cs typeface="Arial" panose="020B0604020202020204" pitchFamily="34" charset="0"/>
+              </a:rPr>
+              <a:t>vemos</a:t>
+            </a:r>
+            <a:r>
+              <a:rPr lang="en-US" sz="1200" dirty="0">
+                <a:latin typeface="Arial" panose="020B0604020202020204" pitchFamily="34" charset="0"/>
+                <a:cs typeface="Arial" panose="020B0604020202020204" pitchFamily="34" charset="0"/>
+              </a:rPr>
+              <a:t> que por </a:t>
+            </a:r>
+            <a:r>
+              <a:rPr lang="en-US" sz="1200" dirty="0" err="1">
+                <a:latin typeface="Arial" panose="020B0604020202020204" pitchFamily="34" charset="0"/>
+                <a:cs typeface="Arial" panose="020B0604020202020204" pitchFamily="34" charset="0"/>
+              </a:rPr>
+              <a:t>el</a:t>
+            </a:r>
+            <a:r>
+              <a:rPr lang="en-US" sz="1200" dirty="0">
+                <a:latin typeface="Arial" panose="020B0604020202020204" pitchFamily="34" charset="0"/>
+                <a:cs typeface="Arial" panose="020B0604020202020204" pitchFamily="34" charset="0"/>
+              </a:rPr>
+              <a:t> Puerto BAR </a:t>
+            </a:r>
+            <a:r>
+              <a:rPr lang="en-US" sz="1200" dirty="0" err="1">
+                <a:latin typeface="Arial" panose="020B0604020202020204" pitchFamily="34" charset="0"/>
+                <a:cs typeface="Arial" panose="020B0604020202020204" pitchFamily="34" charset="0"/>
+              </a:rPr>
+              <a:t>obtenemos</a:t>
+            </a:r>
+            <a:r>
+              <a:rPr lang="en-US" sz="1200" dirty="0">
+                <a:latin typeface="Arial" panose="020B0604020202020204" pitchFamily="34" charset="0"/>
+                <a:cs typeface="Arial" panose="020B0604020202020204" pitchFamily="34" charset="0"/>
+              </a:rPr>
+              <a:t> una </a:t>
+            </a:r>
+            <a:r>
+              <a:rPr lang="en-US" sz="1200" dirty="0" err="1">
+                <a:latin typeface="Arial" panose="020B0604020202020204" pitchFamily="34" charset="0"/>
+                <a:cs typeface="Arial" panose="020B0604020202020204" pitchFamily="34" charset="0"/>
+              </a:rPr>
+              <a:t>potencia</a:t>
+            </a:r>
+            <a:r>
+              <a:rPr lang="en-US" sz="1200" dirty="0">
+                <a:latin typeface="Arial" panose="020B0604020202020204" pitchFamily="34" charset="0"/>
+                <a:cs typeface="Arial" panose="020B0604020202020204" pitchFamily="34" charset="0"/>
+              </a:rPr>
+              <a:t> </a:t>
+            </a:r>
+            <a:r>
+              <a:rPr lang="en-US" sz="1200" dirty="0" err="1">
+                <a:latin typeface="Arial" panose="020B0604020202020204" pitchFamily="34" charset="0"/>
+                <a:cs typeface="Arial" panose="020B0604020202020204" pitchFamily="34" charset="0"/>
+              </a:rPr>
+              <a:t>alrededor</a:t>
+            </a:r>
+            <a:r>
+              <a:rPr lang="en-US" sz="1200" dirty="0">
+                <a:latin typeface="Arial" panose="020B0604020202020204" pitchFamily="34" charset="0"/>
+                <a:cs typeface="Arial" panose="020B0604020202020204" pitchFamily="34" charset="0"/>
+              </a:rPr>
+              <a:t> de 0.6 y por </a:t>
+            </a:r>
+            <a:r>
+              <a:rPr lang="en-US" sz="1200" dirty="0" err="1">
+                <a:latin typeface="Arial" panose="020B0604020202020204" pitchFamily="34" charset="0"/>
+                <a:cs typeface="Arial" panose="020B0604020202020204" pitchFamily="34" charset="0"/>
+              </a:rPr>
+              <a:t>el</a:t>
+            </a:r>
+            <a:r>
+              <a:rPr lang="en-US" sz="1200" dirty="0">
+                <a:latin typeface="Arial" panose="020B0604020202020204" pitchFamily="34" charset="0"/>
+                <a:cs typeface="Arial" panose="020B0604020202020204" pitchFamily="34" charset="0"/>
+              </a:rPr>
+              <a:t> Puerto CROSS </a:t>
+            </a:r>
+            <a:r>
+              <a:rPr lang="en-US" sz="1200" dirty="0" err="1">
+                <a:latin typeface="Arial" panose="020B0604020202020204" pitchFamily="34" charset="0"/>
+                <a:cs typeface="Arial" panose="020B0604020202020204" pitchFamily="34" charset="0"/>
+              </a:rPr>
+              <a:t>alrededor</a:t>
+            </a:r>
+            <a:r>
+              <a:rPr lang="en-US" sz="1200" dirty="0">
+                <a:latin typeface="Arial" panose="020B0604020202020204" pitchFamily="34" charset="0"/>
+                <a:cs typeface="Arial" panose="020B0604020202020204" pitchFamily="34" charset="0"/>
+              </a:rPr>
+              <a:t> de 0.4. Sin embargo no </a:t>
+            </a:r>
+            <a:r>
+              <a:rPr lang="en-US" sz="1200" dirty="0" err="1">
+                <a:latin typeface="Arial" panose="020B0604020202020204" pitchFamily="34" charset="0"/>
+                <a:cs typeface="Arial" panose="020B0604020202020204" pitchFamily="34" charset="0"/>
+              </a:rPr>
+              <a:t>llegamos</a:t>
+            </a:r>
+            <a:r>
+              <a:rPr lang="en-US" sz="1200" dirty="0">
+                <a:latin typeface="Arial" panose="020B0604020202020204" pitchFamily="34" charset="0"/>
+                <a:cs typeface="Arial" panose="020B0604020202020204" pitchFamily="34" charset="0"/>
+              </a:rPr>
+              <a:t> a </a:t>
+            </a:r>
+            <a:r>
+              <a:rPr lang="en-US" sz="1200" dirty="0" err="1">
+                <a:latin typeface="Arial" panose="020B0604020202020204" pitchFamily="34" charset="0"/>
+                <a:cs typeface="Arial" panose="020B0604020202020204" pitchFamily="34" charset="0"/>
+              </a:rPr>
+              <a:t>ver</a:t>
+            </a:r>
+            <a:r>
+              <a:rPr lang="en-US" sz="1200" dirty="0">
+                <a:latin typeface="Arial" panose="020B0604020202020204" pitchFamily="34" charset="0"/>
+                <a:cs typeface="Arial" panose="020B0604020202020204" pitchFamily="34" charset="0"/>
+              </a:rPr>
+              <a:t> </a:t>
+            </a:r>
+            <a:r>
+              <a:rPr lang="en-US" sz="1200" dirty="0" err="1">
+                <a:latin typeface="Arial" panose="020B0604020202020204" pitchFamily="34" charset="0"/>
+                <a:cs typeface="Arial" panose="020B0604020202020204" pitchFamily="34" charset="0"/>
+              </a:rPr>
+              <a:t>oscilaciones</a:t>
+            </a:r>
+            <a:r>
+              <a:rPr lang="en-US" sz="1200" dirty="0">
+                <a:latin typeface="Arial" panose="020B0604020202020204" pitchFamily="34" charset="0"/>
+                <a:cs typeface="Arial" panose="020B0604020202020204" pitchFamily="34" charset="0"/>
+              </a:rPr>
+              <a:t> </a:t>
+            </a:r>
+            <a:r>
+              <a:rPr lang="en-US" sz="1200" dirty="0" err="1">
+                <a:latin typeface="Arial" panose="020B0604020202020204" pitchFamily="34" charset="0"/>
+                <a:cs typeface="Arial" panose="020B0604020202020204" pitchFamily="34" charset="0"/>
+              </a:rPr>
+              <a:t>completas</a:t>
+            </a:r>
+            <a:r>
+              <a:rPr lang="en-US" sz="1200" dirty="0">
+                <a:latin typeface="Arial" panose="020B0604020202020204" pitchFamily="34" charset="0"/>
+                <a:cs typeface="Arial" panose="020B0604020202020204" pitchFamily="34" charset="0"/>
+              </a:rPr>
+              <a:t>, al </a:t>
+            </a:r>
+            <a:r>
+              <a:rPr lang="en-US" sz="1200" dirty="0" err="1">
+                <a:latin typeface="Arial" panose="020B0604020202020204" pitchFamily="34" charset="0"/>
+                <a:cs typeface="Arial" panose="020B0604020202020204" pitchFamily="34" charset="0"/>
+              </a:rPr>
+              <a:t>haber</a:t>
+            </a:r>
+            <a:r>
+              <a:rPr lang="en-US" sz="1200" dirty="0">
+                <a:latin typeface="Arial" panose="020B0604020202020204" pitchFamily="34" charset="0"/>
+                <a:cs typeface="Arial" panose="020B0604020202020204" pitchFamily="34" charset="0"/>
+              </a:rPr>
+              <a:t> </a:t>
+            </a:r>
+            <a:r>
+              <a:rPr lang="en-US" sz="1200" dirty="0" err="1">
+                <a:latin typeface="Arial" panose="020B0604020202020204" pitchFamily="34" charset="0"/>
+                <a:cs typeface="Arial" panose="020B0604020202020204" pitchFamily="34" charset="0"/>
+              </a:rPr>
+              <a:t>introducido</a:t>
+            </a:r>
+            <a:r>
+              <a:rPr lang="en-US" sz="1200" dirty="0">
+                <a:latin typeface="Arial" panose="020B0604020202020204" pitchFamily="34" charset="0"/>
+                <a:cs typeface="Arial" panose="020B0604020202020204" pitchFamily="34" charset="0"/>
+              </a:rPr>
+              <a:t> un </a:t>
+            </a:r>
+            <a:r>
+              <a:rPr lang="en-US" sz="1200" dirty="0" err="1">
+                <a:latin typeface="Arial" panose="020B0604020202020204" pitchFamily="34" charset="0"/>
+                <a:cs typeface="Arial" panose="020B0604020202020204" pitchFamily="34" charset="0"/>
+              </a:rPr>
+              <a:t>desfase</a:t>
+            </a:r>
+            <a:r>
+              <a:rPr lang="en-US" sz="1200" dirty="0">
+                <a:latin typeface="Arial" panose="020B0604020202020204" pitchFamily="34" charset="0"/>
+                <a:cs typeface="Arial" panose="020B0604020202020204" pitchFamily="34" charset="0"/>
+              </a:rPr>
+              <a:t> </a:t>
+            </a:r>
+            <a:r>
+              <a:rPr lang="en-US" sz="1200" dirty="0" err="1">
+                <a:latin typeface="Arial" panose="020B0604020202020204" pitchFamily="34" charset="0"/>
+                <a:cs typeface="Arial" panose="020B0604020202020204" pitchFamily="34" charset="0"/>
+              </a:rPr>
+              <a:t>pequeño</a:t>
+            </a:r>
+            <a:r>
+              <a:rPr lang="en-US" sz="1200" dirty="0">
+                <a:latin typeface="Arial" panose="020B0604020202020204" pitchFamily="34" charset="0"/>
+                <a:cs typeface="Arial" panose="020B0604020202020204" pitchFamily="34" charset="0"/>
+              </a:rPr>
+              <a:t> y </a:t>
+            </a:r>
+            <a:r>
+              <a:rPr lang="en-US" sz="1200" dirty="0" err="1">
+                <a:latin typeface="Arial" panose="020B0604020202020204" pitchFamily="34" charset="0"/>
+                <a:cs typeface="Arial" panose="020B0604020202020204" pitchFamily="34" charset="0"/>
+              </a:rPr>
+              <a:t>el</a:t>
+            </a:r>
+            <a:r>
+              <a:rPr lang="en-US" sz="1200" dirty="0">
+                <a:latin typeface="Arial" panose="020B0604020202020204" pitchFamily="34" charset="0"/>
+                <a:cs typeface="Arial" panose="020B0604020202020204" pitchFamily="34" charset="0"/>
+              </a:rPr>
+              <a:t> FSR ser mayor al </a:t>
+            </a:r>
+            <a:r>
+              <a:rPr lang="en-US" sz="1200" dirty="0" err="1">
+                <a:latin typeface="Arial" panose="020B0604020202020204" pitchFamily="34" charset="0"/>
+                <a:cs typeface="Arial" panose="020B0604020202020204" pitchFamily="34" charset="0"/>
+              </a:rPr>
+              <a:t>rango</a:t>
+            </a:r>
+            <a:r>
+              <a:rPr lang="en-US" sz="1200" dirty="0">
+                <a:latin typeface="Arial" panose="020B0604020202020204" pitchFamily="34" charset="0"/>
+                <a:cs typeface="Arial" panose="020B0604020202020204" pitchFamily="34" charset="0"/>
+              </a:rPr>
+              <a:t> de longitudes de </a:t>
+            </a:r>
+            <a:r>
+              <a:rPr lang="en-US" sz="1200" dirty="0" err="1">
+                <a:latin typeface="Arial" panose="020B0604020202020204" pitchFamily="34" charset="0"/>
+                <a:cs typeface="Arial" panose="020B0604020202020204" pitchFamily="34" charset="0"/>
+              </a:rPr>
+              <a:t>onda</a:t>
+            </a:r>
+            <a:r>
+              <a:rPr lang="en-US" sz="1200" dirty="0">
+                <a:latin typeface="Arial" panose="020B0604020202020204" pitchFamily="34" charset="0"/>
+                <a:cs typeface="Arial" panose="020B0604020202020204" pitchFamily="34" charset="0"/>
+              </a:rPr>
+              <a:t> que </a:t>
+            </a:r>
+            <a:r>
+              <a:rPr lang="en-US" sz="1200" dirty="0" err="1">
+                <a:latin typeface="Arial" panose="020B0604020202020204" pitchFamily="34" charset="0"/>
+                <a:cs typeface="Arial" panose="020B0604020202020204" pitchFamily="34" charset="0"/>
+              </a:rPr>
+              <a:t>estamos</a:t>
+            </a:r>
+            <a:r>
+              <a:rPr lang="en-US" sz="1200" dirty="0">
+                <a:latin typeface="Arial" panose="020B0604020202020204" pitchFamily="34" charset="0"/>
+                <a:cs typeface="Arial" panose="020B0604020202020204" pitchFamily="34" charset="0"/>
+              </a:rPr>
+              <a:t> </a:t>
+            </a:r>
+            <a:r>
+              <a:rPr lang="en-US" sz="1200" dirty="0" err="1">
+                <a:latin typeface="Arial" panose="020B0604020202020204" pitchFamily="34" charset="0"/>
+                <a:cs typeface="Arial" panose="020B0604020202020204" pitchFamily="34" charset="0"/>
+              </a:rPr>
+              <a:t>viendo</a:t>
+            </a:r>
+            <a:r>
+              <a:rPr lang="en-US" sz="1200" dirty="0">
+                <a:latin typeface="Arial" panose="020B0604020202020204" pitchFamily="34" charset="0"/>
+                <a:cs typeface="Arial" panose="020B0604020202020204" pitchFamily="34" charset="0"/>
+              </a:rPr>
+              <a:t>.</a:t>
+            </a:r>
           </a:p>
           <a:p>
             <a:pPr algn="just"/>
@@ -5345,7 +6455,7 @@
         <p:spPr>
           <a:xfrm>
             <a:off x="5486400" y="4148021"/>
-            <a:ext cx="5823638" cy="1015663"/>
+            <a:ext cx="5823638" cy="1200329"/>
           </a:xfrm>
           <a:prstGeom prst="rect">
             <a:avLst/>
@@ -5368,30 +6478,6 @@
           <a:lstStyle/>
           <a:p>
             <a:pPr algn="just"/>
-            <a:r>
-              <a:rPr lang="en-US" sz="1200" dirty="0">
-                <a:latin typeface="Arial" panose="020B0604020202020204" pitchFamily="34" charset="0"/>
-                <a:cs typeface="Arial" panose="020B0604020202020204" pitchFamily="34" charset="0"/>
-              </a:rPr>
-              <a:t>Document all your results (</a:t>
-            </a:r>
-            <a:r>
-              <a:rPr lang="en-US" sz="1200" dirty="0" err="1">
-                <a:latin typeface="Arial" panose="020B0604020202020204" pitchFamily="34" charset="0"/>
-                <a:cs typeface="Arial" panose="020B0604020202020204" pitchFamily="34" charset="0"/>
-              </a:rPr>
-              <a:t>neff</a:t>
-            </a:r>
-            <a:r>
-              <a:rPr lang="en-US" sz="1200" dirty="0">
-                <a:latin typeface="Arial" panose="020B0604020202020204" pitchFamily="34" charset="0"/>
-                <a:cs typeface="Arial" panose="020B0604020202020204" pitchFamily="34" charset="0"/>
-              </a:rPr>
-              <a:t>, alpha, gamma, transfer function plots, etc.) and comment on the obtained results (in terms of FSR, amplitude, losses, etc.).</a:t>
-            </a:r>
-          </a:p>
-          <a:p>
-            <a:pPr algn="just"/>
             <a:endParaRPr lang="en-US" sz="1200" dirty="0">
               <a:latin typeface="Arial" panose="020B0604020202020204" pitchFamily="34" charset="0"/>
               <a:cs typeface="Arial" panose="020B0604020202020204" pitchFamily="34" charset="0"/>
@@ -5399,10 +6485,405 @@
           </a:p>
           <a:p>
             <a:pPr algn="just"/>
-            <a:endParaRPr lang="en-US" sz="1200" dirty="0">
-              <a:latin typeface="Arial" panose="020B0604020202020204" pitchFamily="34" charset="0"/>
-              <a:cs typeface="Arial" panose="020B0604020202020204" pitchFamily="34" charset="0"/>
-            </a:endParaRPr>
+            <a:r>
+              <a:rPr lang="en-US" sz="1200" dirty="0">
+                <a:latin typeface="Arial" panose="020B0604020202020204" pitchFamily="34" charset="0"/>
+                <a:cs typeface="Arial" panose="020B0604020202020204" pitchFamily="34" charset="0"/>
+              </a:rPr>
+              <a:t>Con una </a:t>
+            </a:r>
+            <a:r>
+              <a:rPr lang="en-US" sz="1200" dirty="0" err="1">
+                <a:latin typeface="Arial" panose="020B0604020202020204" pitchFamily="34" charset="0"/>
+                <a:cs typeface="Arial" panose="020B0604020202020204" pitchFamily="34" charset="0"/>
+              </a:rPr>
+              <a:t>diferencia</a:t>
+            </a:r>
+            <a:r>
+              <a:rPr lang="en-US" sz="1200" dirty="0">
+                <a:latin typeface="Arial" panose="020B0604020202020204" pitchFamily="34" charset="0"/>
+                <a:cs typeface="Arial" panose="020B0604020202020204" pitchFamily="34" charset="0"/>
+              </a:rPr>
+              <a:t> de </a:t>
+            </a:r>
+            <a:r>
+              <a:rPr lang="en-US" sz="1200" dirty="0" err="1">
+                <a:latin typeface="Arial" panose="020B0604020202020204" pitchFamily="34" charset="0"/>
+                <a:cs typeface="Arial" panose="020B0604020202020204" pitchFamily="34" charset="0"/>
+              </a:rPr>
+              <a:t>caminos</a:t>
+            </a:r>
+            <a:r>
+              <a:rPr lang="en-US" sz="1200" dirty="0">
+                <a:latin typeface="Arial" panose="020B0604020202020204" pitchFamily="34" charset="0"/>
+                <a:cs typeface="Arial" panose="020B0604020202020204" pitchFamily="34" charset="0"/>
+              </a:rPr>
+              <a:t> </a:t>
+            </a:r>
+            <a:r>
+              <a:rPr lang="en-US" sz="1200" dirty="0" err="1">
+                <a:latin typeface="Arial" panose="020B0604020202020204" pitchFamily="34" charset="0"/>
+                <a:cs typeface="Arial" panose="020B0604020202020204" pitchFamily="34" charset="0"/>
+              </a:rPr>
+              <a:t>significativa</a:t>
+            </a:r>
+            <a:r>
+              <a:rPr lang="en-US" sz="1200" dirty="0">
+                <a:latin typeface="Arial" panose="020B0604020202020204" pitchFamily="34" charset="0"/>
+                <a:cs typeface="Arial" panose="020B0604020202020204" pitchFamily="34" charset="0"/>
+              </a:rPr>
+              <a:t>, </a:t>
+            </a:r>
+            <a:r>
+              <a:rPr lang="en-US" sz="1200" dirty="0" err="1">
+                <a:latin typeface="Arial" panose="020B0604020202020204" pitchFamily="34" charset="0"/>
+                <a:cs typeface="Arial" panose="020B0604020202020204" pitchFamily="34" charset="0"/>
+              </a:rPr>
+              <a:t>llegamos</a:t>
+            </a:r>
+            <a:r>
+              <a:rPr lang="en-US" sz="1200" dirty="0">
+                <a:latin typeface="Arial" panose="020B0604020202020204" pitchFamily="34" charset="0"/>
+                <a:cs typeface="Arial" panose="020B0604020202020204" pitchFamily="34" charset="0"/>
+              </a:rPr>
+              <a:t> a </a:t>
+            </a:r>
+            <a:r>
+              <a:rPr lang="en-US" sz="1200" dirty="0" err="1">
+                <a:latin typeface="Arial" panose="020B0604020202020204" pitchFamily="34" charset="0"/>
+                <a:cs typeface="Arial" panose="020B0604020202020204" pitchFamily="34" charset="0"/>
+              </a:rPr>
+              <a:t>apreciar</a:t>
+            </a:r>
+            <a:r>
+              <a:rPr lang="en-US" sz="1200" dirty="0">
+                <a:latin typeface="Arial" panose="020B0604020202020204" pitchFamily="34" charset="0"/>
+                <a:cs typeface="Arial" panose="020B0604020202020204" pitchFamily="34" charset="0"/>
+              </a:rPr>
+              <a:t> bien ese </a:t>
+            </a:r>
+            <a:r>
+              <a:rPr lang="en-US" sz="1200" dirty="0" err="1">
+                <a:latin typeface="Arial" panose="020B0604020202020204" pitchFamily="34" charset="0"/>
+                <a:cs typeface="Arial" panose="020B0604020202020204" pitchFamily="34" charset="0"/>
+              </a:rPr>
+              <a:t>desfase</a:t>
+            </a:r>
+            <a:r>
+              <a:rPr lang="en-US" sz="1200" dirty="0">
+                <a:latin typeface="Arial" panose="020B0604020202020204" pitchFamily="34" charset="0"/>
+                <a:cs typeface="Arial" panose="020B0604020202020204" pitchFamily="34" charset="0"/>
+              </a:rPr>
+              <a:t> entre </a:t>
+            </a:r>
+            <a:r>
+              <a:rPr lang="en-US" sz="1200" dirty="0" err="1">
+                <a:latin typeface="Arial" panose="020B0604020202020204" pitchFamily="34" charset="0"/>
+                <a:cs typeface="Arial" panose="020B0604020202020204" pitchFamily="34" charset="0"/>
+              </a:rPr>
+              <a:t>brazos</a:t>
+            </a:r>
+            <a:r>
+              <a:rPr lang="en-US" sz="1200" dirty="0">
+                <a:latin typeface="Arial" panose="020B0604020202020204" pitchFamily="34" charset="0"/>
+                <a:cs typeface="Arial" panose="020B0604020202020204" pitchFamily="34" charset="0"/>
+              </a:rPr>
+              <a:t> </a:t>
+            </a:r>
+            <a:r>
+              <a:rPr lang="en-US" sz="1200" dirty="0" err="1">
+                <a:latin typeface="Arial" panose="020B0604020202020204" pitchFamily="34" charset="0"/>
+                <a:cs typeface="Arial" panose="020B0604020202020204" pitchFamily="34" charset="0"/>
+              </a:rPr>
+              <a:t>viendo</a:t>
+            </a:r>
+            <a:r>
+              <a:rPr lang="en-US" sz="1200" dirty="0">
+                <a:latin typeface="Arial" panose="020B0604020202020204" pitchFamily="34" charset="0"/>
+                <a:cs typeface="Arial" panose="020B0604020202020204" pitchFamily="34" charset="0"/>
+              </a:rPr>
+              <a:t> </a:t>
+            </a:r>
+            <a:r>
+              <a:rPr lang="en-US" sz="1200" dirty="0" err="1">
+                <a:latin typeface="Arial" panose="020B0604020202020204" pitchFamily="34" charset="0"/>
+                <a:cs typeface="Arial" panose="020B0604020202020204" pitchFamily="34" charset="0"/>
+              </a:rPr>
+              <a:t>interferencias</a:t>
+            </a:r>
+            <a:r>
+              <a:rPr lang="en-US" sz="1200" dirty="0">
+                <a:latin typeface="Arial" panose="020B0604020202020204" pitchFamily="34" charset="0"/>
+                <a:cs typeface="Arial" panose="020B0604020202020204" pitchFamily="34" charset="0"/>
+              </a:rPr>
+              <a:t> </a:t>
+            </a:r>
+            <a:r>
+              <a:rPr lang="en-US" sz="1200" dirty="0" err="1">
+                <a:latin typeface="Arial" panose="020B0604020202020204" pitchFamily="34" charset="0"/>
+                <a:cs typeface="Arial" panose="020B0604020202020204" pitchFamily="34" charset="0"/>
+              </a:rPr>
+              <a:t>constructivas</a:t>
+            </a:r>
+            <a:r>
+              <a:rPr lang="en-US" sz="1200" dirty="0">
+                <a:latin typeface="Arial" panose="020B0604020202020204" pitchFamily="34" charset="0"/>
+                <a:cs typeface="Arial" panose="020B0604020202020204" pitchFamily="34" charset="0"/>
+              </a:rPr>
+              <a:t> (</a:t>
+            </a:r>
+            <a:r>
+              <a:rPr lang="en-US" sz="1200" dirty="0" err="1">
+                <a:latin typeface="Arial" panose="020B0604020202020204" pitchFamily="34" charset="0"/>
+                <a:cs typeface="Arial" panose="020B0604020202020204" pitchFamily="34" charset="0"/>
+              </a:rPr>
+              <a:t>máximo</a:t>
+            </a:r>
+            <a:r>
+              <a:rPr lang="en-US" sz="1200" dirty="0">
+                <a:latin typeface="Arial" panose="020B0604020202020204" pitchFamily="34" charset="0"/>
+                <a:cs typeface="Arial" panose="020B0604020202020204" pitchFamily="34" charset="0"/>
+              </a:rPr>
+              <a:t> </a:t>
+            </a:r>
+            <a:r>
+              <a:rPr lang="en-US" sz="1200" dirty="0" err="1">
+                <a:latin typeface="Arial" panose="020B0604020202020204" pitchFamily="34" charset="0"/>
+                <a:cs typeface="Arial" panose="020B0604020202020204" pitchFamily="34" charset="0"/>
+              </a:rPr>
+              <a:t>en</a:t>
+            </a:r>
+            <a:r>
+              <a:rPr lang="en-US" sz="1200" dirty="0">
+                <a:latin typeface="Arial" panose="020B0604020202020204" pitchFamily="34" charset="0"/>
+                <a:cs typeface="Arial" panose="020B0604020202020204" pitchFamily="34" charset="0"/>
+              </a:rPr>
+              <a:t> 1) y </a:t>
+            </a:r>
+            <a:r>
+              <a:rPr lang="en-US" sz="1200" dirty="0" err="1">
+                <a:latin typeface="Arial" panose="020B0604020202020204" pitchFamily="34" charset="0"/>
+                <a:cs typeface="Arial" panose="020B0604020202020204" pitchFamily="34" charset="0"/>
+              </a:rPr>
+              <a:t>destructivas</a:t>
+            </a:r>
+            <a:r>
+              <a:rPr lang="en-US" sz="1200" dirty="0">
+                <a:latin typeface="Arial" panose="020B0604020202020204" pitchFamily="34" charset="0"/>
+                <a:cs typeface="Arial" panose="020B0604020202020204" pitchFamily="34" charset="0"/>
+              </a:rPr>
+              <a:t> (</a:t>
+            </a:r>
+            <a:r>
+              <a:rPr lang="en-US" sz="1200" dirty="0" err="1">
+                <a:latin typeface="Arial" panose="020B0604020202020204" pitchFamily="34" charset="0"/>
+                <a:cs typeface="Arial" panose="020B0604020202020204" pitchFamily="34" charset="0"/>
+              </a:rPr>
+              <a:t>mínimo</a:t>
+            </a:r>
+            <a:r>
+              <a:rPr lang="en-US" sz="1200" dirty="0">
+                <a:latin typeface="Arial" panose="020B0604020202020204" pitchFamily="34" charset="0"/>
+                <a:cs typeface="Arial" panose="020B0604020202020204" pitchFamily="34" charset="0"/>
+              </a:rPr>
+              <a:t> </a:t>
+            </a:r>
+            <a:r>
+              <a:rPr lang="en-US" sz="1200" dirty="0" err="1">
+                <a:latin typeface="Arial" panose="020B0604020202020204" pitchFamily="34" charset="0"/>
+                <a:cs typeface="Arial" panose="020B0604020202020204" pitchFamily="34" charset="0"/>
+              </a:rPr>
+              <a:t>en</a:t>
+            </a:r>
+            <a:r>
+              <a:rPr lang="en-US" sz="1200" dirty="0">
+                <a:latin typeface="Arial" panose="020B0604020202020204" pitchFamily="34" charset="0"/>
+                <a:cs typeface="Arial" panose="020B0604020202020204" pitchFamily="34" charset="0"/>
+              </a:rPr>
+              <a:t> 0) </a:t>
+            </a:r>
+            <a:r>
+              <a:rPr lang="en-US" sz="1200" dirty="0" err="1">
+                <a:latin typeface="Arial" panose="020B0604020202020204" pitchFamily="34" charset="0"/>
+                <a:cs typeface="Arial" panose="020B0604020202020204" pitchFamily="34" charset="0"/>
+              </a:rPr>
+              <a:t>en</a:t>
+            </a:r>
+            <a:r>
+              <a:rPr lang="en-US" sz="1200" dirty="0">
+                <a:latin typeface="Arial" panose="020B0604020202020204" pitchFamily="34" charset="0"/>
+                <a:cs typeface="Arial" panose="020B0604020202020204" pitchFamily="34" charset="0"/>
+              </a:rPr>
+              <a:t> forma de </a:t>
+            </a:r>
+            <a:r>
+              <a:rPr lang="en-US" sz="1200" dirty="0" err="1">
+                <a:latin typeface="Arial" panose="020B0604020202020204" pitchFamily="34" charset="0"/>
+                <a:cs typeface="Arial" panose="020B0604020202020204" pitchFamily="34" charset="0"/>
+              </a:rPr>
+              <a:t>sinusoides</a:t>
+            </a:r>
+            <a:r>
+              <a:rPr lang="en-US" sz="1200" dirty="0">
+                <a:latin typeface="Arial" panose="020B0604020202020204" pitchFamily="34" charset="0"/>
+                <a:cs typeface="Arial" panose="020B0604020202020204" pitchFamily="34" charset="0"/>
+              </a:rPr>
+              <a:t>. </a:t>
+            </a:r>
+            <a:r>
+              <a:rPr lang="en-US" sz="1200" dirty="0" err="1">
+                <a:latin typeface="Arial" panose="020B0604020202020204" pitchFamily="34" charset="0"/>
+                <a:cs typeface="Arial" panose="020B0604020202020204" pitchFamily="34" charset="0"/>
+              </a:rPr>
+              <a:t>En</a:t>
+            </a:r>
+            <a:r>
+              <a:rPr lang="en-US" sz="1200" dirty="0">
+                <a:latin typeface="Arial" panose="020B0604020202020204" pitchFamily="34" charset="0"/>
+                <a:cs typeface="Arial" panose="020B0604020202020204" pitchFamily="34" charset="0"/>
+              </a:rPr>
+              <a:t> </a:t>
+            </a:r>
+            <a:r>
+              <a:rPr lang="en-US" sz="1200" dirty="0" err="1">
+                <a:latin typeface="Arial" panose="020B0604020202020204" pitchFamily="34" charset="0"/>
+                <a:cs typeface="Arial" panose="020B0604020202020204" pitchFamily="34" charset="0"/>
+              </a:rPr>
+              <a:t>este</a:t>
+            </a:r>
+            <a:r>
+              <a:rPr lang="en-US" sz="1200" dirty="0">
+                <a:latin typeface="Arial" panose="020B0604020202020204" pitchFamily="34" charset="0"/>
+                <a:cs typeface="Arial" panose="020B0604020202020204" pitchFamily="34" charset="0"/>
+              </a:rPr>
+              <a:t> </a:t>
+            </a:r>
+            <a:r>
+              <a:rPr lang="en-US" sz="1200" dirty="0" err="1">
+                <a:latin typeface="Arial" panose="020B0604020202020204" pitchFamily="34" charset="0"/>
+                <a:cs typeface="Arial" panose="020B0604020202020204" pitchFamily="34" charset="0"/>
+              </a:rPr>
+              <a:t>caso</a:t>
+            </a:r>
+            <a:r>
+              <a:rPr lang="en-US" sz="1200" dirty="0">
+                <a:latin typeface="Arial" panose="020B0604020202020204" pitchFamily="34" charset="0"/>
+                <a:cs typeface="Arial" panose="020B0604020202020204" pitchFamily="34" charset="0"/>
+              </a:rPr>
+              <a:t> </a:t>
+            </a:r>
+            <a:r>
+              <a:rPr lang="en-US" sz="1200" dirty="0" err="1">
+                <a:latin typeface="Arial" panose="020B0604020202020204" pitchFamily="34" charset="0"/>
+                <a:cs typeface="Arial" panose="020B0604020202020204" pitchFamily="34" charset="0"/>
+              </a:rPr>
+              <a:t>sí</a:t>
+            </a:r>
+            <a:r>
+              <a:rPr lang="en-US" sz="1200" dirty="0">
+                <a:latin typeface="Arial" panose="020B0604020202020204" pitchFamily="34" charset="0"/>
+                <a:cs typeface="Arial" panose="020B0604020202020204" pitchFamily="34" charset="0"/>
+              </a:rPr>
+              <a:t> </a:t>
+            </a:r>
+            <a:r>
+              <a:rPr lang="en-US" sz="1200" dirty="0" err="1">
+                <a:latin typeface="Arial" panose="020B0604020202020204" pitchFamily="34" charset="0"/>
+                <a:cs typeface="Arial" panose="020B0604020202020204" pitchFamily="34" charset="0"/>
+              </a:rPr>
+              <a:t>podríamos</a:t>
+            </a:r>
+            <a:r>
+              <a:rPr lang="en-US" sz="1200" dirty="0">
+                <a:latin typeface="Arial" panose="020B0604020202020204" pitchFamily="34" charset="0"/>
+                <a:cs typeface="Arial" panose="020B0604020202020204" pitchFamily="34" charset="0"/>
+              </a:rPr>
+              <a:t> </a:t>
+            </a:r>
+            <a:r>
+              <a:rPr lang="en-US" sz="1200" dirty="0" err="1">
+                <a:latin typeface="Arial" panose="020B0604020202020204" pitchFamily="34" charset="0"/>
+                <a:cs typeface="Arial" panose="020B0604020202020204" pitchFamily="34" charset="0"/>
+              </a:rPr>
+              <a:t>determinar</a:t>
+            </a:r>
+            <a:r>
+              <a:rPr lang="en-US" sz="1200" dirty="0">
+                <a:latin typeface="Arial" panose="020B0604020202020204" pitchFamily="34" charset="0"/>
+                <a:cs typeface="Arial" panose="020B0604020202020204" pitchFamily="34" charset="0"/>
+              </a:rPr>
+              <a:t> </a:t>
+            </a:r>
+            <a:r>
+              <a:rPr lang="en-US" sz="1200" dirty="0" err="1">
+                <a:latin typeface="Arial" panose="020B0604020202020204" pitchFamily="34" charset="0"/>
+                <a:cs typeface="Arial" panose="020B0604020202020204" pitchFamily="34" charset="0"/>
+              </a:rPr>
+              <a:t>el</a:t>
+            </a:r>
+            <a:r>
+              <a:rPr lang="en-US" sz="1200" dirty="0">
+                <a:latin typeface="Arial" panose="020B0604020202020204" pitchFamily="34" charset="0"/>
+                <a:cs typeface="Arial" panose="020B0604020202020204" pitchFamily="34" charset="0"/>
+              </a:rPr>
+              <a:t> FSR a </a:t>
+            </a:r>
+            <a:r>
+              <a:rPr lang="en-US" sz="1200" dirty="0" err="1">
+                <a:latin typeface="Arial" panose="020B0604020202020204" pitchFamily="34" charset="0"/>
+                <a:cs typeface="Arial" panose="020B0604020202020204" pitchFamily="34" charset="0"/>
+              </a:rPr>
+              <a:t>través</a:t>
+            </a:r>
+            <a:r>
+              <a:rPr lang="en-US" sz="1200" dirty="0">
+                <a:latin typeface="Arial" panose="020B0604020202020204" pitchFamily="34" charset="0"/>
+                <a:cs typeface="Arial" panose="020B0604020202020204" pitchFamily="34" charset="0"/>
+              </a:rPr>
+              <a:t> de la </a:t>
+            </a:r>
+            <a:r>
+              <a:rPr lang="en-US" sz="1200" dirty="0" err="1">
+                <a:latin typeface="Arial" panose="020B0604020202020204" pitchFamily="34" charset="0"/>
+                <a:cs typeface="Arial" panose="020B0604020202020204" pitchFamily="34" charset="0"/>
+              </a:rPr>
+              <a:t>gráfica</a:t>
+            </a:r>
+            <a:r>
+              <a:rPr lang="en-US" sz="1200" dirty="0">
+                <a:latin typeface="Arial" panose="020B0604020202020204" pitchFamily="34" charset="0"/>
+                <a:cs typeface="Arial" panose="020B0604020202020204" pitchFamily="34" charset="0"/>
+              </a:rPr>
+              <a:t>, </a:t>
+            </a:r>
+            <a:r>
+              <a:rPr lang="en-US" sz="1200" dirty="0" err="1">
+                <a:latin typeface="Arial" panose="020B0604020202020204" pitchFamily="34" charset="0"/>
+                <a:cs typeface="Arial" panose="020B0604020202020204" pitchFamily="34" charset="0"/>
+              </a:rPr>
+              <a:t>alrededor</a:t>
+            </a:r>
+            <a:r>
+              <a:rPr lang="en-US" sz="1200" dirty="0">
+                <a:latin typeface="Arial" panose="020B0604020202020204" pitchFamily="34" charset="0"/>
+                <a:cs typeface="Arial" panose="020B0604020202020204" pitchFamily="34" charset="0"/>
+              </a:rPr>
+              <a:t> de </a:t>
+            </a:r>
+            <a:r>
+              <a:rPr lang="en-US" sz="1200" dirty="0" err="1">
+                <a:latin typeface="Arial" panose="020B0604020202020204" pitchFamily="34" charset="0"/>
+                <a:cs typeface="Arial" panose="020B0604020202020204" pitchFamily="34" charset="0"/>
+              </a:rPr>
+              <a:t>unos</a:t>
+            </a:r>
+            <a:r>
+              <a:rPr lang="en-US" sz="1200" dirty="0">
+                <a:latin typeface="Arial" panose="020B0604020202020204" pitchFamily="34" charset="0"/>
+                <a:cs typeface="Arial" panose="020B0604020202020204" pitchFamily="34" charset="0"/>
+              </a:rPr>
+              <a:t> 28 nm.</a:t>
+            </a:r>
           </a:p>
           <a:p>
             <a:pPr algn="just"/>
@@ -5463,7 +6944,7 @@
             </p:nvSpPr>
             <p:spPr>
               <a:xfrm>
-                <a:off x="1066800" y="589339"/>
+                <a:off x="1219200" y="729939"/>
                 <a:ext cx="1066800" cy="276999"/>
               </a:xfrm>
             </p:spPr>
@@ -5471,6 +6952,7 @@
               <a:bodyPr/>
               <a:lstStyle/>
               <a:p>
+                <a:pPr/>
                 <a14:m>
                   <m:oMathPara xmlns:m="http://schemas.openxmlformats.org/officeDocument/2006/math">
                     <m:oMathParaPr>
@@ -5519,7 +7001,7 @@
             </p:nvSpPr>
             <p:spPr>
               <a:xfrm>
-                <a:off x="1066800" y="589339"/>
+                <a:off x="1219200" y="729939"/>
                 <a:ext cx="1066800" cy="276999"/>
               </a:xfrm>
               <a:blipFill>
@@ -5629,8 +7111,8 @@
         </p:blipFill>
         <p:spPr>
           <a:xfrm>
-            <a:off x="958162" y="900906"/>
-            <a:ext cx="3200400" cy="2528094"/>
+            <a:off x="958162" y="1300903"/>
+            <a:ext cx="4071038" cy="3215837"/>
           </a:xfrm>
           <a:prstGeom prst="rect">
             <a:avLst/>
@@ -5651,8 +7133,8 @@
         </p:nvSpPr>
         <p:spPr>
           <a:xfrm>
-            <a:off x="5410200" y="1143000"/>
-            <a:ext cx="5823638" cy="1015663"/>
+            <a:off x="1339162" y="4761131"/>
+            <a:ext cx="3690038" cy="830997"/>
           </a:xfrm>
           <a:prstGeom prst="rect">
             <a:avLst/>
@@ -5680,43 +7162,162 @@
                 <a:latin typeface="Arial" panose="020B0604020202020204" pitchFamily="34" charset="0"/>
                 <a:cs typeface="Arial" panose="020B0604020202020204" pitchFamily="34" charset="0"/>
               </a:rPr>
-              <a:t>Document all your results (</a:t>
+              <a:t>Con un valor de 0.7 de alpha, </a:t>
             </a:r>
             <a:r>
               <a:rPr lang="en-US" sz="1200" dirty="0" err="1">
                 <a:latin typeface="Arial" panose="020B0604020202020204" pitchFamily="34" charset="0"/>
                 <a:cs typeface="Arial" panose="020B0604020202020204" pitchFamily="34" charset="0"/>
               </a:rPr>
-              <a:t>neff</a:t>
+              <a:t>observamos</a:t>
             </a:r>
             <a:r>
               <a:rPr lang="en-US" sz="1200" dirty="0">
                 <a:latin typeface="Arial" panose="020B0604020202020204" pitchFamily="34" charset="0"/>
                 <a:cs typeface="Arial" panose="020B0604020202020204" pitchFamily="34" charset="0"/>
               </a:rPr>
-              <a:t>, alpha, gamma, transfer function plots, etc.) and comment on the obtained results (in terms of FSR, amplitude, losses, etc.).</a:t>
-            </a:r>
-          </a:p>
-          <a:p>
-            <a:pPr algn="just"/>
-            <a:endParaRPr lang="en-US" sz="1200" dirty="0">
-              <a:latin typeface="Arial" panose="020B0604020202020204" pitchFamily="34" charset="0"/>
-              <a:cs typeface="Arial" panose="020B0604020202020204" pitchFamily="34" charset="0"/>
-            </a:endParaRPr>
-          </a:p>
-          <a:p>
-            <a:pPr algn="just"/>
-            <a:endParaRPr lang="en-US" sz="1200" dirty="0">
-              <a:latin typeface="Arial" panose="020B0604020202020204" pitchFamily="34" charset="0"/>
-              <a:cs typeface="Arial" panose="020B0604020202020204" pitchFamily="34" charset="0"/>
-            </a:endParaRPr>
-          </a:p>
-          <a:p>
-            <a:pPr algn="just"/>
-            <a:endParaRPr lang="en-US" sz="1200" dirty="0">
-              <a:latin typeface="Arial" panose="020B0604020202020204" pitchFamily="34" charset="0"/>
-              <a:cs typeface="Arial" panose="020B0604020202020204" pitchFamily="34" charset="0"/>
-            </a:endParaRPr>
+              <a:t> que los </a:t>
+            </a:r>
+            <a:r>
+              <a:rPr lang="en-US" sz="1200" dirty="0" err="1">
+                <a:latin typeface="Arial" panose="020B0604020202020204" pitchFamily="34" charset="0"/>
+                <a:cs typeface="Arial" panose="020B0604020202020204" pitchFamily="34" charset="0"/>
+              </a:rPr>
+              <a:t>máximos</a:t>
+            </a:r>
+            <a:r>
+              <a:rPr lang="en-US" sz="1200" dirty="0">
+                <a:latin typeface="Arial" panose="020B0604020202020204" pitchFamily="34" charset="0"/>
+                <a:cs typeface="Arial" panose="020B0604020202020204" pitchFamily="34" charset="0"/>
+              </a:rPr>
+              <a:t> </a:t>
+            </a:r>
+            <a:r>
+              <a:rPr lang="en-US" sz="1200" dirty="0" err="1">
+                <a:latin typeface="Arial" panose="020B0604020202020204" pitchFamily="34" charset="0"/>
+                <a:cs typeface="Arial" panose="020B0604020202020204" pitchFamily="34" charset="0"/>
+              </a:rPr>
+              <a:t>están</a:t>
+            </a:r>
+            <a:r>
+              <a:rPr lang="en-US" sz="1200" dirty="0">
+                <a:latin typeface="Arial" panose="020B0604020202020204" pitchFamily="34" charset="0"/>
+                <a:cs typeface="Arial" panose="020B0604020202020204" pitchFamily="34" charset="0"/>
+              </a:rPr>
+              <a:t> </a:t>
+            </a:r>
+            <a:r>
+              <a:rPr lang="en-US" sz="1200" dirty="0" err="1">
+                <a:latin typeface="Arial" panose="020B0604020202020204" pitchFamily="34" charset="0"/>
+                <a:cs typeface="Arial" panose="020B0604020202020204" pitchFamily="34" charset="0"/>
+              </a:rPr>
+              <a:t>acotados</a:t>
+            </a:r>
+            <a:r>
+              <a:rPr lang="en-US" sz="1200" dirty="0">
+                <a:latin typeface="Arial" panose="020B0604020202020204" pitchFamily="34" charset="0"/>
+                <a:cs typeface="Arial" panose="020B0604020202020204" pitchFamily="34" charset="0"/>
+              </a:rPr>
+              <a:t> a un valor de 0.3, </a:t>
+            </a:r>
+            <a:r>
+              <a:rPr lang="en-US" sz="1200" dirty="0" err="1">
+                <a:latin typeface="Arial" panose="020B0604020202020204" pitchFamily="34" charset="0"/>
+                <a:cs typeface="Arial" panose="020B0604020202020204" pitchFamily="34" charset="0"/>
+              </a:rPr>
+              <a:t>esto</a:t>
+            </a:r>
+            <a:r>
+              <a:rPr lang="en-US" sz="1200" dirty="0">
+                <a:latin typeface="Arial" panose="020B0604020202020204" pitchFamily="34" charset="0"/>
+                <a:cs typeface="Arial" panose="020B0604020202020204" pitchFamily="34" charset="0"/>
+              </a:rPr>
+              <a:t> se debe a que se </a:t>
+            </a:r>
+            <a:r>
+              <a:rPr lang="en-US" sz="1200" dirty="0" err="1">
+                <a:latin typeface="Arial" panose="020B0604020202020204" pitchFamily="34" charset="0"/>
+                <a:cs typeface="Arial" panose="020B0604020202020204" pitchFamily="34" charset="0"/>
+              </a:rPr>
+              <a:t>absorbe</a:t>
+            </a:r>
+            <a:r>
+              <a:rPr lang="en-US" sz="1200" dirty="0">
+                <a:latin typeface="Arial" panose="020B0604020202020204" pitchFamily="34" charset="0"/>
+                <a:cs typeface="Arial" panose="020B0604020202020204" pitchFamily="34" charset="0"/>
+              </a:rPr>
+              <a:t> o </a:t>
+            </a:r>
+            <a:r>
+              <a:rPr lang="en-US" sz="1200" dirty="0" err="1">
+                <a:latin typeface="Arial" panose="020B0604020202020204" pitchFamily="34" charset="0"/>
+                <a:cs typeface="Arial" panose="020B0604020202020204" pitchFamily="34" charset="0"/>
+              </a:rPr>
+              <a:t>dispersa</a:t>
+            </a:r>
+            <a:r>
+              <a:rPr lang="en-US" sz="1200" dirty="0">
+                <a:latin typeface="Arial" panose="020B0604020202020204" pitchFamily="34" charset="0"/>
+                <a:cs typeface="Arial" panose="020B0604020202020204" pitchFamily="34" charset="0"/>
+              </a:rPr>
+              <a:t> </a:t>
+            </a:r>
+            <a:r>
+              <a:rPr lang="en-US" sz="1200" dirty="0" err="1">
+                <a:latin typeface="Arial" panose="020B0604020202020204" pitchFamily="34" charset="0"/>
+                <a:cs typeface="Arial" panose="020B0604020202020204" pitchFamily="34" charset="0"/>
+              </a:rPr>
+              <a:t>parte</a:t>
+            </a:r>
+            <a:r>
+              <a:rPr lang="en-US" sz="1200" dirty="0">
+                <a:latin typeface="Arial" panose="020B0604020202020204" pitchFamily="34" charset="0"/>
+                <a:cs typeface="Arial" panose="020B0604020202020204" pitchFamily="34" charset="0"/>
+              </a:rPr>
+              <a:t> de la </a:t>
+            </a:r>
+            <a:r>
+              <a:rPr lang="en-US" sz="1200" dirty="0" err="1">
+                <a:latin typeface="Arial" panose="020B0604020202020204" pitchFamily="34" charset="0"/>
+                <a:cs typeface="Arial" panose="020B0604020202020204" pitchFamily="34" charset="0"/>
+              </a:rPr>
+              <a:t>energía</a:t>
+            </a:r>
+            <a:r>
+              <a:rPr lang="en-US" sz="1200" dirty="0">
+                <a:latin typeface="Arial" panose="020B0604020202020204" pitchFamily="34" charset="0"/>
+                <a:cs typeface="Arial" panose="020B0604020202020204" pitchFamily="34" charset="0"/>
+              </a:rPr>
+              <a:t>. El FSR se </a:t>
+            </a:r>
+            <a:r>
+              <a:rPr lang="en-US" sz="1200" dirty="0" err="1">
+                <a:latin typeface="Arial" panose="020B0604020202020204" pitchFamily="34" charset="0"/>
+                <a:cs typeface="Arial" panose="020B0604020202020204" pitchFamily="34" charset="0"/>
+              </a:rPr>
+              <a:t>mantiene</a:t>
+            </a:r>
+            <a:r>
+              <a:rPr lang="en-US" sz="1200" dirty="0">
+                <a:latin typeface="Arial" panose="020B0604020202020204" pitchFamily="34" charset="0"/>
+                <a:cs typeface="Arial" panose="020B0604020202020204" pitchFamily="34" charset="0"/>
+              </a:rPr>
+              <a:t> </a:t>
+            </a:r>
+            <a:r>
+              <a:rPr lang="en-US" sz="1200" dirty="0" err="1">
+                <a:latin typeface="Arial" panose="020B0604020202020204" pitchFamily="34" charset="0"/>
+                <a:cs typeface="Arial" panose="020B0604020202020204" pitchFamily="34" charset="0"/>
+              </a:rPr>
+              <a:t>en</a:t>
+            </a:r>
+            <a:r>
+              <a:rPr lang="en-US" sz="1200" dirty="0">
+                <a:latin typeface="Arial" panose="020B0604020202020204" pitchFamily="34" charset="0"/>
+                <a:cs typeface="Arial" panose="020B0604020202020204" pitchFamily="34" charset="0"/>
+              </a:rPr>
+              <a:t> 28 nm.</a:t>
+            </a:r>
           </a:p>
         </p:txBody>
       </p:sp>
@@ -5736,7 +7337,7 @@
             </p:nvSpPr>
             <p:spPr>
               <a:xfrm>
-                <a:off x="1295400" y="3455803"/>
+                <a:off x="6781800" y="681672"/>
                 <a:ext cx="974725" cy="369332"/>
               </a:xfrm>
               <a:prstGeom prst="rect">
@@ -5811,7 +7412,7 @@
             </p:nvSpPr>
             <p:spPr>
               <a:xfrm>
-                <a:off x="1295400" y="3455803"/>
+                <a:off x="6781800" y="681672"/>
                 <a:ext cx="974725" cy="369332"/>
               </a:xfrm>
               <a:prstGeom prst="rect">
@@ -5861,8 +7462,8 @@
         </p:blipFill>
         <p:spPr>
           <a:xfrm>
-            <a:off x="1080615" y="3810516"/>
-            <a:ext cx="3094880" cy="2483545"/>
+            <a:off x="6439702" y="1249858"/>
+            <a:ext cx="4007429" cy="3215837"/>
           </a:xfrm>
           <a:prstGeom prst="rect">
             <a:avLst/>
@@ -5883,8 +7484,8 @@
         </p:nvSpPr>
         <p:spPr>
           <a:xfrm>
-            <a:off x="5321614" y="4036625"/>
-            <a:ext cx="5823638" cy="1015663"/>
+            <a:off x="6871282" y="4734362"/>
+            <a:ext cx="3804338" cy="646331"/>
           </a:xfrm>
           <a:prstGeom prst="rect">
             <a:avLst/>
@@ -5912,43 +7513,92 @@
                 <a:latin typeface="Arial" panose="020B0604020202020204" pitchFamily="34" charset="0"/>
                 <a:cs typeface="Arial" panose="020B0604020202020204" pitchFamily="34" charset="0"/>
               </a:rPr>
-              <a:t>Document all your results (</a:t>
+              <a:t>Por </a:t>
             </a:r>
             <a:r>
               <a:rPr lang="en-US" sz="1200" dirty="0" err="1">
                 <a:latin typeface="Arial" panose="020B0604020202020204" pitchFamily="34" charset="0"/>
                 <a:cs typeface="Arial" panose="020B0604020202020204" pitchFamily="34" charset="0"/>
               </a:rPr>
-              <a:t>neff</a:t>
+              <a:t>otro</a:t>
             </a:r>
             <a:r>
               <a:rPr lang="en-US" sz="1200" dirty="0">
                 <a:latin typeface="Arial" panose="020B0604020202020204" pitchFamily="34" charset="0"/>
                 <a:cs typeface="Arial" panose="020B0604020202020204" pitchFamily="34" charset="0"/>
               </a:rPr>
-              <a:t>, alpha, gamma, transfer function plots, etc.) and comment on the obtained results (in terms of FSR, amplitude, losses, etc.).</a:t>
-            </a:r>
-          </a:p>
-          <a:p>
-            <a:pPr algn="just"/>
-            <a:endParaRPr lang="en-US" sz="1200" dirty="0">
-              <a:latin typeface="Arial" panose="020B0604020202020204" pitchFamily="34" charset="0"/>
-              <a:cs typeface="Arial" panose="020B0604020202020204" pitchFamily="34" charset="0"/>
-            </a:endParaRPr>
-          </a:p>
-          <a:p>
-            <a:pPr algn="just"/>
-            <a:endParaRPr lang="en-US" sz="1200" dirty="0">
-              <a:latin typeface="Arial" panose="020B0604020202020204" pitchFamily="34" charset="0"/>
-              <a:cs typeface="Arial" panose="020B0604020202020204" pitchFamily="34" charset="0"/>
-            </a:endParaRPr>
-          </a:p>
-          <a:p>
-            <a:pPr algn="just"/>
-            <a:endParaRPr lang="en-US" sz="1200" dirty="0">
-              <a:latin typeface="Arial" panose="020B0604020202020204" pitchFamily="34" charset="0"/>
-              <a:cs typeface="Arial" panose="020B0604020202020204" pitchFamily="34" charset="0"/>
-            </a:endParaRPr>
+              <a:t> </a:t>
+            </a:r>
+            <a:r>
+              <a:rPr lang="en-US" sz="1200" dirty="0" err="1">
+                <a:latin typeface="Arial" panose="020B0604020202020204" pitchFamily="34" charset="0"/>
+                <a:cs typeface="Arial" panose="020B0604020202020204" pitchFamily="34" charset="0"/>
+              </a:rPr>
+              <a:t>lado</a:t>
+            </a:r>
+            <a:r>
+              <a:rPr lang="en-US" sz="1200" dirty="0">
+                <a:latin typeface="Arial" panose="020B0604020202020204" pitchFamily="34" charset="0"/>
+                <a:cs typeface="Arial" panose="020B0604020202020204" pitchFamily="34" charset="0"/>
+              </a:rPr>
+              <a:t>, con un valor de 0.4 de gamma, los </a:t>
+            </a:r>
+            <a:r>
+              <a:rPr lang="en-US" sz="1200" dirty="0" err="1">
+                <a:latin typeface="Arial" panose="020B0604020202020204" pitchFamily="34" charset="0"/>
+                <a:cs typeface="Arial" panose="020B0604020202020204" pitchFamily="34" charset="0"/>
+              </a:rPr>
+              <a:t>máximos</a:t>
+            </a:r>
+            <a:r>
+              <a:rPr lang="en-US" sz="1200" dirty="0">
+                <a:latin typeface="Arial" panose="020B0604020202020204" pitchFamily="34" charset="0"/>
+                <a:cs typeface="Arial" panose="020B0604020202020204" pitchFamily="34" charset="0"/>
+              </a:rPr>
+              <a:t> se </a:t>
+            </a:r>
+            <a:r>
+              <a:rPr lang="en-US" sz="1200" dirty="0" err="1">
+                <a:latin typeface="Arial" panose="020B0604020202020204" pitchFamily="34" charset="0"/>
+                <a:cs typeface="Arial" panose="020B0604020202020204" pitchFamily="34" charset="0"/>
+              </a:rPr>
+              <a:t>limitan</a:t>
+            </a:r>
+            <a:r>
+              <a:rPr lang="en-US" sz="1200" dirty="0">
+                <a:latin typeface="Arial" panose="020B0604020202020204" pitchFamily="34" charset="0"/>
+                <a:cs typeface="Arial" panose="020B0604020202020204" pitchFamily="34" charset="0"/>
+              </a:rPr>
+              <a:t> a un valor 0.6, </a:t>
+            </a:r>
+            <a:r>
+              <a:rPr lang="en-US" sz="1200" dirty="0" err="1">
+                <a:latin typeface="Arial" panose="020B0604020202020204" pitchFamily="34" charset="0"/>
+                <a:cs typeface="Arial" panose="020B0604020202020204" pitchFamily="34" charset="0"/>
+              </a:rPr>
+              <a:t>comportamiento</a:t>
+            </a:r>
+            <a:r>
+              <a:rPr lang="en-US" sz="1200" dirty="0">
+                <a:latin typeface="Arial" panose="020B0604020202020204" pitchFamily="34" charset="0"/>
+                <a:cs typeface="Arial" panose="020B0604020202020204" pitchFamily="34" charset="0"/>
+              </a:rPr>
+              <a:t> similar al del factor de </a:t>
+            </a:r>
+            <a:r>
+              <a:rPr lang="en-US" sz="1200" dirty="0" err="1">
+                <a:latin typeface="Arial" panose="020B0604020202020204" pitchFamily="34" charset="0"/>
+                <a:cs typeface="Arial" panose="020B0604020202020204" pitchFamily="34" charset="0"/>
+              </a:rPr>
+              <a:t>atenuación</a:t>
+            </a:r>
+            <a:r>
+              <a:rPr lang="en-US" sz="1200" dirty="0">
+                <a:latin typeface="Arial" panose="020B0604020202020204" pitchFamily="34" charset="0"/>
+                <a:cs typeface="Arial" panose="020B0604020202020204" pitchFamily="34" charset="0"/>
+              </a:rPr>
+              <a:t> alfa.  </a:t>
+            </a:r>
           </a:p>
         </p:txBody>
       </p:sp>
@@ -6186,8 +7836,8 @@
           </a:p>
         </p:txBody>
       </p:sp>
-      <mc:AlternateContent xmlns:mc="http://schemas.openxmlformats.org/markup-compatibility/2006" xmlns:a14="http://schemas.microsoft.com/office/drawing/2010/main">
-        <mc:Choice Requires="a14">
+      <mc:AlternateContent xmlns:mc="http://schemas.openxmlformats.org/markup-compatibility/2006">
+        <mc:Choice xmlns:a14="http://schemas.microsoft.com/office/drawing/2010/main" Requires="a14">
           <p:sp>
             <p:nvSpPr>
               <p:cNvPr id="4" name="Marcador de texto 2">
@@ -6204,7 +7854,7 @@
             </p:nvSpPr>
             <p:spPr>
               <a:xfrm>
-                <a:off x="608012" y="1295400"/>
+                <a:off x="658505" y="1294534"/>
                 <a:ext cx="11048999" cy="4958137"/>
               </a:xfrm>
               <a:prstGeom prst="rect">
@@ -6442,7 +8092,7 @@
             </p:txBody>
           </p:sp>
         </mc:Choice>
-        <mc:Fallback xmlns="">
+        <mc:Fallback>
           <p:sp>
             <p:nvSpPr>
               <p:cNvPr id="4" name="Marcador de texto 2">
@@ -6459,7 +8109,7 @@
             </p:nvSpPr>
             <p:spPr>
               <a:xfrm>
-                <a:off x="608012" y="1295400"/>
+                <a:off x="658505" y="1294534"/>
                 <a:ext cx="11048999" cy="4958137"/>
               </a:xfrm>
               <a:prstGeom prst="rect">
@@ -6468,7 +8118,7 @@
               <a:blipFill>
                 <a:blip r:embed="rId6"/>
                 <a:stretch>
-                  <a:fillRect l="-607" t="-738"/>
+                  <a:fillRect l="-552" t="-614"/>
                 </a:stretch>
               </a:blipFill>
             </p:spPr>
@@ -6501,15 +8151,16 @@
         </p:nvSpPr>
         <p:spPr>
           <a:xfrm>
-            <a:off x="6096000" y="3628904"/>
-            <a:ext cx="5487988" cy="1569660"/>
+            <a:off x="4598170" y="3068948"/>
+            <a:ext cx="6856411" cy="2677656"/>
           </a:xfrm>
           <a:prstGeom prst="rect">
             <a:avLst/>
           </a:prstGeom>
           <a:solidFill>
-            <a:schemeClr val="bg1">
-              <a:lumMod val="95000"/>
+            <a:schemeClr val="tx1">
+              <a:lumMod val="65000"/>
+              <a:lumOff val="35000"/>
             </a:schemeClr>
           </a:solidFill>
           <a:ln w="28575">
@@ -6534,6 +8185,576 @@
             </a:r>
           </a:p>
           <a:p>
+            <a:r>
+              <a:rPr lang="fr-FR" sz="1200" b="0" dirty="0" err="1">
+                <a:solidFill>
+                  <a:srgbClr val="9CDCFE"/>
+                </a:solidFill>
+                <a:effectLst/>
+                <a:latin typeface="Consolas" panose="020B0609020204030204" pitchFamily="49" charset="0"/>
+              </a:rPr>
+              <a:t>neffb</a:t>
+            </a:r>
+            <a:r>
+              <a:rPr lang="fr-FR" sz="1200" b="0" dirty="0">
+                <a:solidFill>
+                  <a:srgbClr val="D4D4D4"/>
+                </a:solidFill>
+                <a:effectLst/>
+                <a:latin typeface="Consolas" panose="020B0609020204030204" pitchFamily="49" charset="0"/>
+              </a:rPr>
+              <a:t>=</a:t>
+            </a:r>
+            <a:r>
+              <a:rPr lang="fr-FR" sz="1200" b="0" dirty="0">
+                <a:solidFill>
+                  <a:srgbClr val="CCCCCC"/>
+                </a:solidFill>
+                <a:effectLst/>
+                <a:latin typeface="Consolas" panose="020B0609020204030204" pitchFamily="49" charset="0"/>
+              </a:rPr>
+              <a:t> </a:t>
+            </a:r>
+            <a:r>
+              <a:rPr lang="fr-FR" sz="1200" b="0" dirty="0">
+                <a:solidFill>
+                  <a:srgbClr val="4FC1FF"/>
+                </a:solidFill>
+                <a:effectLst/>
+                <a:latin typeface="Consolas" panose="020B0609020204030204" pitchFamily="49" charset="0"/>
+              </a:rPr>
+              <a:t>SOI</a:t>
+            </a:r>
+            <a:r>
+              <a:rPr lang="fr-FR" sz="1200" b="0" dirty="0">
+                <a:solidFill>
+                  <a:srgbClr val="CCCCCC"/>
+                </a:solidFill>
+                <a:effectLst/>
+                <a:latin typeface="Consolas" panose="020B0609020204030204" pitchFamily="49" charset="0"/>
+              </a:rPr>
+              <a:t>[</a:t>
+            </a:r>
+            <a:r>
+              <a:rPr lang="fr-FR" sz="1200" b="0" dirty="0">
+                <a:solidFill>
+                  <a:srgbClr val="B5CEA8"/>
+                </a:solidFill>
+                <a:effectLst/>
+                <a:latin typeface="Consolas" panose="020B0609020204030204" pitchFamily="49" charset="0"/>
+              </a:rPr>
+              <a:t>21</a:t>
+            </a:r>
+            <a:r>
+              <a:rPr lang="fr-FR" sz="1200" b="0" dirty="0">
+                <a:solidFill>
+                  <a:srgbClr val="CCCCCC"/>
+                </a:solidFill>
+                <a:effectLst/>
+                <a:latin typeface="Consolas" panose="020B0609020204030204" pitchFamily="49" charset="0"/>
+              </a:rPr>
+              <a:t>, </a:t>
+            </a:r>
+            <a:r>
+              <a:rPr lang="fr-FR" sz="1200" b="0" dirty="0">
+                <a:solidFill>
+                  <a:srgbClr val="B5CEA8"/>
+                </a:solidFill>
+                <a:effectLst/>
+                <a:latin typeface="Consolas" panose="020B0609020204030204" pitchFamily="49" charset="0"/>
+              </a:rPr>
+              <a:t>3</a:t>
+            </a:r>
+            <a:r>
+              <a:rPr lang="fr-FR" sz="1200" b="0" dirty="0">
+                <a:solidFill>
+                  <a:srgbClr val="CCCCCC"/>
+                </a:solidFill>
+                <a:effectLst/>
+                <a:latin typeface="Consolas" panose="020B0609020204030204" pitchFamily="49" charset="0"/>
+              </a:rPr>
+              <a:t>]</a:t>
+            </a:r>
+          </a:p>
+          <a:p>
+            <a:r>
+              <a:rPr lang="fr-FR" sz="1200" b="0" dirty="0">
+                <a:solidFill>
+                  <a:srgbClr val="9CDCFE"/>
+                </a:solidFill>
+                <a:effectLst/>
+                <a:latin typeface="Consolas" panose="020B0609020204030204" pitchFamily="49" charset="0"/>
+              </a:rPr>
+              <a:t>neff0</a:t>
+            </a:r>
+            <a:r>
+              <a:rPr lang="fr-FR" sz="1200" b="0" dirty="0">
+                <a:solidFill>
+                  <a:srgbClr val="D4D4D4"/>
+                </a:solidFill>
+                <a:effectLst/>
+                <a:latin typeface="Consolas" panose="020B0609020204030204" pitchFamily="49" charset="0"/>
+              </a:rPr>
+              <a:t>=</a:t>
+            </a:r>
+            <a:r>
+              <a:rPr lang="fr-FR" sz="1200" b="0" dirty="0">
+                <a:solidFill>
+                  <a:srgbClr val="CCCCCC"/>
+                </a:solidFill>
+                <a:effectLst/>
+                <a:latin typeface="Consolas" panose="020B0609020204030204" pitchFamily="49" charset="0"/>
+              </a:rPr>
+              <a:t> </a:t>
+            </a:r>
+            <a:r>
+              <a:rPr lang="fr-FR" sz="1200" b="0" dirty="0">
+                <a:solidFill>
+                  <a:srgbClr val="4FC1FF"/>
+                </a:solidFill>
+                <a:effectLst/>
+                <a:latin typeface="Consolas" panose="020B0609020204030204" pitchFamily="49" charset="0"/>
+              </a:rPr>
+              <a:t>SOI</a:t>
+            </a:r>
+            <a:r>
+              <a:rPr lang="fr-FR" sz="1200" b="0" dirty="0">
+                <a:solidFill>
+                  <a:srgbClr val="CCCCCC"/>
+                </a:solidFill>
+                <a:effectLst/>
+                <a:latin typeface="Consolas" panose="020B0609020204030204" pitchFamily="49" charset="0"/>
+              </a:rPr>
+              <a:t>[</a:t>
+            </a:r>
+            <a:r>
+              <a:rPr lang="fr-FR" sz="1200" b="0" dirty="0">
+                <a:solidFill>
+                  <a:srgbClr val="B5CEA8"/>
+                </a:solidFill>
+                <a:effectLst/>
+                <a:latin typeface="Consolas" panose="020B0609020204030204" pitchFamily="49" charset="0"/>
+              </a:rPr>
+              <a:t>22</a:t>
+            </a:r>
+            <a:r>
+              <a:rPr lang="fr-FR" sz="1200" b="0" dirty="0">
+                <a:solidFill>
+                  <a:srgbClr val="CCCCCC"/>
+                </a:solidFill>
+                <a:effectLst/>
+                <a:latin typeface="Consolas" panose="020B0609020204030204" pitchFamily="49" charset="0"/>
+              </a:rPr>
+              <a:t>, </a:t>
+            </a:r>
+            <a:r>
+              <a:rPr lang="fr-FR" sz="1200" b="0" dirty="0">
+                <a:solidFill>
+                  <a:srgbClr val="B5CEA8"/>
+                </a:solidFill>
+                <a:effectLst/>
+                <a:latin typeface="Consolas" panose="020B0609020204030204" pitchFamily="49" charset="0"/>
+              </a:rPr>
+              <a:t>3</a:t>
+            </a:r>
+            <a:r>
+              <a:rPr lang="fr-FR" sz="1200" b="0" dirty="0">
+                <a:solidFill>
+                  <a:srgbClr val="CCCCCC"/>
+                </a:solidFill>
+                <a:effectLst/>
+                <a:latin typeface="Consolas" panose="020B0609020204030204" pitchFamily="49" charset="0"/>
+              </a:rPr>
+              <a:t>]</a:t>
+            </a:r>
+          </a:p>
+          <a:p>
+            <a:r>
+              <a:rPr lang="fr-FR" sz="1200" b="0" dirty="0" err="1">
+                <a:solidFill>
+                  <a:srgbClr val="9CDCFE"/>
+                </a:solidFill>
+                <a:effectLst/>
+                <a:latin typeface="Consolas" panose="020B0609020204030204" pitchFamily="49" charset="0"/>
+              </a:rPr>
+              <a:t>neffa</a:t>
+            </a:r>
+            <a:r>
+              <a:rPr lang="fr-FR" sz="1200" b="0" dirty="0">
+                <a:solidFill>
+                  <a:srgbClr val="D4D4D4"/>
+                </a:solidFill>
+                <a:effectLst/>
+                <a:latin typeface="Consolas" panose="020B0609020204030204" pitchFamily="49" charset="0"/>
+              </a:rPr>
+              <a:t>=</a:t>
+            </a:r>
+            <a:r>
+              <a:rPr lang="fr-FR" sz="1200" b="0" dirty="0">
+                <a:solidFill>
+                  <a:srgbClr val="CCCCCC"/>
+                </a:solidFill>
+                <a:effectLst/>
+                <a:latin typeface="Consolas" panose="020B0609020204030204" pitchFamily="49" charset="0"/>
+              </a:rPr>
+              <a:t> </a:t>
+            </a:r>
+            <a:r>
+              <a:rPr lang="fr-FR" sz="1200" b="0" dirty="0">
+                <a:solidFill>
+                  <a:srgbClr val="4FC1FF"/>
+                </a:solidFill>
+                <a:effectLst/>
+                <a:latin typeface="Consolas" panose="020B0609020204030204" pitchFamily="49" charset="0"/>
+              </a:rPr>
+              <a:t>SOI</a:t>
+            </a:r>
+            <a:r>
+              <a:rPr lang="fr-FR" sz="1200" b="0" dirty="0">
+                <a:solidFill>
+                  <a:srgbClr val="CCCCCC"/>
+                </a:solidFill>
+                <a:effectLst/>
+                <a:latin typeface="Consolas" panose="020B0609020204030204" pitchFamily="49" charset="0"/>
+              </a:rPr>
+              <a:t>[</a:t>
+            </a:r>
+            <a:r>
+              <a:rPr lang="fr-FR" sz="1200" b="0" dirty="0">
+                <a:solidFill>
+                  <a:srgbClr val="B5CEA8"/>
+                </a:solidFill>
+                <a:effectLst/>
+                <a:latin typeface="Consolas" panose="020B0609020204030204" pitchFamily="49" charset="0"/>
+              </a:rPr>
+              <a:t>23</a:t>
+            </a:r>
+            <a:r>
+              <a:rPr lang="fr-FR" sz="1200" b="0" dirty="0">
+                <a:solidFill>
+                  <a:srgbClr val="CCCCCC"/>
+                </a:solidFill>
+                <a:effectLst/>
+                <a:latin typeface="Consolas" panose="020B0609020204030204" pitchFamily="49" charset="0"/>
+              </a:rPr>
+              <a:t>, </a:t>
+            </a:r>
+            <a:r>
+              <a:rPr lang="fr-FR" sz="1200" b="0" dirty="0">
+                <a:solidFill>
+                  <a:srgbClr val="B5CEA8"/>
+                </a:solidFill>
+                <a:effectLst/>
+                <a:latin typeface="Consolas" panose="020B0609020204030204" pitchFamily="49" charset="0"/>
+              </a:rPr>
+              <a:t>3</a:t>
+            </a:r>
+            <a:r>
+              <a:rPr lang="fr-FR" sz="1200" b="0" dirty="0">
+                <a:solidFill>
+                  <a:srgbClr val="CCCCCC"/>
+                </a:solidFill>
+                <a:effectLst/>
+                <a:latin typeface="Consolas" panose="020B0609020204030204" pitchFamily="49" charset="0"/>
+              </a:rPr>
+              <a:t>]</a:t>
+            </a:r>
+          </a:p>
+          <a:p>
+            <a:br>
+              <a:rPr lang="fr-FR" sz="1200" b="0" dirty="0">
+                <a:solidFill>
+                  <a:srgbClr val="CCCCCC"/>
+                </a:solidFill>
+                <a:effectLst/>
+                <a:latin typeface="Consolas" panose="020B0609020204030204" pitchFamily="49" charset="0"/>
+              </a:rPr>
+            </a:br>
+            <a:r>
+              <a:rPr lang="fr-FR" sz="1200" b="0" dirty="0">
+                <a:solidFill>
+                  <a:srgbClr val="9CDCFE"/>
+                </a:solidFill>
+                <a:effectLst/>
+                <a:latin typeface="Consolas" panose="020B0609020204030204" pitchFamily="49" charset="0"/>
+              </a:rPr>
+              <a:t>lb</a:t>
+            </a:r>
+            <a:r>
+              <a:rPr lang="fr-FR" sz="1200" b="0" dirty="0">
+                <a:solidFill>
+                  <a:srgbClr val="D4D4D4"/>
+                </a:solidFill>
+                <a:effectLst/>
+                <a:latin typeface="Consolas" panose="020B0609020204030204" pitchFamily="49" charset="0"/>
+              </a:rPr>
+              <a:t>=</a:t>
+            </a:r>
+            <a:r>
+              <a:rPr lang="fr-FR" sz="1200" b="0" dirty="0">
+                <a:solidFill>
+                  <a:srgbClr val="CCCCCC"/>
+                </a:solidFill>
+                <a:effectLst/>
+                <a:latin typeface="Consolas" panose="020B0609020204030204" pitchFamily="49" charset="0"/>
+              </a:rPr>
+              <a:t> </a:t>
+            </a:r>
+            <a:r>
+              <a:rPr lang="fr-FR" sz="1200" b="0" dirty="0">
+                <a:solidFill>
+                  <a:srgbClr val="4FC1FF"/>
+                </a:solidFill>
+                <a:effectLst/>
+                <a:latin typeface="Consolas" panose="020B0609020204030204" pitchFamily="49" charset="0"/>
+              </a:rPr>
+              <a:t>SOI</a:t>
+            </a:r>
+            <a:r>
+              <a:rPr lang="fr-FR" sz="1200" b="0" dirty="0">
+                <a:solidFill>
+                  <a:srgbClr val="CCCCCC"/>
+                </a:solidFill>
+                <a:effectLst/>
+                <a:latin typeface="Consolas" panose="020B0609020204030204" pitchFamily="49" charset="0"/>
+              </a:rPr>
+              <a:t>[</a:t>
+            </a:r>
+            <a:r>
+              <a:rPr lang="fr-FR" sz="1200" b="0" dirty="0">
+                <a:solidFill>
+                  <a:srgbClr val="B5CEA8"/>
+                </a:solidFill>
+                <a:effectLst/>
+                <a:latin typeface="Consolas" panose="020B0609020204030204" pitchFamily="49" charset="0"/>
+              </a:rPr>
+              <a:t>21</a:t>
+            </a:r>
+            <a:r>
+              <a:rPr lang="fr-FR" sz="1200" b="0" dirty="0">
+                <a:solidFill>
+                  <a:srgbClr val="CCCCCC"/>
+                </a:solidFill>
+                <a:effectLst/>
+                <a:latin typeface="Consolas" panose="020B0609020204030204" pitchFamily="49" charset="0"/>
+              </a:rPr>
+              <a:t>, </a:t>
+            </a:r>
+            <a:r>
+              <a:rPr lang="fr-FR" sz="1200" b="0" dirty="0">
+                <a:solidFill>
+                  <a:srgbClr val="B5CEA8"/>
+                </a:solidFill>
+                <a:effectLst/>
+                <a:latin typeface="Consolas" panose="020B0609020204030204" pitchFamily="49" charset="0"/>
+              </a:rPr>
+              <a:t>0</a:t>
+            </a:r>
+            <a:r>
+              <a:rPr lang="fr-FR" sz="1200" b="0" dirty="0">
+                <a:solidFill>
+                  <a:srgbClr val="CCCCCC"/>
+                </a:solidFill>
+                <a:effectLst/>
+                <a:latin typeface="Consolas" panose="020B0609020204030204" pitchFamily="49" charset="0"/>
+              </a:rPr>
+              <a:t>]</a:t>
+            </a:r>
+          </a:p>
+          <a:p>
+            <a:r>
+              <a:rPr lang="fr-FR" sz="1200" b="0" dirty="0">
+                <a:solidFill>
+                  <a:srgbClr val="9CDCFE"/>
+                </a:solidFill>
+                <a:effectLst/>
+                <a:latin typeface="Consolas" panose="020B0609020204030204" pitchFamily="49" charset="0"/>
+              </a:rPr>
+              <a:t>l0</a:t>
+            </a:r>
+            <a:r>
+              <a:rPr lang="fr-FR" sz="1200" b="0" dirty="0">
+                <a:solidFill>
+                  <a:srgbClr val="D4D4D4"/>
+                </a:solidFill>
+                <a:effectLst/>
+                <a:latin typeface="Consolas" panose="020B0609020204030204" pitchFamily="49" charset="0"/>
+              </a:rPr>
+              <a:t>=</a:t>
+            </a:r>
+            <a:r>
+              <a:rPr lang="fr-FR" sz="1200" b="0" dirty="0">
+                <a:solidFill>
+                  <a:srgbClr val="CCCCCC"/>
+                </a:solidFill>
+                <a:effectLst/>
+                <a:latin typeface="Consolas" panose="020B0609020204030204" pitchFamily="49" charset="0"/>
+              </a:rPr>
+              <a:t> </a:t>
+            </a:r>
+            <a:r>
+              <a:rPr lang="fr-FR" sz="1200" b="0" dirty="0">
+                <a:solidFill>
+                  <a:srgbClr val="4FC1FF"/>
+                </a:solidFill>
+                <a:effectLst/>
+                <a:latin typeface="Consolas" panose="020B0609020204030204" pitchFamily="49" charset="0"/>
+              </a:rPr>
+              <a:t>SOI</a:t>
+            </a:r>
+            <a:r>
+              <a:rPr lang="fr-FR" sz="1200" b="0" dirty="0">
+                <a:solidFill>
+                  <a:srgbClr val="CCCCCC"/>
+                </a:solidFill>
+                <a:effectLst/>
+                <a:latin typeface="Consolas" panose="020B0609020204030204" pitchFamily="49" charset="0"/>
+              </a:rPr>
+              <a:t>[</a:t>
+            </a:r>
+            <a:r>
+              <a:rPr lang="fr-FR" sz="1200" b="0" dirty="0">
+                <a:solidFill>
+                  <a:srgbClr val="B5CEA8"/>
+                </a:solidFill>
+                <a:effectLst/>
+                <a:latin typeface="Consolas" panose="020B0609020204030204" pitchFamily="49" charset="0"/>
+              </a:rPr>
+              <a:t>22</a:t>
+            </a:r>
+            <a:r>
+              <a:rPr lang="fr-FR" sz="1200" b="0" dirty="0">
+                <a:solidFill>
+                  <a:srgbClr val="CCCCCC"/>
+                </a:solidFill>
+                <a:effectLst/>
+                <a:latin typeface="Consolas" panose="020B0609020204030204" pitchFamily="49" charset="0"/>
+              </a:rPr>
+              <a:t>, </a:t>
+            </a:r>
+            <a:r>
+              <a:rPr lang="fr-FR" sz="1200" b="0" dirty="0">
+                <a:solidFill>
+                  <a:srgbClr val="B5CEA8"/>
+                </a:solidFill>
+                <a:effectLst/>
+                <a:latin typeface="Consolas" panose="020B0609020204030204" pitchFamily="49" charset="0"/>
+              </a:rPr>
+              <a:t>0</a:t>
+            </a:r>
+            <a:r>
+              <a:rPr lang="fr-FR" sz="1200" b="0" dirty="0">
+                <a:solidFill>
+                  <a:srgbClr val="CCCCCC"/>
+                </a:solidFill>
+                <a:effectLst/>
+                <a:latin typeface="Consolas" panose="020B0609020204030204" pitchFamily="49" charset="0"/>
+              </a:rPr>
+              <a:t>]</a:t>
+            </a:r>
+          </a:p>
+          <a:p>
+            <a:r>
+              <a:rPr lang="fr-FR" sz="1200" b="0" dirty="0">
+                <a:solidFill>
+                  <a:srgbClr val="9CDCFE"/>
+                </a:solidFill>
+                <a:effectLst/>
+                <a:latin typeface="Consolas" panose="020B0609020204030204" pitchFamily="49" charset="0"/>
+              </a:rPr>
+              <a:t>la</a:t>
+            </a:r>
+            <a:r>
+              <a:rPr lang="fr-FR" sz="1200" b="0" dirty="0">
+                <a:solidFill>
+                  <a:srgbClr val="D4D4D4"/>
+                </a:solidFill>
+                <a:effectLst/>
+                <a:latin typeface="Consolas" panose="020B0609020204030204" pitchFamily="49" charset="0"/>
+              </a:rPr>
+              <a:t>=</a:t>
+            </a:r>
+            <a:r>
+              <a:rPr lang="fr-FR" sz="1200" b="0" dirty="0">
+                <a:solidFill>
+                  <a:srgbClr val="CCCCCC"/>
+                </a:solidFill>
+                <a:effectLst/>
+                <a:latin typeface="Consolas" panose="020B0609020204030204" pitchFamily="49" charset="0"/>
+              </a:rPr>
+              <a:t> </a:t>
+            </a:r>
+            <a:r>
+              <a:rPr lang="fr-FR" sz="1200" b="0" dirty="0">
+                <a:solidFill>
+                  <a:srgbClr val="4FC1FF"/>
+                </a:solidFill>
+                <a:effectLst/>
+                <a:latin typeface="Consolas" panose="020B0609020204030204" pitchFamily="49" charset="0"/>
+              </a:rPr>
+              <a:t>SOI</a:t>
+            </a:r>
+            <a:r>
+              <a:rPr lang="fr-FR" sz="1200" b="0" dirty="0">
+                <a:solidFill>
+                  <a:srgbClr val="CCCCCC"/>
+                </a:solidFill>
+                <a:effectLst/>
+                <a:latin typeface="Consolas" panose="020B0609020204030204" pitchFamily="49" charset="0"/>
+              </a:rPr>
+              <a:t>[</a:t>
+            </a:r>
+            <a:r>
+              <a:rPr lang="fr-FR" sz="1200" b="0" dirty="0">
+                <a:solidFill>
+                  <a:srgbClr val="B5CEA8"/>
+                </a:solidFill>
+                <a:effectLst/>
+                <a:latin typeface="Consolas" panose="020B0609020204030204" pitchFamily="49" charset="0"/>
+              </a:rPr>
+              <a:t>23</a:t>
+            </a:r>
+            <a:r>
+              <a:rPr lang="fr-FR" sz="1200" b="0" dirty="0">
+                <a:solidFill>
+                  <a:srgbClr val="CCCCCC"/>
+                </a:solidFill>
+                <a:effectLst/>
+                <a:latin typeface="Consolas" panose="020B0609020204030204" pitchFamily="49" charset="0"/>
+              </a:rPr>
+              <a:t>, </a:t>
+            </a:r>
+            <a:r>
+              <a:rPr lang="fr-FR" sz="1200" b="0" dirty="0">
+                <a:solidFill>
+                  <a:srgbClr val="B5CEA8"/>
+                </a:solidFill>
+                <a:effectLst/>
+                <a:latin typeface="Consolas" panose="020B0609020204030204" pitchFamily="49" charset="0"/>
+              </a:rPr>
+              <a:t>0</a:t>
+            </a:r>
+            <a:r>
+              <a:rPr lang="fr-FR" sz="1200" b="0" dirty="0">
+                <a:solidFill>
+                  <a:srgbClr val="CCCCCC"/>
+                </a:solidFill>
+                <a:effectLst/>
+                <a:latin typeface="Consolas" panose="020B0609020204030204" pitchFamily="49" charset="0"/>
+              </a:rPr>
+              <a:t>]</a:t>
+            </a:r>
+          </a:p>
+          <a:p>
+            <a:endParaRPr lang="fr-FR" sz="1200" b="0" dirty="0">
+              <a:solidFill>
+                <a:srgbClr val="CCCCCC"/>
+              </a:solidFill>
+              <a:effectLst/>
+              <a:latin typeface="Consolas" panose="020B0609020204030204" pitchFamily="49" charset="0"/>
+            </a:endParaRPr>
+          </a:p>
+          <a:p>
             <a:pPr algn="just"/>
             <a:endParaRPr lang="en-US" sz="1200" dirty="0">
               <a:latin typeface="Arial" panose="020B0604020202020204" pitchFamily="34" charset="0"/>
@@ -6541,39 +8762,476 @@
             </a:endParaRPr>
           </a:p>
           <a:p>
-            <a:pPr algn="just"/>
-            <a:endParaRPr lang="en-US" sz="1200" dirty="0">
-              <a:latin typeface="Arial" panose="020B0604020202020204" pitchFamily="34" charset="0"/>
-              <a:cs typeface="Arial" panose="020B0604020202020204" pitchFamily="34" charset="0"/>
+            <a:r>
+              <a:rPr lang="es-ES" sz="1200" b="0" dirty="0">
+                <a:solidFill>
+                  <a:srgbClr val="9CDCFE"/>
+                </a:solidFill>
+                <a:effectLst/>
+                <a:latin typeface="Consolas" panose="020B0609020204030204" pitchFamily="49" charset="0"/>
+              </a:rPr>
+              <a:t>ng</a:t>
+            </a:r>
+            <a:r>
+              <a:rPr lang="es-ES" sz="1200" b="0" dirty="0">
+                <a:solidFill>
+                  <a:srgbClr val="D4D4D4"/>
+                </a:solidFill>
+                <a:effectLst/>
+                <a:latin typeface="Consolas" panose="020B0609020204030204" pitchFamily="49" charset="0"/>
+              </a:rPr>
+              <a:t>=</a:t>
+            </a:r>
+            <a:r>
+              <a:rPr lang="es-ES" sz="1200" b="0" dirty="0">
+                <a:solidFill>
+                  <a:srgbClr val="CCCCCC"/>
+                </a:solidFill>
+                <a:effectLst/>
+                <a:latin typeface="Consolas" panose="020B0609020204030204" pitchFamily="49" charset="0"/>
+              </a:rPr>
+              <a:t> </a:t>
+            </a:r>
+            <a:r>
+              <a:rPr lang="es-ES" sz="1200" b="0" dirty="0">
+                <a:solidFill>
+                  <a:srgbClr val="9CDCFE"/>
+                </a:solidFill>
+                <a:effectLst/>
+                <a:latin typeface="Consolas" panose="020B0609020204030204" pitchFamily="49" charset="0"/>
+              </a:rPr>
+              <a:t>neff0</a:t>
+            </a:r>
+            <a:r>
+              <a:rPr lang="es-ES" sz="1200" b="0" dirty="0">
+                <a:solidFill>
+                  <a:srgbClr val="CCCCCC"/>
+                </a:solidFill>
+                <a:effectLst/>
+                <a:latin typeface="Consolas" panose="020B0609020204030204" pitchFamily="49" charset="0"/>
+              </a:rPr>
+              <a:t> </a:t>
+            </a:r>
+            <a:r>
+              <a:rPr lang="es-ES" sz="1200" b="0" dirty="0">
+                <a:solidFill>
+                  <a:srgbClr val="D4D4D4"/>
+                </a:solidFill>
+                <a:effectLst/>
+                <a:latin typeface="Consolas" panose="020B0609020204030204" pitchFamily="49" charset="0"/>
+              </a:rPr>
+              <a:t>-</a:t>
+            </a:r>
+            <a:r>
+              <a:rPr lang="es-ES" sz="1200" b="0" dirty="0">
+                <a:solidFill>
+                  <a:srgbClr val="CCCCCC"/>
+                </a:solidFill>
+                <a:effectLst/>
+                <a:latin typeface="Consolas" panose="020B0609020204030204" pitchFamily="49" charset="0"/>
+              </a:rPr>
+              <a:t> </a:t>
+            </a:r>
+            <a:r>
+              <a:rPr lang="es-ES" sz="1200" b="0" dirty="0">
+                <a:solidFill>
+                  <a:srgbClr val="9CDCFE"/>
+                </a:solidFill>
+                <a:effectLst/>
+                <a:latin typeface="Consolas" panose="020B0609020204030204" pitchFamily="49" charset="0"/>
+              </a:rPr>
+              <a:t>l0</a:t>
+            </a:r>
+            <a:r>
+              <a:rPr lang="es-ES" sz="1200" b="0" dirty="0">
+                <a:solidFill>
+                  <a:srgbClr val="D4D4D4"/>
+                </a:solidFill>
+                <a:effectLst/>
+                <a:latin typeface="Consolas" panose="020B0609020204030204" pitchFamily="49" charset="0"/>
+              </a:rPr>
+              <a:t>*</a:t>
+            </a:r>
+            <a:r>
+              <a:rPr lang="es-ES" sz="1200" b="0" dirty="0">
+                <a:solidFill>
+                  <a:srgbClr val="CCCCCC"/>
+                </a:solidFill>
+                <a:effectLst/>
+                <a:latin typeface="Consolas" panose="020B0609020204030204" pitchFamily="49" charset="0"/>
+              </a:rPr>
+              <a:t> (</a:t>
+            </a:r>
+            <a:r>
+              <a:rPr lang="es-ES" sz="1200" b="0" dirty="0" err="1">
+                <a:solidFill>
+                  <a:srgbClr val="9CDCFE"/>
+                </a:solidFill>
+                <a:effectLst/>
+                <a:latin typeface="Consolas" panose="020B0609020204030204" pitchFamily="49" charset="0"/>
+              </a:rPr>
+              <a:t>neffa</a:t>
+            </a:r>
+            <a:r>
+              <a:rPr lang="es-ES" sz="1200" b="0" dirty="0">
+                <a:solidFill>
+                  <a:srgbClr val="CCCCCC"/>
+                </a:solidFill>
+                <a:effectLst/>
+                <a:latin typeface="Consolas" panose="020B0609020204030204" pitchFamily="49" charset="0"/>
+              </a:rPr>
+              <a:t> </a:t>
+            </a:r>
+            <a:r>
+              <a:rPr lang="es-ES" sz="1200" b="0" dirty="0">
+                <a:solidFill>
+                  <a:srgbClr val="D4D4D4"/>
+                </a:solidFill>
+                <a:effectLst/>
+                <a:latin typeface="Consolas" panose="020B0609020204030204" pitchFamily="49" charset="0"/>
+              </a:rPr>
+              <a:t>-</a:t>
+            </a:r>
+            <a:r>
+              <a:rPr lang="es-ES" sz="1200" b="0" dirty="0">
+                <a:solidFill>
+                  <a:srgbClr val="CCCCCC"/>
+                </a:solidFill>
+                <a:effectLst/>
+                <a:latin typeface="Consolas" panose="020B0609020204030204" pitchFamily="49" charset="0"/>
+              </a:rPr>
+              <a:t> </a:t>
+            </a:r>
+            <a:r>
+              <a:rPr lang="es-ES" sz="1200" b="0" dirty="0" err="1">
+                <a:solidFill>
+                  <a:srgbClr val="9CDCFE"/>
+                </a:solidFill>
+                <a:effectLst/>
+                <a:latin typeface="Consolas" panose="020B0609020204030204" pitchFamily="49" charset="0"/>
+              </a:rPr>
+              <a:t>neffb</a:t>
+            </a:r>
+            <a:r>
+              <a:rPr lang="es-ES" sz="1200" b="0" dirty="0">
+                <a:solidFill>
+                  <a:srgbClr val="CCCCCC"/>
+                </a:solidFill>
+                <a:effectLst/>
+                <a:latin typeface="Consolas" panose="020B0609020204030204" pitchFamily="49" charset="0"/>
+              </a:rPr>
+              <a:t>)</a:t>
+            </a:r>
+            <a:r>
+              <a:rPr lang="es-ES" sz="1200" b="0" dirty="0">
+                <a:solidFill>
+                  <a:srgbClr val="D4D4D4"/>
+                </a:solidFill>
+                <a:effectLst/>
+                <a:latin typeface="Consolas" panose="020B0609020204030204" pitchFamily="49" charset="0"/>
+              </a:rPr>
+              <a:t>/</a:t>
+            </a:r>
+            <a:r>
+              <a:rPr lang="es-ES" sz="1200" b="0" dirty="0">
+                <a:solidFill>
+                  <a:srgbClr val="CCCCCC"/>
+                </a:solidFill>
+                <a:effectLst/>
+                <a:latin typeface="Consolas" panose="020B0609020204030204" pitchFamily="49" charset="0"/>
+              </a:rPr>
+              <a:t> ( </a:t>
+            </a:r>
+            <a:r>
+              <a:rPr lang="es-ES" sz="1200" b="0" dirty="0">
+                <a:solidFill>
+                  <a:srgbClr val="9CDCFE"/>
+                </a:solidFill>
+                <a:effectLst/>
+                <a:latin typeface="Consolas" panose="020B0609020204030204" pitchFamily="49" charset="0"/>
+              </a:rPr>
+              <a:t>la</a:t>
+            </a:r>
+            <a:r>
+              <a:rPr lang="es-ES" sz="1200" b="0" dirty="0">
+                <a:solidFill>
+                  <a:srgbClr val="CCCCCC"/>
+                </a:solidFill>
+                <a:effectLst/>
+                <a:latin typeface="Consolas" panose="020B0609020204030204" pitchFamily="49" charset="0"/>
+              </a:rPr>
+              <a:t> </a:t>
+            </a:r>
+            <a:r>
+              <a:rPr lang="es-ES" sz="1200" b="0" dirty="0">
+                <a:solidFill>
+                  <a:srgbClr val="D4D4D4"/>
+                </a:solidFill>
+                <a:effectLst/>
+                <a:latin typeface="Consolas" panose="020B0609020204030204" pitchFamily="49" charset="0"/>
+              </a:rPr>
+              <a:t>-</a:t>
+            </a:r>
+            <a:r>
+              <a:rPr lang="es-ES" sz="1200" b="0" dirty="0">
+                <a:solidFill>
+                  <a:srgbClr val="CCCCCC"/>
+                </a:solidFill>
+                <a:effectLst/>
+                <a:latin typeface="Consolas" panose="020B0609020204030204" pitchFamily="49" charset="0"/>
+              </a:rPr>
+              <a:t> </a:t>
+            </a:r>
+            <a:r>
+              <a:rPr lang="es-ES" sz="1200" b="0" dirty="0">
+                <a:solidFill>
+                  <a:srgbClr val="9CDCFE"/>
+                </a:solidFill>
+                <a:effectLst/>
+                <a:latin typeface="Consolas" panose="020B0609020204030204" pitchFamily="49" charset="0"/>
+              </a:rPr>
+              <a:t>lb</a:t>
+            </a:r>
+            <a:r>
+              <a:rPr lang="es-ES" sz="1200" b="0" dirty="0">
+                <a:solidFill>
+                  <a:srgbClr val="CCCCCC"/>
+                </a:solidFill>
+                <a:effectLst/>
+                <a:latin typeface="Consolas" panose="020B0609020204030204" pitchFamily="49" charset="0"/>
+              </a:rPr>
+              <a:t>) </a:t>
+            </a:r>
+          </a:p>
+          <a:p>
+            <a:r>
+              <a:rPr lang="es-ES" sz="1200" b="0" dirty="0">
+                <a:solidFill>
+                  <a:srgbClr val="4FC1FF"/>
+                </a:solidFill>
+                <a:effectLst/>
+                <a:latin typeface="Consolas" panose="020B0609020204030204" pitchFamily="49" charset="0"/>
+              </a:rPr>
+              <a:t>FSR</a:t>
+            </a:r>
+            <a:r>
+              <a:rPr lang="es-ES" sz="1200" b="0" dirty="0">
+                <a:solidFill>
+                  <a:srgbClr val="D4D4D4"/>
+                </a:solidFill>
+                <a:effectLst/>
+                <a:latin typeface="Consolas" panose="020B0609020204030204" pitchFamily="49" charset="0"/>
+              </a:rPr>
+              <a:t>=</a:t>
+            </a:r>
+            <a:r>
+              <a:rPr lang="es-ES" sz="1200" b="0" dirty="0">
+                <a:solidFill>
+                  <a:srgbClr val="CCCCCC"/>
+                </a:solidFill>
+                <a:effectLst/>
+                <a:latin typeface="Consolas" panose="020B0609020204030204" pitchFamily="49" charset="0"/>
+              </a:rPr>
+              <a:t> </a:t>
+            </a:r>
+            <a:r>
+              <a:rPr lang="es-ES" sz="1200" b="0" dirty="0">
+                <a:solidFill>
+                  <a:srgbClr val="B5CEA8"/>
+                </a:solidFill>
+                <a:effectLst/>
+                <a:latin typeface="Consolas" panose="020B0609020204030204" pitchFamily="49" charset="0"/>
+              </a:rPr>
+              <a:t>0.04</a:t>
+            </a:r>
+            <a:r>
+              <a:rPr lang="es-ES" sz="1200" b="0" dirty="0">
+                <a:solidFill>
+                  <a:srgbClr val="CCCCCC"/>
+                </a:solidFill>
+                <a:effectLst/>
+                <a:latin typeface="Consolas" panose="020B0609020204030204" pitchFamily="49" charset="0"/>
+              </a:rPr>
+              <a:t>  </a:t>
+            </a:r>
+            <a:r>
+              <a:rPr lang="es-ES" sz="1200" b="0" dirty="0">
+                <a:solidFill>
+                  <a:srgbClr val="6A9955"/>
+                </a:solidFill>
+                <a:effectLst/>
+                <a:latin typeface="Consolas" panose="020B0609020204030204" pitchFamily="49" charset="0"/>
+              </a:rPr>
+              <a:t># </a:t>
+            </a:r>
+            <a:r>
+              <a:rPr lang="es-ES" sz="1200" b="0" dirty="0" err="1">
+                <a:solidFill>
+                  <a:srgbClr val="6A9955"/>
+                </a:solidFill>
+                <a:effectLst/>
+                <a:latin typeface="Consolas" panose="020B0609020204030204" pitchFamily="49" charset="0"/>
+              </a:rPr>
+              <a:t>um</a:t>
+            </a:r>
+            <a:endParaRPr lang="es-ES" sz="1200" b="0" dirty="0">
+              <a:solidFill>
+                <a:srgbClr val="CCCCCC"/>
+              </a:solidFill>
+              <a:effectLst/>
+              <a:latin typeface="Consolas" panose="020B0609020204030204" pitchFamily="49" charset="0"/>
             </a:endParaRPr>
           </a:p>
           <a:p>
-            <a:pPr algn="just"/>
-            <a:endParaRPr lang="en-US" sz="1200" dirty="0">
-              <a:latin typeface="Arial" panose="020B0604020202020204" pitchFamily="34" charset="0"/>
-              <a:cs typeface="Arial" panose="020B0604020202020204" pitchFamily="34" charset="0"/>
-            </a:endParaRPr>
-          </a:p>
-          <a:p>
-            <a:pPr algn="just"/>
-            <a:endParaRPr lang="en-US" sz="1200" dirty="0">
-              <a:latin typeface="Arial" panose="020B0604020202020204" pitchFamily="34" charset="0"/>
-              <a:cs typeface="Arial" panose="020B0604020202020204" pitchFamily="34" charset="0"/>
-            </a:endParaRPr>
-          </a:p>
-          <a:p>
-            <a:pPr algn="just"/>
-            <a:endParaRPr lang="en-US" sz="1200" dirty="0">
-              <a:latin typeface="Arial" panose="020B0604020202020204" pitchFamily="34" charset="0"/>
-              <a:cs typeface="Arial" panose="020B0604020202020204" pitchFamily="34" charset="0"/>
-            </a:endParaRPr>
-          </a:p>
-          <a:p>
-            <a:pPr algn="just"/>
-            <a:endParaRPr lang="en-US" sz="1200" dirty="0">
-              <a:latin typeface="Arial" panose="020B0604020202020204" pitchFamily="34" charset="0"/>
-              <a:cs typeface="Arial" panose="020B0604020202020204" pitchFamily="34" charset="0"/>
-            </a:endParaRPr>
+            <a:br>
+              <a:rPr lang="es-ES" sz="1200" b="0" dirty="0">
+                <a:solidFill>
+                  <a:srgbClr val="CCCCCC"/>
+                </a:solidFill>
+                <a:effectLst/>
+                <a:latin typeface="Consolas" panose="020B0609020204030204" pitchFamily="49" charset="0"/>
+              </a:rPr>
+            </a:br>
+            <a:r>
+              <a:rPr lang="es-ES" sz="1200" b="0" dirty="0" err="1">
+                <a:solidFill>
+                  <a:srgbClr val="9CDCFE"/>
+                </a:solidFill>
+                <a:effectLst/>
+                <a:latin typeface="Consolas" panose="020B0609020204030204" pitchFamily="49" charset="0"/>
+              </a:rPr>
+              <a:t>variacion_l</a:t>
+            </a:r>
+            <a:r>
+              <a:rPr lang="es-ES" sz="1200" b="0" dirty="0">
+                <a:solidFill>
+                  <a:srgbClr val="D4D4D4"/>
+                </a:solidFill>
+                <a:effectLst/>
+                <a:latin typeface="Consolas" panose="020B0609020204030204" pitchFamily="49" charset="0"/>
+              </a:rPr>
+              <a:t>=</a:t>
+            </a:r>
+            <a:r>
+              <a:rPr lang="es-ES" sz="1200" b="0" dirty="0">
+                <a:solidFill>
+                  <a:srgbClr val="CCCCCC"/>
+                </a:solidFill>
+                <a:effectLst/>
+                <a:latin typeface="Consolas" panose="020B0609020204030204" pitchFamily="49" charset="0"/>
+              </a:rPr>
+              <a:t> </a:t>
+            </a:r>
+            <a:r>
+              <a:rPr lang="es-ES" sz="1200" b="0" dirty="0">
+                <a:solidFill>
+                  <a:srgbClr val="9CDCFE"/>
+                </a:solidFill>
+                <a:effectLst/>
+                <a:latin typeface="Consolas" panose="020B0609020204030204" pitchFamily="49" charset="0"/>
+              </a:rPr>
+              <a:t>(l0)</a:t>
+            </a:r>
+            <a:r>
+              <a:rPr lang="es-ES" sz="1200" b="0" dirty="0">
+                <a:solidFill>
+                  <a:srgbClr val="D4D4D4"/>
+                </a:solidFill>
+                <a:effectLst/>
+                <a:latin typeface="Consolas" panose="020B0609020204030204" pitchFamily="49" charset="0"/>
+              </a:rPr>
+              <a:t>**</a:t>
+            </a:r>
+            <a:r>
+              <a:rPr lang="es-ES" sz="1200" b="0" dirty="0">
+                <a:solidFill>
+                  <a:srgbClr val="B5CEA8"/>
+                </a:solidFill>
+                <a:effectLst/>
+                <a:latin typeface="Consolas" panose="020B0609020204030204" pitchFamily="49" charset="0"/>
+              </a:rPr>
+              <a:t>2</a:t>
+            </a:r>
+            <a:r>
+              <a:rPr lang="es-ES" sz="1200" b="0" dirty="0">
+                <a:solidFill>
+                  <a:srgbClr val="D4D4D4"/>
+                </a:solidFill>
+                <a:effectLst/>
+                <a:latin typeface="Consolas" panose="020B0609020204030204" pitchFamily="49" charset="0"/>
+              </a:rPr>
+              <a:t>/</a:t>
+            </a:r>
+            <a:r>
+              <a:rPr lang="es-ES" sz="1200" b="0" dirty="0">
+                <a:solidFill>
+                  <a:srgbClr val="CCCCCC"/>
+                </a:solidFill>
+                <a:effectLst/>
+                <a:latin typeface="Consolas" panose="020B0609020204030204" pitchFamily="49" charset="0"/>
+              </a:rPr>
+              <a:t> (</a:t>
+            </a:r>
+            <a:r>
+              <a:rPr lang="es-ES" sz="1200" b="0" dirty="0">
+                <a:solidFill>
+                  <a:srgbClr val="9CDCFE"/>
+                </a:solidFill>
+                <a:effectLst/>
+                <a:latin typeface="Consolas" panose="020B0609020204030204" pitchFamily="49" charset="0"/>
+              </a:rPr>
+              <a:t>ng</a:t>
+            </a:r>
+            <a:r>
+              <a:rPr lang="es-ES" sz="1200" b="0" dirty="0">
+                <a:solidFill>
+                  <a:srgbClr val="CCCCCC"/>
+                </a:solidFill>
+                <a:effectLst/>
+                <a:latin typeface="Consolas" panose="020B0609020204030204" pitchFamily="49" charset="0"/>
+              </a:rPr>
+              <a:t> </a:t>
+            </a:r>
+            <a:r>
+              <a:rPr lang="es-ES" sz="1200" b="0" dirty="0">
+                <a:solidFill>
+                  <a:srgbClr val="D4D4D4"/>
+                </a:solidFill>
+                <a:effectLst/>
+                <a:latin typeface="Consolas" panose="020B0609020204030204" pitchFamily="49" charset="0"/>
+              </a:rPr>
+              <a:t>*</a:t>
+            </a:r>
+            <a:r>
+              <a:rPr lang="es-ES" sz="1200" b="0" dirty="0">
+                <a:solidFill>
+                  <a:srgbClr val="CCCCCC"/>
+                </a:solidFill>
+                <a:effectLst/>
+                <a:latin typeface="Consolas" panose="020B0609020204030204" pitchFamily="49" charset="0"/>
+              </a:rPr>
+              <a:t> </a:t>
+            </a:r>
+            <a:r>
+              <a:rPr lang="es-ES" sz="1200" b="0" dirty="0">
+                <a:solidFill>
+                  <a:srgbClr val="4FC1FF"/>
+                </a:solidFill>
+                <a:effectLst/>
+                <a:latin typeface="Consolas" panose="020B0609020204030204" pitchFamily="49" charset="0"/>
+              </a:rPr>
+              <a:t>FSR</a:t>
+            </a:r>
+            <a:r>
+              <a:rPr lang="es-ES" sz="1200" b="0" dirty="0">
+                <a:solidFill>
+                  <a:srgbClr val="CCCCCC"/>
+                </a:solidFill>
+                <a:effectLst/>
+                <a:latin typeface="Consolas" panose="020B0609020204030204" pitchFamily="49" charset="0"/>
+              </a:rPr>
+              <a:t>)</a:t>
+            </a:r>
           </a:p>
         </p:txBody>
       </p:sp>
@@ -6638,7 +9296,7 @@
         </p:blipFill>
         <p:spPr>
           <a:xfrm>
-            <a:off x="719667" y="3124200"/>
+            <a:off x="4800600" y="5885754"/>
             <a:ext cx="5601482" cy="228632"/>
           </a:xfrm>
           <a:prstGeom prst="rect">
@@ -6668,7 +9326,7 @@
         </p:blipFill>
         <p:spPr>
           <a:xfrm>
-            <a:off x="1545431" y="3455352"/>
+            <a:off x="800530" y="3068948"/>
             <a:ext cx="3499575" cy="2808301"/>
           </a:xfrm>
           <a:prstGeom prst="rect">
@@ -6945,48 +9603,53 @@
             </a:r>
           </a:p>
           <a:p>
-            <a:endParaRPr lang="en-US" dirty="0"/>
-          </a:p>
-          <a:p>
-            <a:pPr lvl="2">
-              <a:lnSpc>
-                <a:spcPts val="1425"/>
-              </a:lnSpc>
-            </a:pPr>
+            <a:endParaRPr lang="en-US" sz="1400" b="0" dirty="0">
+              <a:effectLst/>
+              <a:latin typeface="Courier New" panose="02070309020205020404" pitchFamily="49" charset="0"/>
+            </a:endParaRPr>
+          </a:p>
+          <a:p>
+            <a:r>
+              <a:rPr lang="es-ES" sz="1400" b="0" dirty="0" err="1">
+                <a:effectLst/>
+                <a:latin typeface="Courier New" panose="02070309020205020404" pitchFamily="49" charset="0"/>
+              </a:rPr>
+              <a:t>mzi_test</a:t>
+            </a:r>
             <a:r>
               <a:rPr lang="es-ES" sz="1400" b="0" dirty="0">
                 <a:effectLst/>
                 <a:latin typeface="Courier New" panose="02070309020205020404" pitchFamily="49" charset="0"/>
               </a:rPr>
-              <a:t> </a:t>
+              <a:t> = </a:t>
             </a:r>
             <a:r>
               <a:rPr lang="es-ES" sz="1400" b="0" dirty="0" err="1">
                 <a:effectLst/>
                 <a:latin typeface="Courier New" panose="02070309020205020404" pitchFamily="49" charset="0"/>
               </a:rPr>
-              <a:t>mzi_test</a:t>
+              <a:t>mzi</a:t>
             </a:r>
             <a:r>
               <a:rPr lang="es-ES" sz="1400" b="0" dirty="0">
                 <a:effectLst/>
                 <a:latin typeface="Courier New" panose="02070309020205020404" pitchFamily="49" charset="0"/>
               </a:rPr>
-              <a:t> = </a:t>
+              <a:t>(</a:t>
             </a:r>
             <a:r>
               <a:rPr lang="es-ES" sz="1400" b="0" dirty="0" err="1">
                 <a:effectLst/>
                 <a:latin typeface="Courier New" panose="02070309020205020404" pitchFamily="49" charset="0"/>
               </a:rPr>
-              <a:t>mzi</a:t>
+              <a:t>wl</a:t>
             </a:r>
             <a:r>
               <a:rPr lang="es-ES" sz="1400" b="0" dirty="0">
                 <a:effectLst/>
                 <a:latin typeface="Courier New" panose="02070309020205020404" pitchFamily="49" charset="0"/>
               </a:rPr>
-              <a:t>(</a:t>
+              <a:t>=</a:t>
             </a:r>
             <a:r>
               <a:rPr lang="es-ES" sz="1400" b="0" dirty="0" err="1">
@@ -7000,76 +9663,115 @@
                 <a:effectLst/>
                 <a:latin typeface="Courier New" panose="02070309020205020404" pitchFamily="49" charset="0"/>
               </a:rPr>
-              <a:t>=</a:t>
+              <a:t>, </a:t>
+            </a:r>
+          </a:p>
+          <a:p>
+            <a:r>
+              <a:rPr lang="es-ES" sz="1400" dirty="0">
+                <a:latin typeface="Courier New" panose="02070309020205020404" pitchFamily="49" charset="0"/>
+              </a:rPr>
+              <a:t> </a:t>
             </a:r>
             <a:r>
               <a:rPr lang="es-ES" sz="1400" b="0" dirty="0" err="1">
                 <a:effectLst/>
                 <a:latin typeface="Courier New" panose="02070309020205020404" pitchFamily="49" charset="0"/>
               </a:rPr>
-              <a:t>wl</a:t>
+              <a:t>coup_a</a:t>
             </a:r>
             <a:r>
               <a:rPr lang="es-ES" sz="1400" b="0" dirty="0">
                 <a:effectLst/>
                 <a:latin typeface="Courier New" panose="02070309020205020404" pitchFamily="49" charset="0"/>
               </a:rPr>
-              <a:t>, </a:t>
-            </a:r>
-          </a:p>
-          <a:p>
-            <a:pPr lvl="2">
-              <a:lnSpc>
-                <a:spcPts val="1425"/>
-              </a:lnSpc>
-            </a:pPr>
+              <a:t> = ..</a:t>
+            </a:r>
+          </a:p>
+          <a:p>
+            <a:r>
+              <a:rPr lang="es-ES" sz="1400" dirty="0">
+                <a:latin typeface="Courier New" panose="02070309020205020404" pitchFamily="49" charset="0"/>
+              </a:rPr>
+              <a:t> </a:t>
+            </a:r>
+            <a:r>
+              <a:rPr lang="es-ES" sz="1400" b="0" dirty="0" err="1">
+                <a:effectLst/>
+                <a:latin typeface="Courier New" panose="02070309020205020404" pitchFamily="49" charset="0"/>
+              </a:rPr>
+              <a:t>wvg_d</a:t>
+            </a:r>
             <a:r>
               <a:rPr lang="es-ES" sz="1400" b="0" dirty="0">
                 <a:effectLst/>
                 <a:latin typeface="Courier New" panose="02070309020205020404" pitchFamily="49" charset="0"/>
               </a:rPr>
-              <a:t>    </a:t>
+              <a:t>={"</a:t>
             </a:r>
             <a:r>
               <a:rPr lang="es-ES" sz="1400" b="0" dirty="0" err="1">
                 <a:effectLst/>
                 <a:latin typeface="Courier New" panose="02070309020205020404" pitchFamily="49" charset="0"/>
               </a:rPr>
-              <a:t>coup_a</a:t>
+              <a:t>length</a:t>
             </a:r>
             <a:r>
               <a:rPr lang="es-ES" sz="1400" b="0" dirty="0">
                 <a:effectLst/>
                 <a:latin typeface="Courier New" panose="02070309020205020404" pitchFamily="49" charset="0"/>
               </a:rPr>
-              <a:t> = ...</a:t>
-            </a:r>
-          </a:p>
-          <a:p>
-            <a:pPr lvl="2">
-              <a:lnSpc>
-                <a:spcPts val="1425"/>
-              </a:lnSpc>
-            </a:pPr>
+              <a:t>": </a:t>
+            </a:r>
+            <a:r>
+              <a:rPr lang="es-ES" sz="1400" b="0" dirty="0" err="1">
+                <a:effectLst/>
+                <a:latin typeface="Courier New" panose="02070309020205020404" pitchFamily="49" charset="0"/>
+              </a:rPr>
+              <a:t>l_d</a:t>
+            </a:r>
             <a:r>
               <a:rPr lang="es-ES" sz="1400" b="0" dirty="0">
                 <a:effectLst/>
                 <a:latin typeface="Courier New" panose="02070309020205020404" pitchFamily="49" charset="0"/>
               </a:rPr>
-              <a:t>    </a:t>
+              <a:t>, "</a:t>
             </a:r>
             <a:r>
               <a:rPr lang="es-ES" sz="1400" b="0" dirty="0" err="1">
                 <a:effectLst/>
                 <a:latin typeface="Courier New" panose="02070309020205020404" pitchFamily="49" charset="0"/>
               </a:rPr>
-              <a:t>wvg_d</a:t>
+              <a:t>neff</a:t>
             </a:r>
             <a:r>
               <a:rPr lang="es-ES" sz="1400" b="0" dirty="0">
                 <a:effectLst/>
                 <a:latin typeface="Courier New" panose="02070309020205020404" pitchFamily="49" charset="0"/>
               </a:rPr>
+              <a:t>": ...}, </a:t>
+            </a:r>
+          </a:p>
+          <a:p>
+            <a:r>
+              <a:rPr lang="es-ES" sz="1400" b="0" dirty="0">
+                <a:effectLst/>
+                <a:latin typeface="Courier New" panose="02070309020205020404" pitchFamily="49" charset="0"/>
+              </a:rPr>
+              <a:t> </a:t>
+            </a:r>
+            <a:r>
+              <a:rPr lang="es-ES" sz="1400" b="0" dirty="0" err="1">
+                <a:effectLst/>
+                <a:latin typeface="Courier New" panose="02070309020205020404" pitchFamily="49" charset="0"/>
+              </a:rPr>
+              <a:t>wvg_u</a:t>
+            </a:r>
+            <a:r>
+              <a:rPr lang="es-ES" sz="1400" b="0" dirty="0">
+                <a:effectLst/>
+                <a:latin typeface="Courier New" panose="02070309020205020404" pitchFamily="49" charset="0"/>
+              </a:rPr>
               <a:t>={"</a:t>
             </a:r>
             <a:r>
@@ -7091,7 +9793,7 @@
                 <a:effectLst/>
                 <a:latin typeface="Courier New" panose="02070309020205020404" pitchFamily="49" charset="0"/>
               </a:rPr>
-              <a:t>l_d</a:t>
+              <a:t>l_u</a:t>
             </a:r>
             <a:r>
               <a:rPr lang="es-ES" sz="1400" b="0" dirty="0">
@@ -7112,125 +9814,39 @@
                 <a:effectLst/>
                 <a:latin typeface="Courier New" panose="02070309020205020404" pitchFamily="49" charset="0"/>
               </a:rPr>
-              <a:t>": ...}, </a:t>
-            </a:r>
-          </a:p>
-          <a:p>
-            <a:pPr lvl="2">
-              <a:lnSpc>
-                <a:spcPts val="1425"/>
-              </a:lnSpc>
-            </a:pPr>
+              <a:t>": ...},</a:t>
+            </a:r>
+          </a:p>
+          <a:p>
             <a:r>
               <a:rPr lang="es-ES" sz="1400" b="0" dirty="0">
                 <a:effectLst/>
                 <a:latin typeface="Courier New" panose="02070309020205020404" pitchFamily="49" charset="0"/>
               </a:rPr>
-              <a:t>    </a:t>
+              <a:t> </a:t>
             </a:r>
             <a:r>
               <a:rPr lang="es-ES" sz="1400" b="0" dirty="0" err="1">
                 <a:effectLst/>
                 <a:latin typeface="Courier New" panose="02070309020205020404" pitchFamily="49" charset="0"/>
               </a:rPr>
-              <a:t>wvg_u</a:t>
+              <a:t>coup_b</a:t>
             </a:r>
             <a:r>
               <a:rPr lang="es-ES" sz="1400" b="0" dirty="0">
                 <a:effectLst/>
                 <a:latin typeface="Courier New" panose="02070309020205020404" pitchFamily="49" charset="0"/>
               </a:rPr>
-              <a:t>={"</a:t>
-            </a:r>
-            <a:r>
-              <a:rPr lang="es-ES" sz="1400" b="0" dirty="0" err="1">
+              <a:t> = ... )</a:t>
+            </a:r>
+          </a:p>
+          <a:p>
+            <a:r>
+              <a:rPr lang="es-ES" sz="1400" b="0" dirty="0">
                 <a:effectLst/>
                 <a:latin typeface="Courier New" panose="02070309020205020404" pitchFamily="49" charset="0"/>
               </a:rPr>
-              <a:t>length</a:t>
-            </a:r>
-            <a:r>
-              <a:rPr lang="es-ES" sz="1400" b="0" dirty="0">
-                <a:effectLst/>
-                <a:latin typeface="Courier New" panose="02070309020205020404" pitchFamily="49" charset="0"/>
-              </a:rPr>
-              <a:t>": </a:t>
-            </a:r>
-            <a:r>
-              <a:rPr lang="es-ES" sz="1400" b="0" dirty="0" err="1">
-                <a:effectLst/>
-                <a:latin typeface="Courier New" panose="02070309020205020404" pitchFamily="49" charset="0"/>
-              </a:rPr>
-              <a:t>l_u</a:t>
-            </a:r>
-            <a:r>
-              <a:rPr lang="es-ES" sz="1400" b="0" dirty="0">
-                <a:effectLst/>
-                <a:latin typeface="Courier New" panose="02070309020205020404" pitchFamily="49" charset="0"/>
-              </a:rPr>
-              <a:t>, "</a:t>
-            </a:r>
-            <a:r>
-              <a:rPr lang="es-ES" sz="1400" b="0" dirty="0" err="1">
-                <a:effectLst/>
-                <a:latin typeface="Courier New" panose="02070309020205020404" pitchFamily="49" charset="0"/>
-              </a:rPr>
-              <a:t>neff</a:t>
-            </a:r>
-            <a:r>
-              <a:rPr lang="es-ES" sz="1400" b="0" dirty="0">
-                <a:effectLst/>
-                <a:latin typeface="Courier New" panose="02070309020205020404" pitchFamily="49" charset="0"/>
-              </a:rPr>
-              <a:t>": ...},</a:t>
-            </a:r>
-          </a:p>
-          <a:p>
-            <a:pPr lvl="2">
-              <a:lnSpc>
-                <a:spcPts val="1425"/>
-              </a:lnSpc>
-            </a:pPr>
-            <a:r>
-              <a:rPr lang="es-ES" sz="1400" b="0" dirty="0">
-                <a:effectLst/>
-                <a:latin typeface="Courier New" panose="02070309020205020404" pitchFamily="49" charset="0"/>
-              </a:rPr>
-              <a:t>    </a:t>
-            </a:r>
-            <a:r>
-              <a:rPr lang="es-ES" sz="1400" b="0" dirty="0" err="1">
-                <a:effectLst/>
-                <a:latin typeface="Courier New" panose="02070309020205020404" pitchFamily="49" charset="0"/>
-              </a:rPr>
-              <a:t>coup_b</a:t>
-            </a:r>
-            <a:r>
-              <a:rPr lang="es-ES" sz="1400" b="0" dirty="0">
-                <a:effectLst/>
-                <a:latin typeface="Courier New" panose="02070309020205020404" pitchFamily="49" charset="0"/>
-              </a:rPr>
-              <a:t> = ... )</a:t>
-            </a:r>
-          </a:p>
-          <a:p>
-            <a:pPr lvl="2">
-              <a:lnSpc>
-                <a:spcPts val="1425"/>
-              </a:lnSpc>
-            </a:pPr>
-            <a:br>
-              <a:rPr lang="es-ES" sz="1400" b="0" dirty="0">
-                <a:effectLst/>
-                <a:latin typeface="Courier New" panose="02070309020205020404" pitchFamily="49" charset="0"/>
-              </a:rPr>
-            </a:br>
-            <a:r>
-              <a:rPr lang="es-ES" sz="1400" b="0" dirty="0">
-                <a:effectLst/>
-                <a:latin typeface="Courier New" panose="02070309020205020404" pitchFamily="49" charset="0"/>
-              </a:rPr>
-              <a:t>    H00 = </a:t>
+              <a:t> H00 = </a:t>
             </a:r>
             <a:r>
               <a:rPr lang="es-ES" sz="1400" b="0" dirty="0" err="1">
@@ -7289,15 +9905,16 @@
         </p:nvSpPr>
         <p:spPr>
           <a:xfrm>
-            <a:off x="609441" y="4860334"/>
-            <a:ext cx="11199971" cy="1384995"/>
+            <a:off x="5045006" y="2743200"/>
+            <a:ext cx="6304407" cy="2862322"/>
           </a:xfrm>
           <a:prstGeom prst="rect">
             <a:avLst/>
           </a:prstGeom>
           <a:solidFill>
-            <a:schemeClr val="bg1">
-              <a:lumMod val="95000"/>
+            <a:schemeClr val="tx1">
+              <a:lumMod val="65000"/>
+              <a:lumOff val="35000"/>
             </a:schemeClr>
           </a:solidFill>
           <a:ln w="28575">
@@ -7329,32 +9946,1303 @@
             </a:endParaRPr>
           </a:p>
           <a:p>
-            <a:pPr algn="just"/>
-            <a:endParaRPr lang="en-US" sz="1200" dirty="0">
-              <a:latin typeface="Arial" panose="020B0604020202020204" pitchFamily="34" charset="0"/>
-              <a:cs typeface="Arial" panose="020B0604020202020204" pitchFamily="34" charset="0"/>
-            </a:endParaRPr>
-          </a:p>
-          <a:p>
-            <a:pPr algn="just"/>
-            <a:endParaRPr lang="en-US" sz="1200" dirty="0">
-              <a:latin typeface="Arial" panose="020B0604020202020204" pitchFamily="34" charset="0"/>
-              <a:cs typeface="Arial" panose="020B0604020202020204" pitchFamily="34" charset="0"/>
-            </a:endParaRPr>
-          </a:p>
-          <a:p>
-            <a:pPr algn="just"/>
-            <a:endParaRPr lang="en-US" sz="1200" dirty="0">
-              <a:latin typeface="Arial" panose="020B0604020202020204" pitchFamily="34" charset="0"/>
-              <a:cs typeface="Arial" panose="020B0604020202020204" pitchFamily="34" charset="0"/>
-            </a:endParaRPr>
-          </a:p>
-          <a:p>
-            <a:pPr algn="just"/>
-            <a:endParaRPr lang="en-US" sz="1200" dirty="0">
-              <a:latin typeface="Arial" panose="020B0604020202020204" pitchFamily="34" charset="0"/>
-              <a:cs typeface="Arial" panose="020B0604020202020204" pitchFamily="34" charset="0"/>
-            </a:endParaRPr>
+            <a:r>
+              <a:rPr lang="es-ES" sz="1200" b="0" dirty="0" err="1">
+                <a:solidFill>
+                  <a:srgbClr val="9CDCFE"/>
+                </a:solidFill>
+                <a:effectLst/>
+                <a:latin typeface="Consolas" panose="020B0609020204030204" pitchFamily="49" charset="0"/>
+              </a:rPr>
+              <a:t>mzi_test</a:t>
+            </a:r>
+            <a:r>
+              <a:rPr lang="es-ES" sz="1200" b="0" dirty="0">
+                <a:solidFill>
+                  <a:srgbClr val="CCCCCC"/>
+                </a:solidFill>
+                <a:effectLst/>
+                <a:latin typeface="Consolas" panose="020B0609020204030204" pitchFamily="49" charset="0"/>
+              </a:rPr>
+              <a:t> </a:t>
+            </a:r>
+            <a:r>
+              <a:rPr lang="es-ES" sz="1200" b="0" dirty="0">
+                <a:solidFill>
+                  <a:srgbClr val="D4D4D4"/>
+                </a:solidFill>
+                <a:effectLst/>
+                <a:latin typeface="Consolas" panose="020B0609020204030204" pitchFamily="49" charset="0"/>
+              </a:rPr>
+              <a:t>=</a:t>
+            </a:r>
+            <a:r>
+              <a:rPr lang="es-ES" sz="1200" b="0" dirty="0">
+                <a:solidFill>
+                  <a:srgbClr val="CCCCCC"/>
+                </a:solidFill>
+                <a:effectLst/>
+                <a:latin typeface="Consolas" panose="020B0609020204030204" pitchFamily="49" charset="0"/>
+              </a:rPr>
+              <a:t> </a:t>
+            </a:r>
+            <a:r>
+              <a:rPr lang="es-ES" sz="1200" b="0" dirty="0" err="1">
+                <a:solidFill>
+                  <a:srgbClr val="9CDCFE"/>
+                </a:solidFill>
+                <a:effectLst/>
+                <a:latin typeface="Consolas" panose="020B0609020204030204" pitchFamily="49" charset="0"/>
+              </a:rPr>
+              <a:t>mzi</a:t>
+            </a:r>
+            <a:r>
+              <a:rPr lang="es-ES" sz="1200" b="0" dirty="0">
+                <a:solidFill>
+                  <a:srgbClr val="CCCCCC"/>
+                </a:solidFill>
+                <a:effectLst/>
+                <a:latin typeface="Consolas" panose="020B0609020204030204" pitchFamily="49" charset="0"/>
+              </a:rPr>
+              <a:t>(</a:t>
+            </a:r>
+            <a:r>
+              <a:rPr lang="es-ES" sz="1200" b="0" dirty="0" err="1">
+                <a:solidFill>
+                  <a:srgbClr val="9CDCFE"/>
+                </a:solidFill>
+                <a:effectLst/>
+                <a:latin typeface="Consolas" panose="020B0609020204030204" pitchFamily="49" charset="0"/>
+              </a:rPr>
+              <a:t>wl</a:t>
+            </a:r>
+            <a:r>
+              <a:rPr lang="es-ES" sz="1200" b="0" dirty="0">
+                <a:solidFill>
+                  <a:srgbClr val="D4D4D4"/>
+                </a:solidFill>
+                <a:effectLst/>
+                <a:latin typeface="Consolas" panose="020B0609020204030204" pitchFamily="49" charset="0"/>
+              </a:rPr>
+              <a:t>=</a:t>
+            </a:r>
+            <a:r>
+              <a:rPr lang="es-ES" sz="1200" b="0" dirty="0" err="1">
+                <a:solidFill>
+                  <a:srgbClr val="9CDCFE"/>
+                </a:solidFill>
+                <a:effectLst/>
+                <a:latin typeface="Consolas" panose="020B0609020204030204" pitchFamily="49" charset="0"/>
+              </a:rPr>
+              <a:t>wvl</a:t>
+            </a:r>
+            <a:r>
+              <a:rPr lang="es-ES" sz="1200" b="0" dirty="0">
+                <a:solidFill>
+                  <a:srgbClr val="CCCCCC"/>
+                </a:solidFill>
+                <a:effectLst/>
+                <a:latin typeface="Consolas" panose="020B0609020204030204" pitchFamily="49" charset="0"/>
+              </a:rPr>
+              <a:t>,</a:t>
+            </a:r>
+          </a:p>
+          <a:p>
+            <a:r>
+              <a:rPr lang="es-ES" sz="1200" b="0" dirty="0">
+                <a:solidFill>
+                  <a:srgbClr val="CCCCCC"/>
+                </a:solidFill>
+                <a:effectLst/>
+                <a:latin typeface="Consolas" panose="020B0609020204030204" pitchFamily="49" charset="0"/>
+              </a:rPr>
+              <a:t>            </a:t>
+            </a:r>
+            <a:r>
+              <a:rPr lang="es-ES" sz="1200" b="0" dirty="0" err="1">
+                <a:solidFill>
+                  <a:srgbClr val="9CDCFE"/>
+                </a:solidFill>
+                <a:effectLst/>
+                <a:latin typeface="Consolas" panose="020B0609020204030204" pitchFamily="49" charset="0"/>
+              </a:rPr>
+              <a:t>coup_a</a:t>
+            </a:r>
+            <a:r>
+              <a:rPr lang="es-ES" sz="1200" b="0" dirty="0">
+                <a:solidFill>
+                  <a:srgbClr val="D4D4D4"/>
+                </a:solidFill>
+                <a:effectLst/>
+                <a:latin typeface="Consolas" panose="020B0609020204030204" pitchFamily="49" charset="0"/>
+              </a:rPr>
+              <a:t>=</a:t>
+            </a:r>
+            <a:r>
+              <a:rPr lang="es-ES" sz="1200" b="0" dirty="0">
+                <a:solidFill>
+                  <a:srgbClr val="CCCCCC"/>
+                </a:solidFill>
+                <a:effectLst/>
+                <a:latin typeface="Consolas" panose="020B0609020204030204" pitchFamily="49" charset="0"/>
+              </a:rPr>
+              <a:t>{</a:t>
+            </a:r>
+            <a:r>
+              <a:rPr lang="es-ES" sz="1200" b="0" dirty="0">
+                <a:solidFill>
+                  <a:srgbClr val="CE9178"/>
+                </a:solidFill>
+                <a:effectLst/>
+                <a:latin typeface="Consolas" panose="020B0609020204030204" pitchFamily="49" charset="0"/>
+              </a:rPr>
+              <a:t>"</a:t>
+            </a:r>
+            <a:r>
+              <a:rPr lang="es-ES" sz="1200" b="0" dirty="0" err="1">
+                <a:solidFill>
+                  <a:srgbClr val="CE9178"/>
+                </a:solidFill>
+                <a:effectLst/>
+                <a:latin typeface="Consolas" panose="020B0609020204030204" pitchFamily="49" charset="0"/>
+              </a:rPr>
+              <a:t>coupling</a:t>
+            </a:r>
+            <a:r>
+              <a:rPr lang="es-ES" sz="1200" b="0" dirty="0">
+                <a:solidFill>
+                  <a:srgbClr val="CE9178"/>
+                </a:solidFill>
+                <a:effectLst/>
+                <a:latin typeface="Consolas" panose="020B0609020204030204" pitchFamily="49" charset="0"/>
+              </a:rPr>
+              <a:t>"</a:t>
+            </a:r>
+            <a:r>
+              <a:rPr lang="es-ES" sz="1200" b="0" dirty="0">
+                <a:solidFill>
+                  <a:srgbClr val="CCCCCC"/>
+                </a:solidFill>
+                <a:effectLst/>
+                <a:latin typeface="Consolas" panose="020B0609020204030204" pitchFamily="49" charset="0"/>
+              </a:rPr>
+              <a:t>:</a:t>
+            </a:r>
+            <a:r>
+              <a:rPr lang="es-ES" sz="1200" b="0" dirty="0" err="1">
+                <a:solidFill>
+                  <a:srgbClr val="9CDCFE"/>
+                </a:solidFill>
+                <a:effectLst/>
+                <a:latin typeface="Consolas" panose="020B0609020204030204" pitchFamily="49" charset="0"/>
+              </a:rPr>
+              <a:t>K_a</a:t>
+            </a:r>
+            <a:r>
+              <a:rPr lang="es-ES" sz="1200" b="0" dirty="0">
+                <a:solidFill>
+                  <a:srgbClr val="CCCCCC"/>
+                </a:solidFill>
+                <a:effectLst/>
+                <a:latin typeface="Consolas" panose="020B0609020204030204" pitchFamily="49" charset="0"/>
+              </a:rPr>
+              <a:t>},</a:t>
+            </a:r>
+          </a:p>
+          <a:p>
+            <a:r>
+              <a:rPr lang="es-ES" sz="1200" b="0" dirty="0">
+                <a:solidFill>
+                  <a:srgbClr val="CCCCCC"/>
+                </a:solidFill>
+                <a:effectLst/>
+                <a:latin typeface="Consolas" panose="020B0609020204030204" pitchFamily="49" charset="0"/>
+              </a:rPr>
+              <a:t>            </a:t>
+            </a:r>
+            <a:r>
+              <a:rPr lang="es-ES" sz="1200" b="0" dirty="0" err="1">
+                <a:solidFill>
+                  <a:srgbClr val="9CDCFE"/>
+                </a:solidFill>
+                <a:effectLst/>
+                <a:latin typeface="Consolas" panose="020B0609020204030204" pitchFamily="49" charset="0"/>
+              </a:rPr>
+              <a:t>wvg_u</a:t>
+            </a:r>
+            <a:r>
+              <a:rPr lang="es-ES" sz="1200" b="0" dirty="0">
+                <a:solidFill>
+                  <a:srgbClr val="D4D4D4"/>
+                </a:solidFill>
+                <a:effectLst/>
+                <a:latin typeface="Consolas" panose="020B0609020204030204" pitchFamily="49" charset="0"/>
+              </a:rPr>
+              <a:t>=</a:t>
+            </a:r>
+            <a:r>
+              <a:rPr lang="es-ES" sz="1200" b="0" dirty="0">
+                <a:solidFill>
+                  <a:srgbClr val="CCCCCC"/>
+                </a:solidFill>
+                <a:effectLst/>
+                <a:latin typeface="Consolas" panose="020B0609020204030204" pitchFamily="49" charset="0"/>
+              </a:rPr>
+              <a:t>{</a:t>
+            </a:r>
+            <a:r>
+              <a:rPr lang="es-ES" sz="1200" b="0" dirty="0">
+                <a:solidFill>
+                  <a:srgbClr val="CE9178"/>
+                </a:solidFill>
+                <a:effectLst/>
+                <a:latin typeface="Consolas" panose="020B0609020204030204" pitchFamily="49" charset="0"/>
+              </a:rPr>
+              <a:t>"</a:t>
+            </a:r>
+            <a:r>
+              <a:rPr lang="es-ES" sz="1200" b="0" dirty="0" err="1">
+                <a:solidFill>
+                  <a:srgbClr val="CE9178"/>
+                </a:solidFill>
+                <a:effectLst/>
+                <a:latin typeface="Consolas" panose="020B0609020204030204" pitchFamily="49" charset="0"/>
+              </a:rPr>
+              <a:t>wl</a:t>
+            </a:r>
+            <a:r>
+              <a:rPr lang="es-ES" sz="1200" b="0" dirty="0">
+                <a:solidFill>
+                  <a:srgbClr val="CE9178"/>
+                </a:solidFill>
+                <a:effectLst/>
+                <a:latin typeface="Consolas" panose="020B0609020204030204" pitchFamily="49" charset="0"/>
+              </a:rPr>
+              <a:t>"</a:t>
+            </a:r>
+            <a:r>
+              <a:rPr lang="es-ES" sz="1200" b="0" dirty="0">
+                <a:solidFill>
+                  <a:srgbClr val="CCCCCC"/>
+                </a:solidFill>
+                <a:effectLst/>
+                <a:latin typeface="Consolas" panose="020B0609020204030204" pitchFamily="49" charset="0"/>
+              </a:rPr>
+              <a:t>:</a:t>
+            </a:r>
+            <a:r>
+              <a:rPr lang="es-ES" sz="1200" b="0" dirty="0" err="1">
+                <a:solidFill>
+                  <a:srgbClr val="9CDCFE"/>
+                </a:solidFill>
+                <a:effectLst/>
+                <a:latin typeface="Consolas" panose="020B0609020204030204" pitchFamily="49" charset="0"/>
+              </a:rPr>
+              <a:t>wvl</a:t>
+            </a:r>
+            <a:r>
+              <a:rPr lang="es-ES" sz="1200" b="0" dirty="0">
+                <a:solidFill>
+                  <a:srgbClr val="CCCCCC"/>
+                </a:solidFill>
+                <a:effectLst/>
+                <a:latin typeface="Consolas" panose="020B0609020204030204" pitchFamily="49" charset="0"/>
+              </a:rPr>
+              <a:t>, </a:t>
+            </a:r>
+            <a:r>
+              <a:rPr lang="es-ES" sz="1200" b="0" dirty="0">
+                <a:solidFill>
+                  <a:srgbClr val="CE9178"/>
+                </a:solidFill>
+                <a:effectLst/>
+                <a:latin typeface="Consolas" panose="020B0609020204030204" pitchFamily="49" charset="0"/>
+              </a:rPr>
+              <a:t>"</a:t>
+            </a:r>
+            <a:r>
+              <a:rPr lang="es-ES" sz="1200" b="0" dirty="0" err="1">
+                <a:solidFill>
+                  <a:srgbClr val="CE9178"/>
+                </a:solidFill>
+                <a:effectLst/>
+                <a:latin typeface="Consolas" panose="020B0609020204030204" pitchFamily="49" charset="0"/>
+              </a:rPr>
+              <a:t>neff</a:t>
+            </a:r>
+            <a:r>
+              <a:rPr lang="es-ES" sz="1200" b="0" dirty="0">
+                <a:solidFill>
+                  <a:srgbClr val="CE9178"/>
+                </a:solidFill>
+                <a:effectLst/>
+                <a:latin typeface="Consolas" panose="020B0609020204030204" pitchFamily="49" charset="0"/>
+              </a:rPr>
+              <a:t>"</a:t>
+            </a:r>
+            <a:r>
+              <a:rPr lang="es-ES" sz="1200" b="0" dirty="0">
+                <a:solidFill>
+                  <a:srgbClr val="CCCCCC"/>
+                </a:solidFill>
+                <a:effectLst/>
+                <a:latin typeface="Consolas" panose="020B0609020204030204" pitchFamily="49" charset="0"/>
+              </a:rPr>
+              <a:t>:</a:t>
+            </a:r>
+            <a:r>
+              <a:rPr lang="es-ES" sz="1200" b="0" dirty="0" err="1">
+                <a:solidFill>
+                  <a:srgbClr val="9CDCFE"/>
+                </a:solidFill>
+                <a:effectLst/>
+                <a:latin typeface="Consolas" panose="020B0609020204030204" pitchFamily="49" charset="0"/>
+              </a:rPr>
+              <a:t>neffu</a:t>
+            </a:r>
+            <a:r>
+              <a:rPr lang="es-ES" sz="1200" b="0" dirty="0">
+                <a:solidFill>
+                  <a:srgbClr val="CCCCCC"/>
+                </a:solidFill>
+                <a:effectLst/>
+                <a:latin typeface="Consolas" panose="020B0609020204030204" pitchFamily="49" charset="0"/>
+              </a:rPr>
+              <a:t>, </a:t>
+            </a:r>
+            <a:r>
+              <a:rPr lang="es-ES" sz="1200" b="0" dirty="0">
+                <a:solidFill>
+                  <a:srgbClr val="CE9178"/>
+                </a:solidFill>
+                <a:effectLst/>
+                <a:latin typeface="Consolas" panose="020B0609020204030204" pitchFamily="49" charset="0"/>
+              </a:rPr>
+              <a:t>"</a:t>
+            </a:r>
+            <a:r>
+              <a:rPr lang="es-ES" sz="1200" b="0" dirty="0" err="1">
+                <a:solidFill>
+                  <a:srgbClr val="CE9178"/>
+                </a:solidFill>
+                <a:effectLst/>
+                <a:latin typeface="Consolas" panose="020B0609020204030204" pitchFamily="49" charset="0"/>
+              </a:rPr>
+              <a:t>length</a:t>
+            </a:r>
+            <a:r>
+              <a:rPr lang="es-ES" sz="1200" b="0" dirty="0">
+                <a:solidFill>
+                  <a:srgbClr val="CE9178"/>
+                </a:solidFill>
+                <a:effectLst/>
+                <a:latin typeface="Consolas" panose="020B0609020204030204" pitchFamily="49" charset="0"/>
+              </a:rPr>
+              <a:t>"</a:t>
+            </a:r>
+            <a:r>
+              <a:rPr lang="es-ES" sz="1200" b="0" dirty="0">
+                <a:solidFill>
+                  <a:srgbClr val="CCCCCC"/>
+                </a:solidFill>
+                <a:effectLst/>
+                <a:latin typeface="Consolas" panose="020B0609020204030204" pitchFamily="49" charset="0"/>
+              </a:rPr>
+              <a:t>: </a:t>
+            </a:r>
+            <a:r>
+              <a:rPr lang="es-ES" sz="1200" b="0" dirty="0">
+                <a:solidFill>
+                  <a:srgbClr val="9CDCFE"/>
+                </a:solidFill>
+                <a:effectLst/>
+                <a:latin typeface="Consolas" panose="020B0609020204030204" pitchFamily="49" charset="0"/>
+              </a:rPr>
+              <a:t>Lu</a:t>
+            </a:r>
+            <a:r>
+              <a:rPr lang="es-ES" sz="1200" b="0" dirty="0">
+                <a:solidFill>
+                  <a:srgbClr val="CCCCCC"/>
+                </a:solidFill>
+                <a:effectLst/>
+                <a:latin typeface="Consolas" panose="020B0609020204030204" pitchFamily="49" charset="0"/>
+              </a:rPr>
+              <a:t>, </a:t>
+            </a:r>
+            <a:r>
+              <a:rPr lang="es-ES" sz="1200" b="0" dirty="0">
+                <a:solidFill>
+                  <a:srgbClr val="CE9178"/>
+                </a:solidFill>
+                <a:effectLst/>
+                <a:latin typeface="Consolas" panose="020B0609020204030204" pitchFamily="49" charset="0"/>
+              </a:rPr>
+              <a:t>"</a:t>
+            </a:r>
+            <a:r>
+              <a:rPr lang="es-ES" sz="1200" b="0" dirty="0" err="1">
+                <a:solidFill>
+                  <a:srgbClr val="CE9178"/>
+                </a:solidFill>
+                <a:effectLst/>
+                <a:latin typeface="Consolas" panose="020B0609020204030204" pitchFamily="49" charset="0"/>
+              </a:rPr>
+              <a:t>loss</a:t>
+            </a:r>
+            <a:r>
+              <a:rPr lang="es-ES" sz="1200" b="0" dirty="0">
+                <a:solidFill>
+                  <a:srgbClr val="CE9178"/>
+                </a:solidFill>
+                <a:effectLst/>
+                <a:latin typeface="Consolas" panose="020B0609020204030204" pitchFamily="49" charset="0"/>
+              </a:rPr>
+              <a:t>"</a:t>
+            </a:r>
+            <a:r>
+              <a:rPr lang="es-ES" sz="1200" b="0" dirty="0">
+                <a:solidFill>
+                  <a:srgbClr val="CCCCCC"/>
+                </a:solidFill>
+                <a:effectLst/>
+                <a:latin typeface="Consolas" panose="020B0609020204030204" pitchFamily="49" charset="0"/>
+              </a:rPr>
+              <a:t>:</a:t>
+            </a:r>
+            <a:r>
+              <a:rPr lang="es-ES" sz="1200" b="0" dirty="0" err="1">
+                <a:solidFill>
+                  <a:srgbClr val="9CDCFE"/>
+                </a:solidFill>
+                <a:effectLst/>
+                <a:latin typeface="Consolas" panose="020B0609020204030204" pitchFamily="49" charset="0"/>
+              </a:rPr>
+              <a:t>alphau</a:t>
+            </a:r>
+            <a:r>
+              <a:rPr lang="es-ES" sz="1200" b="0" dirty="0">
+                <a:solidFill>
+                  <a:srgbClr val="CCCCCC"/>
+                </a:solidFill>
+                <a:effectLst/>
+                <a:latin typeface="Consolas" panose="020B0609020204030204" pitchFamily="49" charset="0"/>
+              </a:rPr>
+              <a:t>},</a:t>
+            </a:r>
+          </a:p>
+          <a:p>
+            <a:r>
+              <a:rPr lang="es-ES" sz="1200" b="0" dirty="0">
+                <a:solidFill>
+                  <a:srgbClr val="CCCCCC"/>
+                </a:solidFill>
+                <a:effectLst/>
+                <a:latin typeface="Consolas" panose="020B0609020204030204" pitchFamily="49" charset="0"/>
+              </a:rPr>
+              <a:t>            </a:t>
+            </a:r>
+            <a:r>
+              <a:rPr lang="es-ES" sz="1200" b="0" dirty="0" err="1">
+                <a:solidFill>
+                  <a:srgbClr val="9CDCFE"/>
+                </a:solidFill>
+                <a:effectLst/>
+                <a:latin typeface="Consolas" panose="020B0609020204030204" pitchFamily="49" charset="0"/>
+              </a:rPr>
+              <a:t>wvg_d</a:t>
+            </a:r>
+            <a:r>
+              <a:rPr lang="es-ES" sz="1200" b="0" dirty="0">
+                <a:solidFill>
+                  <a:srgbClr val="D4D4D4"/>
+                </a:solidFill>
+                <a:effectLst/>
+                <a:latin typeface="Consolas" panose="020B0609020204030204" pitchFamily="49" charset="0"/>
+              </a:rPr>
+              <a:t>=</a:t>
+            </a:r>
+            <a:r>
+              <a:rPr lang="es-ES" sz="1200" b="0" dirty="0">
+                <a:solidFill>
+                  <a:srgbClr val="CCCCCC"/>
+                </a:solidFill>
+                <a:effectLst/>
+                <a:latin typeface="Consolas" panose="020B0609020204030204" pitchFamily="49" charset="0"/>
+              </a:rPr>
+              <a:t>{</a:t>
+            </a:r>
+            <a:r>
+              <a:rPr lang="es-ES" sz="1200" b="0" dirty="0">
+                <a:solidFill>
+                  <a:srgbClr val="CE9178"/>
+                </a:solidFill>
+                <a:effectLst/>
+                <a:latin typeface="Consolas" panose="020B0609020204030204" pitchFamily="49" charset="0"/>
+              </a:rPr>
+              <a:t>"</a:t>
+            </a:r>
+            <a:r>
+              <a:rPr lang="es-ES" sz="1200" b="0" dirty="0" err="1">
+                <a:solidFill>
+                  <a:srgbClr val="CE9178"/>
+                </a:solidFill>
+                <a:effectLst/>
+                <a:latin typeface="Consolas" panose="020B0609020204030204" pitchFamily="49" charset="0"/>
+              </a:rPr>
+              <a:t>wl</a:t>
+            </a:r>
+            <a:r>
+              <a:rPr lang="es-ES" sz="1200" b="0" dirty="0">
+                <a:solidFill>
+                  <a:srgbClr val="CE9178"/>
+                </a:solidFill>
+                <a:effectLst/>
+                <a:latin typeface="Consolas" panose="020B0609020204030204" pitchFamily="49" charset="0"/>
+              </a:rPr>
+              <a:t>"</a:t>
+            </a:r>
+            <a:r>
+              <a:rPr lang="es-ES" sz="1200" b="0" dirty="0">
+                <a:solidFill>
+                  <a:srgbClr val="CCCCCC"/>
+                </a:solidFill>
+                <a:effectLst/>
+                <a:latin typeface="Consolas" panose="020B0609020204030204" pitchFamily="49" charset="0"/>
+              </a:rPr>
+              <a:t>:</a:t>
+            </a:r>
+            <a:r>
+              <a:rPr lang="es-ES" sz="1200" b="0" dirty="0" err="1">
+                <a:solidFill>
+                  <a:srgbClr val="9CDCFE"/>
+                </a:solidFill>
+                <a:effectLst/>
+                <a:latin typeface="Consolas" panose="020B0609020204030204" pitchFamily="49" charset="0"/>
+              </a:rPr>
+              <a:t>wvl</a:t>
+            </a:r>
+            <a:r>
+              <a:rPr lang="es-ES" sz="1200" b="0" dirty="0">
+                <a:solidFill>
+                  <a:srgbClr val="CCCCCC"/>
+                </a:solidFill>
+                <a:effectLst/>
+                <a:latin typeface="Consolas" panose="020B0609020204030204" pitchFamily="49" charset="0"/>
+              </a:rPr>
+              <a:t>, </a:t>
+            </a:r>
+            <a:r>
+              <a:rPr lang="es-ES" sz="1200" b="0" dirty="0">
+                <a:solidFill>
+                  <a:srgbClr val="CE9178"/>
+                </a:solidFill>
+                <a:effectLst/>
+                <a:latin typeface="Consolas" panose="020B0609020204030204" pitchFamily="49" charset="0"/>
+              </a:rPr>
+              <a:t>"</a:t>
+            </a:r>
+            <a:r>
+              <a:rPr lang="es-ES" sz="1200" b="0" dirty="0" err="1">
+                <a:solidFill>
+                  <a:srgbClr val="CE9178"/>
+                </a:solidFill>
+                <a:effectLst/>
+                <a:latin typeface="Consolas" panose="020B0609020204030204" pitchFamily="49" charset="0"/>
+              </a:rPr>
+              <a:t>neff</a:t>
+            </a:r>
+            <a:r>
+              <a:rPr lang="es-ES" sz="1200" b="0" dirty="0">
+                <a:solidFill>
+                  <a:srgbClr val="CE9178"/>
+                </a:solidFill>
+                <a:effectLst/>
+                <a:latin typeface="Consolas" panose="020B0609020204030204" pitchFamily="49" charset="0"/>
+              </a:rPr>
+              <a:t>"</a:t>
+            </a:r>
+            <a:r>
+              <a:rPr lang="es-ES" sz="1200" b="0" dirty="0">
+                <a:solidFill>
+                  <a:srgbClr val="CCCCCC"/>
+                </a:solidFill>
+                <a:effectLst/>
+                <a:latin typeface="Consolas" panose="020B0609020204030204" pitchFamily="49" charset="0"/>
+              </a:rPr>
+              <a:t>:</a:t>
+            </a:r>
+            <a:r>
+              <a:rPr lang="es-ES" sz="1200" b="0" dirty="0" err="1">
+                <a:solidFill>
+                  <a:srgbClr val="9CDCFE"/>
+                </a:solidFill>
+                <a:effectLst/>
+                <a:latin typeface="Consolas" panose="020B0609020204030204" pitchFamily="49" charset="0"/>
+              </a:rPr>
+              <a:t>neffd</a:t>
+            </a:r>
+            <a:r>
+              <a:rPr lang="es-ES" sz="1200" b="0" dirty="0">
+                <a:solidFill>
+                  <a:srgbClr val="CCCCCC"/>
+                </a:solidFill>
+                <a:effectLst/>
+                <a:latin typeface="Consolas" panose="020B0609020204030204" pitchFamily="49" charset="0"/>
+              </a:rPr>
+              <a:t>, </a:t>
+            </a:r>
+            <a:r>
+              <a:rPr lang="es-ES" sz="1200" b="0" dirty="0">
+                <a:solidFill>
+                  <a:srgbClr val="CE9178"/>
+                </a:solidFill>
+                <a:effectLst/>
+                <a:latin typeface="Consolas" panose="020B0609020204030204" pitchFamily="49" charset="0"/>
+              </a:rPr>
+              <a:t>"</a:t>
+            </a:r>
+            <a:r>
+              <a:rPr lang="es-ES" sz="1200" b="0" dirty="0" err="1">
+                <a:solidFill>
+                  <a:srgbClr val="CE9178"/>
+                </a:solidFill>
+                <a:effectLst/>
+                <a:latin typeface="Consolas" panose="020B0609020204030204" pitchFamily="49" charset="0"/>
+              </a:rPr>
+              <a:t>length</a:t>
+            </a:r>
+            <a:r>
+              <a:rPr lang="es-ES" sz="1200" b="0" dirty="0">
+                <a:solidFill>
+                  <a:srgbClr val="CE9178"/>
+                </a:solidFill>
+                <a:effectLst/>
+                <a:latin typeface="Consolas" panose="020B0609020204030204" pitchFamily="49" charset="0"/>
+              </a:rPr>
+              <a:t>"</a:t>
+            </a:r>
+            <a:r>
+              <a:rPr lang="es-ES" sz="1200" b="0" dirty="0">
+                <a:solidFill>
+                  <a:srgbClr val="CCCCCC"/>
+                </a:solidFill>
+                <a:effectLst/>
+                <a:latin typeface="Consolas" panose="020B0609020204030204" pitchFamily="49" charset="0"/>
+              </a:rPr>
+              <a:t>: </a:t>
+            </a:r>
+            <a:r>
+              <a:rPr lang="es-ES" sz="1200" b="0" dirty="0" err="1">
+                <a:solidFill>
+                  <a:srgbClr val="9CDCFE"/>
+                </a:solidFill>
+                <a:effectLst/>
+                <a:latin typeface="Consolas" panose="020B0609020204030204" pitchFamily="49" charset="0"/>
+              </a:rPr>
+              <a:t>Ld</a:t>
+            </a:r>
+            <a:r>
+              <a:rPr lang="es-ES" sz="1200" b="0" dirty="0">
+                <a:solidFill>
+                  <a:srgbClr val="CCCCCC"/>
+                </a:solidFill>
+                <a:effectLst/>
+                <a:latin typeface="Consolas" panose="020B0609020204030204" pitchFamily="49" charset="0"/>
+              </a:rPr>
+              <a:t>, </a:t>
+            </a:r>
+            <a:r>
+              <a:rPr lang="es-ES" sz="1200" b="0" dirty="0">
+                <a:solidFill>
+                  <a:srgbClr val="CE9178"/>
+                </a:solidFill>
+                <a:effectLst/>
+                <a:latin typeface="Consolas" panose="020B0609020204030204" pitchFamily="49" charset="0"/>
+              </a:rPr>
+              <a:t>"</a:t>
+            </a:r>
+            <a:r>
+              <a:rPr lang="es-ES" sz="1200" b="0" dirty="0" err="1">
+                <a:solidFill>
+                  <a:srgbClr val="CE9178"/>
+                </a:solidFill>
+                <a:effectLst/>
+                <a:latin typeface="Consolas" panose="020B0609020204030204" pitchFamily="49" charset="0"/>
+              </a:rPr>
+              <a:t>loss</a:t>
+            </a:r>
+            <a:r>
+              <a:rPr lang="es-ES" sz="1200" b="0" dirty="0">
+                <a:solidFill>
+                  <a:srgbClr val="CE9178"/>
+                </a:solidFill>
+                <a:effectLst/>
+                <a:latin typeface="Consolas" panose="020B0609020204030204" pitchFamily="49" charset="0"/>
+              </a:rPr>
+              <a:t>"</a:t>
+            </a:r>
+            <a:r>
+              <a:rPr lang="es-ES" sz="1200" b="0" dirty="0">
+                <a:solidFill>
+                  <a:srgbClr val="CCCCCC"/>
+                </a:solidFill>
+                <a:effectLst/>
+                <a:latin typeface="Consolas" panose="020B0609020204030204" pitchFamily="49" charset="0"/>
+              </a:rPr>
+              <a:t>:</a:t>
+            </a:r>
+            <a:r>
+              <a:rPr lang="es-ES" sz="1200" b="0" dirty="0" err="1">
+                <a:solidFill>
+                  <a:srgbClr val="9CDCFE"/>
+                </a:solidFill>
+                <a:effectLst/>
+                <a:latin typeface="Consolas" panose="020B0609020204030204" pitchFamily="49" charset="0"/>
+              </a:rPr>
+              <a:t>alphad</a:t>
+            </a:r>
+            <a:r>
+              <a:rPr lang="es-ES" sz="1200" b="0" dirty="0">
+                <a:solidFill>
+                  <a:srgbClr val="CCCCCC"/>
+                </a:solidFill>
+                <a:effectLst/>
+                <a:latin typeface="Consolas" panose="020B0609020204030204" pitchFamily="49" charset="0"/>
+              </a:rPr>
+              <a:t>},</a:t>
+            </a:r>
+          </a:p>
+          <a:p>
+            <a:r>
+              <a:rPr lang="es-ES" sz="1200" b="0" dirty="0">
+                <a:solidFill>
+                  <a:srgbClr val="CCCCCC"/>
+                </a:solidFill>
+                <a:effectLst/>
+                <a:latin typeface="Consolas" panose="020B0609020204030204" pitchFamily="49" charset="0"/>
+              </a:rPr>
+              <a:t>            </a:t>
+            </a:r>
+            <a:r>
+              <a:rPr lang="es-ES" sz="1200" b="0" dirty="0" err="1">
+                <a:solidFill>
+                  <a:srgbClr val="9CDCFE"/>
+                </a:solidFill>
+                <a:effectLst/>
+                <a:latin typeface="Consolas" panose="020B0609020204030204" pitchFamily="49" charset="0"/>
+              </a:rPr>
+              <a:t>coup_b</a:t>
+            </a:r>
+            <a:r>
+              <a:rPr lang="es-ES" sz="1200" b="0" dirty="0">
+                <a:solidFill>
+                  <a:srgbClr val="D4D4D4"/>
+                </a:solidFill>
+                <a:effectLst/>
+                <a:latin typeface="Consolas" panose="020B0609020204030204" pitchFamily="49" charset="0"/>
+              </a:rPr>
+              <a:t>=</a:t>
+            </a:r>
+            <a:r>
+              <a:rPr lang="es-ES" sz="1200" b="0" dirty="0">
+                <a:solidFill>
+                  <a:srgbClr val="CCCCCC"/>
+                </a:solidFill>
+                <a:effectLst/>
+                <a:latin typeface="Consolas" panose="020B0609020204030204" pitchFamily="49" charset="0"/>
+              </a:rPr>
+              <a:t>{</a:t>
+            </a:r>
+            <a:r>
+              <a:rPr lang="es-ES" sz="1200" b="0" dirty="0">
+                <a:solidFill>
+                  <a:srgbClr val="CE9178"/>
+                </a:solidFill>
+                <a:effectLst/>
+                <a:latin typeface="Consolas" panose="020B0609020204030204" pitchFamily="49" charset="0"/>
+              </a:rPr>
+              <a:t>"</a:t>
+            </a:r>
+            <a:r>
+              <a:rPr lang="es-ES" sz="1200" b="0" dirty="0" err="1">
+                <a:solidFill>
+                  <a:srgbClr val="CE9178"/>
+                </a:solidFill>
+                <a:effectLst/>
+                <a:latin typeface="Consolas" panose="020B0609020204030204" pitchFamily="49" charset="0"/>
+              </a:rPr>
+              <a:t>coupling</a:t>
+            </a:r>
+            <a:r>
+              <a:rPr lang="es-ES" sz="1200" b="0" dirty="0">
+                <a:solidFill>
+                  <a:srgbClr val="CE9178"/>
+                </a:solidFill>
+                <a:effectLst/>
+                <a:latin typeface="Consolas" panose="020B0609020204030204" pitchFamily="49" charset="0"/>
+              </a:rPr>
+              <a:t>"</a:t>
+            </a:r>
+            <a:r>
+              <a:rPr lang="es-ES" sz="1200" b="0" dirty="0">
+                <a:solidFill>
+                  <a:srgbClr val="CCCCCC"/>
+                </a:solidFill>
+                <a:effectLst/>
+                <a:latin typeface="Consolas" panose="020B0609020204030204" pitchFamily="49" charset="0"/>
+              </a:rPr>
+              <a:t>:</a:t>
+            </a:r>
+            <a:r>
+              <a:rPr lang="es-ES" sz="1200" b="0" dirty="0" err="1">
+                <a:solidFill>
+                  <a:srgbClr val="9CDCFE"/>
+                </a:solidFill>
+                <a:effectLst/>
+                <a:latin typeface="Consolas" panose="020B0609020204030204" pitchFamily="49" charset="0"/>
+              </a:rPr>
+              <a:t>K_b</a:t>
+            </a:r>
+            <a:r>
+              <a:rPr lang="es-ES" sz="1200" b="0" dirty="0">
+                <a:solidFill>
+                  <a:srgbClr val="CCCCCC"/>
+                </a:solidFill>
+                <a:effectLst/>
+                <a:latin typeface="Consolas" panose="020B0609020204030204" pitchFamily="49" charset="0"/>
+              </a:rPr>
+              <a:t>},</a:t>
+            </a:r>
+          </a:p>
+          <a:p>
+            <a:r>
+              <a:rPr lang="es-ES" sz="1200" b="0" dirty="0">
+                <a:solidFill>
+                  <a:srgbClr val="CCCCCC"/>
+                </a:solidFill>
+                <a:effectLst/>
+                <a:latin typeface="Consolas" panose="020B0609020204030204" pitchFamily="49" charset="0"/>
+              </a:rPr>
+              <a:t>            )</a:t>
+            </a:r>
+          </a:p>
+          <a:p>
+            <a:br>
+              <a:rPr lang="es-ES" sz="1200" b="0" dirty="0">
+                <a:solidFill>
+                  <a:srgbClr val="CCCCCC"/>
+                </a:solidFill>
+                <a:effectLst/>
+                <a:latin typeface="Consolas" panose="020B0609020204030204" pitchFamily="49" charset="0"/>
+              </a:rPr>
+            </a:br>
+            <a:r>
+              <a:rPr lang="es-ES" sz="1200" b="0" dirty="0">
+                <a:solidFill>
+                  <a:srgbClr val="9CDCFE"/>
+                </a:solidFill>
+                <a:effectLst/>
+                <a:latin typeface="Consolas" panose="020B0609020204030204" pitchFamily="49" charset="0"/>
+              </a:rPr>
+              <a:t>h00</a:t>
+            </a:r>
+            <a:r>
+              <a:rPr lang="es-ES" sz="1200" b="0" dirty="0">
+                <a:solidFill>
+                  <a:srgbClr val="CCCCCC"/>
+                </a:solidFill>
+                <a:effectLst/>
+                <a:latin typeface="Consolas" panose="020B0609020204030204" pitchFamily="49" charset="0"/>
+              </a:rPr>
+              <a:t> </a:t>
+            </a:r>
+            <a:r>
+              <a:rPr lang="es-ES" sz="1200" b="0" dirty="0">
+                <a:solidFill>
+                  <a:srgbClr val="D4D4D4"/>
+                </a:solidFill>
+                <a:effectLst/>
+                <a:latin typeface="Consolas" panose="020B0609020204030204" pitchFamily="49" charset="0"/>
+              </a:rPr>
+              <a:t>=</a:t>
+            </a:r>
+            <a:r>
+              <a:rPr lang="es-ES" sz="1200" b="0" dirty="0">
+                <a:solidFill>
+                  <a:srgbClr val="CCCCCC"/>
+                </a:solidFill>
+                <a:effectLst/>
+                <a:latin typeface="Consolas" panose="020B0609020204030204" pitchFamily="49" charset="0"/>
+              </a:rPr>
+              <a:t> </a:t>
+            </a:r>
+            <a:r>
+              <a:rPr lang="es-ES" sz="1200" b="0" dirty="0" err="1">
+                <a:solidFill>
+                  <a:srgbClr val="9CDCFE"/>
+                </a:solidFill>
+                <a:effectLst/>
+                <a:latin typeface="Consolas" panose="020B0609020204030204" pitchFamily="49" charset="0"/>
+              </a:rPr>
+              <a:t>mzi_test</a:t>
+            </a:r>
+            <a:r>
+              <a:rPr lang="es-ES" sz="1200" b="0" dirty="0">
+                <a:solidFill>
+                  <a:srgbClr val="CCCCCC"/>
+                </a:solidFill>
+                <a:effectLst/>
+                <a:latin typeface="Consolas" panose="020B0609020204030204" pitchFamily="49" charset="0"/>
+              </a:rPr>
+              <a:t>[</a:t>
+            </a:r>
+            <a:r>
+              <a:rPr lang="es-ES" sz="1200" b="0" dirty="0">
+                <a:solidFill>
+                  <a:srgbClr val="CE9178"/>
+                </a:solidFill>
+                <a:effectLst/>
+                <a:latin typeface="Consolas" panose="020B0609020204030204" pitchFamily="49" charset="0"/>
+              </a:rPr>
+              <a:t>"in0"</a:t>
+            </a:r>
+            <a:r>
+              <a:rPr lang="es-ES" sz="1200" b="0" dirty="0">
+                <a:solidFill>
+                  <a:srgbClr val="CCCCCC"/>
+                </a:solidFill>
+                <a:effectLst/>
+                <a:latin typeface="Consolas" panose="020B0609020204030204" pitchFamily="49" charset="0"/>
+              </a:rPr>
+              <a:t>, </a:t>
+            </a:r>
+            <a:r>
+              <a:rPr lang="es-ES" sz="1200" b="0" dirty="0">
+                <a:solidFill>
+                  <a:srgbClr val="CE9178"/>
+                </a:solidFill>
+                <a:effectLst/>
+                <a:latin typeface="Consolas" panose="020B0609020204030204" pitchFamily="49" charset="0"/>
+              </a:rPr>
+              <a:t>"out0"</a:t>
+            </a:r>
+            <a:r>
+              <a:rPr lang="es-ES" sz="1200" b="0" dirty="0">
+                <a:solidFill>
+                  <a:srgbClr val="CCCCCC"/>
+                </a:solidFill>
+                <a:effectLst/>
+                <a:latin typeface="Consolas" panose="020B0609020204030204" pitchFamily="49" charset="0"/>
+              </a:rPr>
+              <a:t>]</a:t>
+            </a:r>
+          </a:p>
+          <a:p>
+            <a:r>
+              <a:rPr lang="es-ES" sz="1200" b="0" dirty="0">
+                <a:solidFill>
+                  <a:srgbClr val="9CDCFE"/>
+                </a:solidFill>
+                <a:effectLst/>
+                <a:latin typeface="Consolas" panose="020B0609020204030204" pitchFamily="49" charset="0"/>
+              </a:rPr>
+              <a:t>h01</a:t>
+            </a:r>
+            <a:r>
+              <a:rPr lang="es-ES" sz="1200" b="0" dirty="0">
+                <a:solidFill>
+                  <a:srgbClr val="CCCCCC"/>
+                </a:solidFill>
+                <a:effectLst/>
+                <a:latin typeface="Consolas" panose="020B0609020204030204" pitchFamily="49" charset="0"/>
+              </a:rPr>
+              <a:t> </a:t>
+            </a:r>
+            <a:r>
+              <a:rPr lang="es-ES" sz="1200" b="0" dirty="0">
+                <a:solidFill>
+                  <a:srgbClr val="D4D4D4"/>
+                </a:solidFill>
+                <a:effectLst/>
+                <a:latin typeface="Consolas" panose="020B0609020204030204" pitchFamily="49" charset="0"/>
+              </a:rPr>
+              <a:t>=</a:t>
+            </a:r>
+            <a:r>
+              <a:rPr lang="es-ES" sz="1200" b="0" dirty="0">
+                <a:solidFill>
+                  <a:srgbClr val="CCCCCC"/>
+                </a:solidFill>
+                <a:effectLst/>
+                <a:latin typeface="Consolas" panose="020B0609020204030204" pitchFamily="49" charset="0"/>
+              </a:rPr>
+              <a:t> </a:t>
+            </a:r>
+            <a:r>
+              <a:rPr lang="es-ES" sz="1200" b="0" dirty="0" err="1">
+                <a:solidFill>
+                  <a:srgbClr val="9CDCFE"/>
+                </a:solidFill>
+                <a:effectLst/>
+                <a:latin typeface="Consolas" panose="020B0609020204030204" pitchFamily="49" charset="0"/>
+              </a:rPr>
+              <a:t>mzi_test</a:t>
+            </a:r>
+            <a:r>
+              <a:rPr lang="es-ES" sz="1200" b="0" dirty="0">
+                <a:solidFill>
+                  <a:srgbClr val="CCCCCC"/>
+                </a:solidFill>
+                <a:effectLst/>
+                <a:latin typeface="Consolas" panose="020B0609020204030204" pitchFamily="49" charset="0"/>
+              </a:rPr>
+              <a:t>[</a:t>
+            </a:r>
+            <a:r>
+              <a:rPr lang="es-ES" sz="1200" b="0" dirty="0">
+                <a:solidFill>
+                  <a:srgbClr val="CE9178"/>
+                </a:solidFill>
+                <a:effectLst/>
+                <a:latin typeface="Consolas" panose="020B0609020204030204" pitchFamily="49" charset="0"/>
+              </a:rPr>
+              <a:t>"in0"</a:t>
+            </a:r>
+            <a:r>
+              <a:rPr lang="es-ES" sz="1200" b="0" dirty="0">
+                <a:solidFill>
+                  <a:srgbClr val="CCCCCC"/>
+                </a:solidFill>
+                <a:effectLst/>
+                <a:latin typeface="Consolas" panose="020B0609020204030204" pitchFamily="49" charset="0"/>
+              </a:rPr>
+              <a:t>, </a:t>
+            </a:r>
+            <a:r>
+              <a:rPr lang="es-ES" sz="1200" b="0" dirty="0">
+                <a:solidFill>
+                  <a:srgbClr val="CE9178"/>
+                </a:solidFill>
+                <a:effectLst/>
+                <a:latin typeface="Consolas" panose="020B0609020204030204" pitchFamily="49" charset="0"/>
+              </a:rPr>
+              <a:t>"out1"</a:t>
+            </a:r>
+            <a:r>
+              <a:rPr lang="es-ES" sz="1200" b="0" dirty="0">
+                <a:solidFill>
+                  <a:srgbClr val="CCCCCC"/>
+                </a:solidFill>
+                <a:effectLst/>
+                <a:latin typeface="Consolas" panose="020B0609020204030204" pitchFamily="49" charset="0"/>
+              </a:rPr>
+              <a:t>]</a:t>
+            </a:r>
+          </a:p>
+          <a:p>
+            <a:r>
+              <a:rPr lang="es-ES" sz="1200" b="0" dirty="0">
+                <a:solidFill>
+                  <a:srgbClr val="9CDCFE"/>
+                </a:solidFill>
+                <a:effectLst/>
+                <a:latin typeface="Consolas" panose="020B0609020204030204" pitchFamily="49" charset="0"/>
+              </a:rPr>
+              <a:t>h11</a:t>
+            </a:r>
+            <a:r>
+              <a:rPr lang="es-ES" sz="1200" b="0" dirty="0">
+                <a:solidFill>
+                  <a:srgbClr val="CCCCCC"/>
+                </a:solidFill>
+                <a:effectLst/>
+                <a:latin typeface="Consolas" panose="020B0609020204030204" pitchFamily="49" charset="0"/>
+              </a:rPr>
+              <a:t> </a:t>
+            </a:r>
+            <a:r>
+              <a:rPr lang="es-ES" sz="1200" b="0" dirty="0">
+                <a:solidFill>
+                  <a:srgbClr val="D4D4D4"/>
+                </a:solidFill>
+                <a:effectLst/>
+                <a:latin typeface="Consolas" panose="020B0609020204030204" pitchFamily="49" charset="0"/>
+              </a:rPr>
+              <a:t>=</a:t>
+            </a:r>
+            <a:r>
+              <a:rPr lang="es-ES" sz="1200" b="0" dirty="0">
+                <a:solidFill>
+                  <a:srgbClr val="CCCCCC"/>
+                </a:solidFill>
+                <a:effectLst/>
+                <a:latin typeface="Consolas" panose="020B0609020204030204" pitchFamily="49" charset="0"/>
+              </a:rPr>
+              <a:t> </a:t>
+            </a:r>
+            <a:r>
+              <a:rPr lang="es-ES" sz="1200" b="0" dirty="0" err="1">
+                <a:solidFill>
+                  <a:srgbClr val="9CDCFE"/>
+                </a:solidFill>
+                <a:effectLst/>
+                <a:latin typeface="Consolas" panose="020B0609020204030204" pitchFamily="49" charset="0"/>
+              </a:rPr>
+              <a:t>mzi_test</a:t>
+            </a:r>
+            <a:r>
+              <a:rPr lang="es-ES" sz="1200" b="0" dirty="0">
+                <a:solidFill>
+                  <a:srgbClr val="CCCCCC"/>
+                </a:solidFill>
+                <a:effectLst/>
+                <a:latin typeface="Consolas" panose="020B0609020204030204" pitchFamily="49" charset="0"/>
+              </a:rPr>
+              <a:t>[</a:t>
+            </a:r>
+            <a:r>
+              <a:rPr lang="es-ES" sz="1200" b="0" dirty="0">
+                <a:solidFill>
+                  <a:srgbClr val="CE9178"/>
+                </a:solidFill>
+                <a:effectLst/>
+                <a:latin typeface="Consolas" panose="020B0609020204030204" pitchFamily="49" charset="0"/>
+              </a:rPr>
+              <a:t>"in1"</a:t>
+            </a:r>
+            <a:r>
+              <a:rPr lang="es-ES" sz="1200" b="0" dirty="0">
+                <a:solidFill>
+                  <a:srgbClr val="CCCCCC"/>
+                </a:solidFill>
+                <a:effectLst/>
+                <a:latin typeface="Consolas" panose="020B0609020204030204" pitchFamily="49" charset="0"/>
+              </a:rPr>
+              <a:t>, </a:t>
+            </a:r>
+            <a:r>
+              <a:rPr lang="es-ES" sz="1200" b="0" dirty="0">
+                <a:solidFill>
+                  <a:srgbClr val="CE9178"/>
+                </a:solidFill>
+                <a:effectLst/>
+                <a:latin typeface="Consolas" panose="020B0609020204030204" pitchFamily="49" charset="0"/>
+              </a:rPr>
+              <a:t>"out1"</a:t>
+            </a:r>
+            <a:r>
+              <a:rPr lang="es-ES" sz="1200" b="0" dirty="0">
+                <a:solidFill>
+                  <a:srgbClr val="CCCCCC"/>
+                </a:solidFill>
+                <a:effectLst/>
+                <a:latin typeface="Consolas" panose="020B0609020204030204" pitchFamily="49" charset="0"/>
+              </a:rPr>
+              <a:t>]</a:t>
+            </a:r>
+          </a:p>
+          <a:p>
+            <a:r>
+              <a:rPr lang="es-ES" sz="1200" b="0" dirty="0">
+                <a:solidFill>
+                  <a:srgbClr val="9CDCFE"/>
+                </a:solidFill>
+                <a:effectLst/>
+                <a:latin typeface="Consolas" panose="020B0609020204030204" pitchFamily="49" charset="0"/>
+              </a:rPr>
+              <a:t>h10</a:t>
+            </a:r>
+            <a:r>
+              <a:rPr lang="es-ES" sz="1200" b="0" dirty="0">
+                <a:solidFill>
+                  <a:srgbClr val="CCCCCC"/>
+                </a:solidFill>
+                <a:effectLst/>
+                <a:latin typeface="Consolas" panose="020B0609020204030204" pitchFamily="49" charset="0"/>
+              </a:rPr>
+              <a:t> </a:t>
+            </a:r>
+            <a:r>
+              <a:rPr lang="es-ES" sz="1200" b="0" dirty="0">
+                <a:solidFill>
+                  <a:srgbClr val="D4D4D4"/>
+                </a:solidFill>
+                <a:effectLst/>
+                <a:latin typeface="Consolas" panose="020B0609020204030204" pitchFamily="49" charset="0"/>
+              </a:rPr>
+              <a:t>=</a:t>
+            </a:r>
+            <a:r>
+              <a:rPr lang="es-ES" sz="1200" b="0" dirty="0">
+                <a:solidFill>
+                  <a:srgbClr val="CCCCCC"/>
+                </a:solidFill>
+                <a:effectLst/>
+                <a:latin typeface="Consolas" panose="020B0609020204030204" pitchFamily="49" charset="0"/>
+              </a:rPr>
+              <a:t> </a:t>
+            </a:r>
+            <a:r>
+              <a:rPr lang="es-ES" sz="1200" b="0" dirty="0" err="1">
+                <a:solidFill>
+                  <a:srgbClr val="9CDCFE"/>
+                </a:solidFill>
+                <a:effectLst/>
+                <a:latin typeface="Consolas" panose="020B0609020204030204" pitchFamily="49" charset="0"/>
+              </a:rPr>
+              <a:t>mzi_test</a:t>
+            </a:r>
+            <a:r>
+              <a:rPr lang="es-ES" sz="1200" b="0" dirty="0">
+                <a:solidFill>
+                  <a:srgbClr val="CCCCCC"/>
+                </a:solidFill>
+                <a:effectLst/>
+                <a:latin typeface="Consolas" panose="020B0609020204030204" pitchFamily="49" charset="0"/>
+              </a:rPr>
+              <a:t>[</a:t>
+            </a:r>
+            <a:r>
+              <a:rPr lang="es-ES" sz="1200" b="0" dirty="0">
+                <a:solidFill>
+                  <a:srgbClr val="CE9178"/>
+                </a:solidFill>
+                <a:effectLst/>
+                <a:latin typeface="Consolas" panose="020B0609020204030204" pitchFamily="49" charset="0"/>
+              </a:rPr>
+              <a:t>"in1"</a:t>
+            </a:r>
+            <a:r>
+              <a:rPr lang="es-ES" sz="1200" b="0" dirty="0">
+                <a:solidFill>
+                  <a:srgbClr val="CCCCCC"/>
+                </a:solidFill>
+                <a:effectLst/>
+                <a:latin typeface="Consolas" panose="020B0609020204030204" pitchFamily="49" charset="0"/>
+              </a:rPr>
+              <a:t>, </a:t>
+            </a:r>
+            <a:r>
+              <a:rPr lang="es-ES" sz="1200" b="0" dirty="0">
+                <a:solidFill>
+                  <a:srgbClr val="CE9178"/>
+                </a:solidFill>
+                <a:effectLst/>
+                <a:latin typeface="Consolas" panose="020B0609020204030204" pitchFamily="49" charset="0"/>
+              </a:rPr>
+              <a:t>"out0"</a:t>
+            </a:r>
+            <a:r>
+              <a:rPr lang="es-ES" sz="1200" b="0" dirty="0">
+                <a:solidFill>
+                  <a:srgbClr val="CCCCCC"/>
+                </a:solidFill>
+                <a:effectLst/>
+                <a:latin typeface="Consolas" panose="020B0609020204030204" pitchFamily="49" charset="0"/>
+              </a:rPr>
+              <a:t>]</a:t>
+            </a:r>
           </a:p>
           <a:p>
             <a:pPr algn="just"/>
@@ -7418,6 +11306,759 @@
 </file>
 
 <file path=ppt/slides/slide8.xml><?xml version="1.0" encoding="utf-8"?>
+<p:sld xmlns:a="http://schemas.openxmlformats.org/drawingml/2006/main" xmlns:r="http://schemas.openxmlformats.org/officeDocument/2006/relationships" xmlns:p="http://schemas.openxmlformats.org/presentationml/2006/main">
+  <p:cSld>
+    <p:spTree>
+      <p:nvGrpSpPr>
+        <p:cNvPr id="1" name=""/>
+        <p:cNvGrpSpPr/>
+        <p:nvPr/>
+      </p:nvGrpSpPr>
+      <p:grpSpPr>
+        <a:xfrm>
+          <a:off x="0" y="0"/>
+          <a:ext cx="0" cy="0"/>
+          <a:chOff x="0" y="0"/>
+          <a:chExt cx="0" cy="0"/>
+        </a:xfrm>
+      </p:grpSpPr>
+      <p:sp>
+        <p:nvSpPr>
+          <p:cNvPr id="4" name="Marcador de pie de página 3">
+            <a:extLst>
+              <a:ext uri="{FF2B5EF4-FFF2-40B4-BE49-F238E27FC236}">
+                <a16:creationId xmlns:a16="http://schemas.microsoft.com/office/drawing/2014/main" id="{B2B72E1B-7D45-48FF-AE50-C8CD761A22C4}"/>
+              </a:ext>
+            </a:extLst>
+          </p:cNvPr>
+          <p:cNvSpPr>
+            <a:spLocks noGrp="1"/>
+          </p:cNvSpPr>
+          <p:nvPr>
+            <p:ph type="ftr" sz="quarter" idx="5"/>
+          </p:nvPr>
+        </p:nvSpPr>
+        <p:spPr/>
+        <p:txBody>
+          <a:bodyPr/>
+          <a:lstStyle/>
+          <a:p>
+            <a:pPr marL="12700">
+              <a:spcBef>
+                <a:spcPts val="15"/>
+              </a:spcBef>
+            </a:pPr>
+            <a:r>
+              <a:rPr lang="es-ES" spc="-5"/>
+              <a:t>LAB 3. INTERFEROMETERS I</a:t>
+            </a:r>
+            <a:endParaRPr lang="es-ES" spc="-5" dirty="0"/>
+          </a:p>
+        </p:txBody>
+      </p:sp>
+      <p:sp>
+        <p:nvSpPr>
+          <p:cNvPr id="5" name="Marcador de número de diapositiva 4">
+            <a:extLst>
+              <a:ext uri="{FF2B5EF4-FFF2-40B4-BE49-F238E27FC236}">
+                <a16:creationId xmlns:a16="http://schemas.microsoft.com/office/drawing/2014/main" id="{C3AA77A3-F46B-4D50-8258-D743E7966D1F}"/>
+              </a:ext>
+            </a:extLst>
+          </p:cNvPr>
+          <p:cNvSpPr>
+            <a:spLocks noGrp="1"/>
+          </p:cNvSpPr>
+          <p:nvPr>
+            <p:ph type="sldNum" sz="quarter" idx="7"/>
+          </p:nvPr>
+        </p:nvSpPr>
+        <p:spPr/>
+        <p:txBody>
+          <a:bodyPr/>
+          <a:lstStyle/>
+          <a:p>
+            <a:fld id="{B6F15528-21DE-4FAA-801E-634DDDAF4B2B}" type="slidenum">
+              <a:rPr lang="es-ES" smtClean="0"/>
+              <a:t>8</a:t>
+            </a:fld>
+            <a:endParaRPr lang="es-ES"/>
+          </a:p>
+        </p:txBody>
+      </p:sp>
+      <p:sp>
+        <p:nvSpPr>
+          <p:cNvPr id="6" name="CuadroTexto 5">
+            <a:extLst>
+              <a:ext uri="{FF2B5EF4-FFF2-40B4-BE49-F238E27FC236}">
+                <a16:creationId xmlns:a16="http://schemas.microsoft.com/office/drawing/2014/main" id="{6E5099C5-2AF3-4AE8-A21A-F5D37D3023C3}"/>
+              </a:ext>
+            </a:extLst>
+          </p:cNvPr>
+          <p:cNvSpPr txBox="1"/>
+          <p:nvPr/>
+        </p:nvSpPr>
+        <p:spPr>
+          <a:xfrm>
+            <a:off x="6781800" y="1066800"/>
+            <a:ext cx="3766238" cy="1200329"/>
+          </a:xfrm>
+          <a:prstGeom prst="rect">
+            <a:avLst/>
+          </a:prstGeom>
+          <a:solidFill>
+            <a:schemeClr val="bg1">
+              <a:lumMod val="95000"/>
+            </a:schemeClr>
+          </a:solidFill>
+          <a:ln w="28575">
+            <a:solidFill>
+              <a:srgbClr val="E0700D"/>
+            </a:solidFill>
+          </a:ln>
+        </p:spPr>
+        <p:txBody>
+          <a:bodyPr wrap="square" rtlCol="0">
+            <a:spAutoFit/>
+          </a:bodyPr>
+          <a:lstStyle/>
+          <a:p>
+            <a:pPr algn="just"/>
+            <a:endParaRPr lang="en-US" sz="1200" dirty="0">
+              <a:latin typeface="Arial" panose="020B0604020202020204" pitchFamily="34" charset="0"/>
+              <a:cs typeface="Arial" panose="020B0604020202020204" pitchFamily="34" charset="0"/>
+            </a:endParaRPr>
+          </a:p>
+          <a:p>
+            <a:pPr algn="just"/>
+            <a:r>
+              <a:rPr lang="en-US" sz="1200" dirty="0">
+                <a:latin typeface="Arial" panose="020B0604020202020204" pitchFamily="34" charset="0"/>
+                <a:cs typeface="Arial" panose="020B0604020202020204" pitchFamily="34" charset="0"/>
+              </a:rPr>
+              <a:t>Al </a:t>
+            </a:r>
+            <a:r>
+              <a:rPr lang="en-US" sz="1200" dirty="0" err="1">
+                <a:latin typeface="Arial" panose="020B0604020202020204" pitchFamily="34" charset="0"/>
+                <a:cs typeface="Arial" panose="020B0604020202020204" pitchFamily="34" charset="0"/>
+              </a:rPr>
+              <a:t>simular</a:t>
+            </a:r>
+            <a:r>
+              <a:rPr lang="en-US" sz="1200" dirty="0">
+                <a:latin typeface="Arial" panose="020B0604020202020204" pitchFamily="34" charset="0"/>
+                <a:cs typeface="Arial" panose="020B0604020202020204" pitchFamily="34" charset="0"/>
+              </a:rPr>
+              <a:t> los </a:t>
+            </a:r>
+            <a:r>
+              <a:rPr lang="en-US" sz="1200" dirty="0" err="1">
+                <a:latin typeface="Arial" panose="020B0604020202020204" pitchFamily="34" charset="0"/>
+                <a:cs typeface="Arial" panose="020B0604020202020204" pitchFamily="34" charset="0"/>
+              </a:rPr>
+              <a:t>mismos</a:t>
+            </a:r>
+            <a:r>
+              <a:rPr lang="en-US" sz="1200" dirty="0">
+                <a:latin typeface="Arial" panose="020B0604020202020204" pitchFamily="34" charset="0"/>
+                <a:cs typeface="Arial" panose="020B0604020202020204" pitchFamily="34" charset="0"/>
+              </a:rPr>
+              <a:t> </a:t>
+            </a:r>
+            <a:r>
+              <a:rPr lang="en-US" sz="1200" dirty="0" err="1">
+                <a:latin typeface="Arial" panose="020B0604020202020204" pitchFamily="34" charset="0"/>
+                <a:cs typeface="Arial" panose="020B0604020202020204" pitchFamily="34" charset="0"/>
+              </a:rPr>
+              <a:t>casos</a:t>
+            </a:r>
+            <a:r>
+              <a:rPr lang="en-US" sz="1200" dirty="0">
+                <a:latin typeface="Arial" panose="020B0604020202020204" pitchFamily="34" charset="0"/>
+                <a:cs typeface="Arial" panose="020B0604020202020204" pitchFamily="34" charset="0"/>
+              </a:rPr>
+              <a:t> con </a:t>
+            </a:r>
+            <a:r>
+              <a:rPr lang="en-US" sz="1200" dirty="0" err="1">
+                <a:latin typeface="Arial" panose="020B0604020202020204" pitchFamily="34" charset="0"/>
+                <a:cs typeface="Arial" panose="020B0604020202020204" pitchFamily="34" charset="0"/>
+              </a:rPr>
+              <a:t>el</a:t>
+            </a:r>
+            <a:r>
+              <a:rPr lang="en-US" sz="1200" dirty="0">
+                <a:latin typeface="Arial" panose="020B0604020202020204" pitchFamily="34" charset="0"/>
+                <a:cs typeface="Arial" panose="020B0604020202020204" pitchFamily="34" charset="0"/>
+              </a:rPr>
+              <a:t> </a:t>
+            </a:r>
+            <a:r>
+              <a:rPr lang="en-US" sz="1200" dirty="0" err="1">
+                <a:latin typeface="Arial" panose="020B0604020202020204" pitchFamily="34" charset="0"/>
+                <a:cs typeface="Arial" panose="020B0604020202020204" pitchFamily="34" charset="0"/>
+              </a:rPr>
+              <a:t>método</a:t>
+            </a:r>
+            <a:r>
+              <a:rPr lang="en-US" sz="1200" dirty="0">
+                <a:latin typeface="Arial" panose="020B0604020202020204" pitchFamily="34" charset="0"/>
+                <a:cs typeface="Arial" panose="020B0604020202020204" pitchFamily="34" charset="0"/>
+              </a:rPr>
+              <a:t> SAX </a:t>
+            </a:r>
+            <a:r>
+              <a:rPr lang="en-US" sz="1200" dirty="0" err="1">
+                <a:latin typeface="Arial" panose="020B0604020202020204" pitchFamily="34" charset="0"/>
+                <a:cs typeface="Arial" panose="020B0604020202020204" pitchFamily="34" charset="0"/>
+              </a:rPr>
+              <a:t>observamos</a:t>
+            </a:r>
+            <a:r>
+              <a:rPr lang="en-US" sz="1200" dirty="0">
+                <a:latin typeface="Arial" panose="020B0604020202020204" pitchFamily="34" charset="0"/>
+                <a:cs typeface="Arial" panose="020B0604020202020204" pitchFamily="34" charset="0"/>
+              </a:rPr>
+              <a:t> que </a:t>
+            </a:r>
+            <a:r>
+              <a:rPr lang="en-US" sz="1200" dirty="0" err="1">
+                <a:latin typeface="Arial" panose="020B0604020202020204" pitchFamily="34" charset="0"/>
+                <a:cs typeface="Arial" panose="020B0604020202020204" pitchFamily="34" charset="0"/>
+              </a:rPr>
+              <a:t>obtenemos</a:t>
+            </a:r>
+            <a:r>
+              <a:rPr lang="en-US" sz="1200" dirty="0">
+                <a:latin typeface="Arial" panose="020B0604020202020204" pitchFamily="34" charset="0"/>
+                <a:cs typeface="Arial" panose="020B0604020202020204" pitchFamily="34" charset="0"/>
+              </a:rPr>
+              <a:t> </a:t>
+            </a:r>
+            <a:r>
+              <a:rPr lang="en-US" sz="1200" dirty="0" err="1">
+                <a:latin typeface="Arial" panose="020B0604020202020204" pitchFamily="34" charset="0"/>
+                <a:cs typeface="Arial" panose="020B0604020202020204" pitchFamily="34" charset="0"/>
+              </a:rPr>
+              <a:t>unos</a:t>
+            </a:r>
+            <a:r>
+              <a:rPr lang="en-US" sz="1200" dirty="0">
+                <a:latin typeface="Arial" panose="020B0604020202020204" pitchFamily="34" charset="0"/>
+                <a:cs typeface="Arial" panose="020B0604020202020204" pitchFamily="34" charset="0"/>
+              </a:rPr>
+              <a:t> </a:t>
+            </a:r>
+            <a:r>
+              <a:rPr lang="en-US" sz="1200" dirty="0" err="1">
+                <a:latin typeface="Arial" panose="020B0604020202020204" pitchFamily="34" charset="0"/>
+                <a:cs typeface="Arial" panose="020B0604020202020204" pitchFamily="34" charset="0"/>
+              </a:rPr>
+              <a:t>resultados</a:t>
+            </a:r>
+            <a:r>
+              <a:rPr lang="en-US" sz="1200" dirty="0">
+                <a:latin typeface="Arial" panose="020B0604020202020204" pitchFamily="34" charset="0"/>
+                <a:cs typeface="Arial" panose="020B0604020202020204" pitchFamily="34" charset="0"/>
+              </a:rPr>
+              <a:t> </a:t>
+            </a:r>
+            <a:r>
+              <a:rPr lang="en-US" sz="1200" dirty="0" err="1">
+                <a:latin typeface="Arial" panose="020B0604020202020204" pitchFamily="34" charset="0"/>
+                <a:cs typeface="Arial" panose="020B0604020202020204" pitchFamily="34" charset="0"/>
+              </a:rPr>
+              <a:t>idénticos</a:t>
+            </a:r>
+            <a:r>
+              <a:rPr lang="en-US" sz="1200" dirty="0">
+                <a:latin typeface="Arial" panose="020B0604020202020204" pitchFamily="34" charset="0"/>
+                <a:cs typeface="Arial" panose="020B0604020202020204" pitchFamily="34" charset="0"/>
+              </a:rPr>
+              <a:t> a los que </a:t>
+            </a:r>
+            <a:r>
+              <a:rPr lang="en-US" sz="1200" dirty="0" err="1">
+                <a:latin typeface="Arial" panose="020B0604020202020204" pitchFamily="34" charset="0"/>
+                <a:cs typeface="Arial" panose="020B0604020202020204" pitchFamily="34" charset="0"/>
+              </a:rPr>
+              <a:t>teníamos</a:t>
+            </a:r>
+            <a:r>
+              <a:rPr lang="en-US" sz="1200" dirty="0">
+                <a:latin typeface="Arial" panose="020B0604020202020204" pitchFamily="34" charset="0"/>
+                <a:cs typeface="Arial" panose="020B0604020202020204" pitchFamily="34" charset="0"/>
+              </a:rPr>
+              <a:t> </a:t>
+            </a:r>
+            <a:r>
+              <a:rPr lang="en-US" sz="1200" dirty="0" err="1">
+                <a:latin typeface="Arial" panose="020B0604020202020204" pitchFamily="34" charset="0"/>
+                <a:cs typeface="Arial" panose="020B0604020202020204" pitchFamily="34" charset="0"/>
+              </a:rPr>
+              <a:t>previamente</a:t>
+            </a:r>
+            <a:r>
+              <a:rPr lang="en-US" sz="1200" dirty="0">
+                <a:latin typeface="Arial" panose="020B0604020202020204" pitchFamily="34" charset="0"/>
+                <a:cs typeface="Arial" panose="020B0604020202020204" pitchFamily="34" charset="0"/>
+              </a:rPr>
+              <a:t> </a:t>
+            </a:r>
+            <a:r>
+              <a:rPr lang="en-US" sz="1200" dirty="0" err="1">
+                <a:latin typeface="Arial" panose="020B0604020202020204" pitchFamily="34" charset="0"/>
+                <a:cs typeface="Arial" panose="020B0604020202020204" pitchFamily="34" charset="0"/>
+              </a:rPr>
+              <a:t>en</a:t>
+            </a:r>
+            <a:r>
+              <a:rPr lang="en-US" sz="1200" dirty="0">
+                <a:latin typeface="Arial" panose="020B0604020202020204" pitchFamily="34" charset="0"/>
+                <a:cs typeface="Arial" panose="020B0604020202020204" pitchFamily="34" charset="0"/>
+              </a:rPr>
+              <a:t> </a:t>
+            </a:r>
+            <a:r>
+              <a:rPr lang="en-US" sz="1200" dirty="0" err="1">
+                <a:latin typeface="Arial" panose="020B0604020202020204" pitchFamily="34" charset="0"/>
+                <a:cs typeface="Arial" panose="020B0604020202020204" pitchFamily="34" charset="0"/>
+              </a:rPr>
+              <a:t>todas</a:t>
+            </a:r>
+            <a:r>
+              <a:rPr lang="en-US" sz="1200" dirty="0">
+                <a:latin typeface="Arial" panose="020B0604020202020204" pitchFamily="34" charset="0"/>
+                <a:cs typeface="Arial" panose="020B0604020202020204" pitchFamily="34" charset="0"/>
+              </a:rPr>
+              <a:t> las </a:t>
+            </a:r>
+            <a:r>
+              <a:rPr lang="en-US" sz="1200" dirty="0" err="1">
+                <a:latin typeface="Arial" panose="020B0604020202020204" pitchFamily="34" charset="0"/>
+                <a:cs typeface="Arial" panose="020B0604020202020204" pitchFamily="34" charset="0"/>
+              </a:rPr>
+              <a:t>configuraciones</a:t>
+            </a:r>
+            <a:r>
+              <a:rPr lang="en-US" sz="1200" dirty="0">
+                <a:latin typeface="Arial" panose="020B0604020202020204" pitchFamily="34" charset="0"/>
+                <a:cs typeface="Arial" panose="020B0604020202020204" pitchFamily="34" charset="0"/>
+              </a:rPr>
+              <a:t>.</a:t>
+            </a:r>
+          </a:p>
+          <a:p>
+            <a:pPr algn="just"/>
+            <a:endParaRPr lang="en-US" sz="1200" dirty="0">
+              <a:latin typeface="Arial" panose="020B0604020202020204" pitchFamily="34" charset="0"/>
+              <a:cs typeface="Arial" panose="020B0604020202020204" pitchFamily="34" charset="0"/>
+            </a:endParaRPr>
+          </a:p>
+        </p:txBody>
+      </p:sp>
+      <p:pic>
+        <p:nvPicPr>
+          <p:cNvPr id="7" name="Imagen 6">
+            <a:extLst>
+              <a:ext uri="{FF2B5EF4-FFF2-40B4-BE49-F238E27FC236}">
+                <a16:creationId xmlns:a16="http://schemas.microsoft.com/office/drawing/2014/main" id="{A29240BC-B381-4509-8F03-B57696D3E8A3}"/>
+              </a:ext>
+            </a:extLst>
+          </p:cNvPr>
+          <p:cNvPicPr>
+            <a:picLocks noChangeAspect="1"/>
+          </p:cNvPicPr>
+          <p:nvPr/>
+        </p:nvPicPr>
+        <p:blipFill>
+          <a:blip r:embed="rId2"/>
+          <a:stretch>
+            <a:fillRect/>
+          </a:stretch>
+        </p:blipFill>
+        <p:spPr>
+          <a:xfrm>
+            <a:off x="533400" y="838199"/>
+            <a:ext cx="2514600" cy="2017889"/>
+          </a:xfrm>
+          <a:prstGeom prst="rect">
+            <a:avLst/>
+          </a:prstGeom>
+        </p:spPr>
+      </p:pic>
+      <p:sp>
+        <p:nvSpPr>
+          <p:cNvPr id="8" name="Título 1">
+            <a:extLst>
+              <a:ext uri="{FF2B5EF4-FFF2-40B4-BE49-F238E27FC236}">
+                <a16:creationId xmlns:a16="http://schemas.microsoft.com/office/drawing/2014/main" id="{89D50513-4603-4170-A248-5E51BB986914}"/>
+              </a:ext>
+            </a:extLst>
+          </p:cNvPr>
+          <p:cNvSpPr txBox="1">
+            <a:spLocks/>
+          </p:cNvSpPr>
+          <p:nvPr/>
+        </p:nvSpPr>
+        <p:spPr>
+          <a:xfrm>
+            <a:off x="533400" y="381000"/>
+            <a:ext cx="10991850" cy="307777"/>
+          </a:xfrm>
+          <a:prstGeom prst="rect">
+            <a:avLst/>
+          </a:prstGeom>
+        </p:spPr>
+        <p:txBody>
+          <a:bodyPr wrap="square" lIns="0" tIns="0" rIns="0" bIns="0">
+            <a:spAutoFit/>
+          </a:bodyPr>
+          <a:lstStyle>
+            <a:lvl1pPr>
+              <a:defRPr sz="2000" b="1" i="0">
+                <a:solidFill>
+                  <a:schemeClr val="tx1"/>
+                </a:solidFill>
+                <a:latin typeface="Calibri"/>
+                <a:ea typeface="+mj-ea"/>
+                <a:cs typeface="Calibri"/>
+              </a:defRPr>
+            </a:lvl1pPr>
+          </a:lstStyle>
+          <a:p>
+            <a:r>
+              <a:rPr lang="es-ES" kern="0" dirty="0"/>
+              <a:t>3.1. </a:t>
+            </a:r>
+            <a:r>
+              <a:rPr lang="es-ES" kern="0" dirty="0" err="1"/>
+              <a:t>Balanced</a:t>
+            </a:r>
+            <a:r>
+              <a:rPr lang="es-ES" kern="0" dirty="0"/>
+              <a:t> </a:t>
+            </a:r>
+            <a:r>
+              <a:rPr lang="es-ES" kern="0" dirty="0" err="1"/>
+              <a:t>configuration</a:t>
+            </a:r>
+            <a:r>
+              <a:rPr lang="es-ES" kern="0" dirty="0"/>
+              <a:t>: </a:t>
+            </a:r>
+          </a:p>
+        </p:txBody>
+      </p:sp>
+      <p:sp>
+        <p:nvSpPr>
+          <p:cNvPr id="9" name="Título 1">
+            <a:extLst>
+              <a:ext uri="{FF2B5EF4-FFF2-40B4-BE49-F238E27FC236}">
+                <a16:creationId xmlns:a16="http://schemas.microsoft.com/office/drawing/2014/main" id="{7DC12811-1E6C-457A-AEBA-F7118429AAFA}"/>
+              </a:ext>
+            </a:extLst>
+          </p:cNvPr>
+          <p:cNvSpPr>
+            <a:spLocks noGrp="1"/>
+          </p:cNvSpPr>
+          <p:nvPr>
+            <p:ph type="title"/>
+          </p:nvPr>
+        </p:nvSpPr>
+        <p:spPr>
+          <a:xfrm>
+            <a:off x="341326" y="3083339"/>
+            <a:ext cx="10991850" cy="307777"/>
+          </a:xfrm>
+        </p:spPr>
+        <p:txBody>
+          <a:bodyPr/>
+          <a:lstStyle/>
+          <a:p>
+            <a:r>
+              <a:rPr lang="es-ES" dirty="0"/>
+              <a:t>3.2. </a:t>
+            </a:r>
+            <a:r>
+              <a:rPr lang="es-ES" dirty="0" err="1"/>
+              <a:t>Unbalanced</a:t>
+            </a:r>
+            <a:r>
+              <a:rPr lang="es-ES" dirty="0"/>
+              <a:t> </a:t>
+            </a:r>
+            <a:r>
+              <a:rPr lang="es-ES" dirty="0" err="1"/>
+              <a:t>configurations</a:t>
+            </a:r>
+            <a:r>
+              <a:rPr lang="es-ES" dirty="0"/>
+              <a:t>: </a:t>
+            </a:r>
+          </a:p>
+        </p:txBody>
+      </p:sp>
+      <p:pic>
+        <p:nvPicPr>
+          <p:cNvPr id="10" name="Imagen 9">
+            <a:extLst>
+              <a:ext uri="{FF2B5EF4-FFF2-40B4-BE49-F238E27FC236}">
+                <a16:creationId xmlns:a16="http://schemas.microsoft.com/office/drawing/2014/main" id="{02262299-8028-4DEF-8906-C60B6860B0EC}"/>
+              </a:ext>
+            </a:extLst>
+          </p:cNvPr>
+          <p:cNvPicPr>
+            <a:picLocks noChangeAspect="1"/>
+          </p:cNvPicPr>
+          <p:nvPr/>
+        </p:nvPicPr>
+        <p:blipFill>
+          <a:blip r:embed="rId3"/>
+          <a:stretch>
+            <a:fillRect/>
+          </a:stretch>
+        </p:blipFill>
+        <p:spPr>
+          <a:xfrm>
+            <a:off x="450112" y="4043586"/>
+            <a:ext cx="2588806" cy="2044978"/>
+          </a:xfrm>
+          <a:prstGeom prst="rect">
+            <a:avLst/>
+          </a:prstGeom>
+        </p:spPr>
+      </p:pic>
+      <p:sp>
+        <p:nvSpPr>
+          <p:cNvPr id="11" name="CuadroTexto 10">
+            <a:extLst>
+              <a:ext uri="{FF2B5EF4-FFF2-40B4-BE49-F238E27FC236}">
+                <a16:creationId xmlns:a16="http://schemas.microsoft.com/office/drawing/2014/main" id="{363D009B-430D-4637-8E5E-86E35D5EA380}"/>
+              </a:ext>
+            </a:extLst>
+          </p:cNvPr>
+          <p:cNvSpPr txBox="1"/>
+          <p:nvPr/>
+        </p:nvSpPr>
+        <p:spPr>
+          <a:xfrm>
+            <a:off x="681806" y="3532488"/>
+            <a:ext cx="2263953" cy="369332"/>
+          </a:xfrm>
+          <a:prstGeom prst="rect">
+            <a:avLst/>
+          </a:prstGeom>
+          <a:noFill/>
+        </p:spPr>
+        <p:txBody>
+          <a:bodyPr wrap="none" rtlCol="0">
+            <a:spAutoFit/>
+          </a:bodyPr>
+          <a:lstStyle/>
+          <a:p>
+            <a:r>
+              <a:rPr lang="es-ES" dirty="0"/>
+              <a:t>3.2.2 </a:t>
+            </a:r>
+            <a:r>
+              <a:rPr lang="es-ES" dirty="0" err="1"/>
+              <a:t>Phase</a:t>
+            </a:r>
+            <a:r>
+              <a:rPr lang="es-ES" dirty="0"/>
+              <a:t> </a:t>
+            </a:r>
+            <a:r>
+              <a:rPr lang="es-ES" dirty="0" err="1"/>
+              <a:t>difference</a:t>
+            </a:r>
+            <a:endParaRPr lang="es-ES" dirty="0"/>
+          </a:p>
+        </p:txBody>
+      </p:sp>
+      <p:pic>
+        <p:nvPicPr>
+          <p:cNvPr id="17" name="Imagen 16">
+            <a:extLst>
+              <a:ext uri="{FF2B5EF4-FFF2-40B4-BE49-F238E27FC236}">
+                <a16:creationId xmlns:a16="http://schemas.microsoft.com/office/drawing/2014/main" id="{9DB89415-DDAD-441E-9AD9-4C9EC6250ADE}"/>
+              </a:ext>
+            </a:extLst>
+          </p:cNvPr>
+          <p:cNvPicPr>
+            <a:picLocks noChangeAspect="1"/>
+          </p:cNvPicPr>
+          <p:nvPr/>
+        </p:nvPicPr>
+        <p:blipFill>
+          <a:blip r:embed="rId4"/>
+          <a:stretch>
+            <a:fillRect/>
+          </a:stretch>
+        </p:blipFill>
+        <p:spPr>
+          <a:xfrm>
+            <a:off x="3224834" y="805387"/>
+            <a:ext cx="2514600" cy="2017889"/>
+          </a:xfrm>
+          <a:prstGeom prst="rect">
+            <a:avLst/>
+          </a:prstGeom>
+        </p:spPr>
+      </p:pic>
+      <p:pic>
+        <p:nvPicPr>
+          <p:cNvPr id="19" name="Imagen 18">
+            <a:extLst>
+              <a:ext uri="{FF2B5EF4-FFF2-40B4-BE49-F238E27FC236}">
+                <a16:creationId xmlns:a16="http://schemas.microsoft.com/office/drawing/2014/main" id="{19761D00-B672-43D2-B3DF-1E579595F96F}"/>
+              </a:ext>
+            </a:extLst>
+          </p:cNvPr>
+          <p:cNvPicPr>
+            <a:picLocks noChangeAspect="1"/>
+          </p:cNvPicPr>
+          <p:nvPr/>
+        </p:nvPicPr>
+        <p:blipFill>
+          <a:blip r:embed="rId5"/>
+          <a:stretch>
+            <a:fillRect/>
+          </a:stretch>
+        </p:blipFill>
+        <p:spPr>
+          <a:xfrm>
+            <a:off x="3185160" y="4034725"/>
+            <a:ext cx="2652091" cy="2094968"/>
+          </a:xfrm>
+          <a:prstGeom prst="rect">
+            <a:avLst/>
+          </a:prstGeom>
+        </p:spPr>
+      </p:pic>
+      <p:sp>
+        <p:nvSpPr>
+          <p:cNvPr id="20" name="CuadroTexto 19">
+            <a:extLst>
+              <a:ext uri="{FF2B5EF4-FFF2-40B4-BE49-F238E27FC236}">
+                <a16:creationId xmlns:a16="http://schemas.microsoft.com/office/drawing/2014/main" id="{16B79607-0F2B-4B5B-88AF-510B16150143}"/>
+              </a:ext>
+            </a:extLst>
+          </p:cNvPr>
+          <p:cNvSpPr txBox="1"/>
+          <p:nvPr/>
+        </p:nvSpPr>
+        <p:spPr>
+          <a:xfrm>
+            <a:off x="6664468" y="3511077"/>
+            <a:ext cx="2469445" cy="369332"/>
+          </a:xfrm>
+          <a:prstGeom prst="rect">
+            <a:avLst/>
+          </a:prstGeom>
+          <a:noFill/>
+        </p:spPr>
+        <p:txBody>
+          <a:bodyPr wrap="square" rtlCol="0">
+            <a:spAutoFit/>
+          </a:bodyPr>
+          <a:lstStyle/>
+          <a:p>
+            <a:r>
+              <a:rPr lang="es-ES" dirty="0"/>
+              <a:t>3.2.3. </a:t>
+            </a:r>
+            <a:r>
+              <a:rPr lang="es-ES" dirty="0" err="1"/>
+              <a:t>Delay</a:t>
+            </a:r>
+            <a:r>
+              <a:rPr lang="es-ES" dirty="0"/>
+              <a:t> </a:t>
+            </a:r>
+            <a:r>
+              <a:rPr lang="es-ES" dirty="0" err="1"/>
+              <a:t>imbalance</a:t>
+            </a:r>
+            <a:endParaRPr lang="es-ES" dirty="0"/>
+          </a:p>
+        </p:txBody>
+      </p:sp>
+      <p:pic>
+        <p:nvPicPr>
+          <p:cNvPr id="21" name="Imagen 20">
+            <a:extLst>
+              <a:ext uri="{FF2B5EF4-FFF2-40B4-BE49-F238E27FC236}">
+                <a16:creationId xmlns:a16="http://schemas.microsoft.com/office/drawing/2014/main" id="{B338BD0B-E26D-4306-AA22-8073EF27E326}"/>
+              </a:ext>
+            </a:extLst>
+          </p:cNvPr>
+          <p:cNvPicPr>
+            <a:picLocks noChangeAspect="1"/>
+          </p:cNvPicPr>
+          <p:nvPr/>
+        </p:nvPicPr>
+        <p:blipFill>
+          <a:blip r:embed="rId6"/>
+          <a:stretch>
+            <a:fillRect/>
+          </a:stretch>
+        </p:blipFill>
+        <p:spPr>
+          <a:xfrm>
+            <a:off x="6266936" y="4000370"/>
+            <a:ext cx="2696587" cy="2163928"/>
+          </a:xfrm>
+          <a:prstGeom prst="rect">
+            <a:avLst/>
+          </a:prstGeom>
+        </p:spPr>
+      </p:pic>
+      <p:pic>
+        <p:nvPicPr>
+          <p:cNvPr id="22" name="Imagen 21">
+            <a:extLst>
+              <a:ext uri="{FF2B5EF4-FFF2-40B4-BE49-F238E27FC236}">
+                <a16:creationId xmlns:a16="http://schemas.microsoft.com/office/drawing/2014/main" id="{82FE8A97-5B78-4C64-9DEB-AB854D4A6D2D}"/>
+              </a:ext>
+            </a:extLst>
+          </p:cNvPr>
+          <p:cNvPicPr>
+            <a:picLocks noChangeAspect="1"/>
+          </p:cNvPicPr>
+          <p:nvPr/>
+        </p:nvPicPr>
+        <p:blipFill>
+          <a:blip r:embed="rId7"/>
+          <a:stretch>
+            <a:fillRect/>
+          </a:stretch>
+        </p:blipFill>
+        <p:spPr>
+          <a:xfrm>
+            <a:off x="9021654" y="3983286"/>
+            <a:ext cx="2674753" cy="2146407"/>
+          </a:xfrm>
+          <a:prstGeom prst="rect">
+            <a:avLst/>
+          </a:prstGeom>
+        </p:spPr>
+      </p:pic>
+    </p:spTree>
+    <p:extLst>
+      <p:ext uri="{BB962C8B-B14F-4D97-AF65-F5344CB8AC3E}">
+        <p14:creationId xmlns:p14="http://schemas.microsoft.com/office/powerpoint/2010/main" val="1414825025"/>
+      </p:ext>
+    </p:extLst>
+  </p:cSld>
+  <p:clrMapOvr>
+    <a:masterClrMapping/>
+  </p:clrMapOvr>
+</p:sld>
+</file>
+
+<file path=ppt/slides/slide9.xml><?xml version="1.0" encoding="utf-8"?>
 <p:sld xmlns:a="http://schemas.openxmlformats.org/drawingml/2006/main" xmlns:r="http://schemas.openxmlformats.org/officeDocument/2006/relationships" xmlns:p="http://schemas.openxmlformats.org/presentationml/2006/main">
   <p:cSld>
     <p:spTree>
@@ -7549,7 +12190,7 @@
           <a:p>
             <a:fld id="{B6F15528-21DE-4FAA-801E-634DDDAF4B2B}" type="slidenum">
               <a:rPr lang="es-ES" smtClean="0"/>
-              <a:t>8</a:t>
+              <a:t>9</a:t>
             </a:fld>
             <a:endParaRPr lang="es-ES"/>
           </a:p>
@@ -7725,7 +12366,7 @@
         </p:nvSpPr>
         <p:spPr>
           <a:xfrm>
-            <a:off x="609441" y="4860334"/>
+            <a:off x="685800" y="4724400"/>
             <a:ext cx="11199971" cy="1200329"/>
           </a:xfrm>
           <a:prstGeom prst="rect">
@@ -7839,159 +12480,6 @@
         <p14:creationId xmlns:p14="http://schemas.microsoft.com/office/powerpoint/2010/main" val="3660438245"/>
       </p:ext>
     </p:extLst>
-  </p:cSld>
-  <p:clrMapOvr>
-    <a:masterClrMapping/>
-  </p:clrMapOvr>
-</p:sld>
-</file>
-
-<file path=ppt/slides/slide9.xml><?xml version="1.0" encoding="utf-8"?>
-<p:sld xmlns:a="http://schemas.openxmlformats.org/drawingml/2006/main" xmlns:r="http://schemas.openxmlformats.org/officeDocument/2006/relationships" xmlns:p="http://schemas.openxmlformats.org/presentationml/2006/main">
-  <p:cSld>
-    <p:spTree>
-      <p:nvGrpSpPr>
-        <p:cNvPr id="1" name=""/>
-        <p:cNvGrpSpPr/>
-        <p:nvPr/>
-      </p:nvGrpSpPr>
-      <p:grpSpPr>
-        <a:xfrm>
-          <a:off x="0" y="0"/>
-          <a:ext cx="0" cy="0"/>
-          <a:chOff x="0" y="0"/>
-          <a:chExt cx="0" cy="0"/>
-        </a:xfrm>
-      </p:grpSpPr>
-      <p:sp>
-        <p:nvSpPr>
-          <p:cNvPr id="3" name="object 3"/>
-          <p:cNvSpPr/>
-          <p:nvPr/>
-        </p:nvSpPr>
-        <p:spPr>
-          <a:xfrm>
-            <a:off x="3945635" y="2636520"/>
-            <a:ext cx="8246363" cy="1584959"/>
-          </a:xfrm>
-          <a:prstGeom prst="rect">
-            <a:avLst/>
-          </a:prstGeom>
-          <a:blipFill>
-            <a:blip r:embed="rId2" cstate="print"/>
-            <a:stretch>
-              <a:fillRect/>
-            </a:stretch>
-          </a:blipFill>
-        </p:spPr>
-        <p:txBody>
-          <a:bodyPr wrap="square" lIns="0" tIns="0" rIns="0" bIns="0" rtlCol="0"/>
-          <a:lstStyle/>
-          <a:p>
-            <a:endParaRPr/>
-          </a:p>
-        </p:txBody>
-      </p:sp>
-      <p:sp>
-        <p:nvSpPr>
-          <p:cNvPr id="4" name="object 4"/>
-          <p:cNvSpPr txBox="1">
-            <a:spLocks noGrp="1"/>
-          </p:cNvSpPr>
-          <p:nvPr>
-            <p:ph type="title"/>
-          </p:nvPr>
-        </p:nvSpPr>
-        <p:spPr>
-          <a:xfrm>
-            <a:off x="4513326" y="3165729"/>
-            <a:ext cx="2233295" cy="513715"/>
-          </a:xfrm>
-          <a:prstGeom prst="rect">
-            <a:avLst/>
-          </a:prstGeom>
-        </p:spPr>
-        <p:txBody>
-          <a:bodyPr vert="horz" wrap="square" lIns="0" tIns="13335" rIns="0" bIns="0" rtlCol="0">
-            <a:spAutoFit/>
-          </a:bodyPr>
-          <a:lstStyle/>
-          <a:p>
-            <a:pPr marL="12700">
-              <a:lnSpc>
-                <a:spcPct val="100000"/>
-              </a:lnSpc>
-              <a:spcBef>
-                <a:spcPts val="105"/>
-              </a:spcBef>
-            </a:pPr>
-            <a:r>
-              <a:rPr sz="3200" b="1" spc="-5" dirty="0">
-                <a:solidFill>
-                  <a:srgbClr val="FFFFFF"/>
-                </a:solidFill>
-                <a:latin typeface="Lucida Sans"/>
-                <a:cs typeface="Lucida Sans"/>
-              </a:rPr>
-              <a:t>Thank</a:t>
-            </a:r>
-            <a:r>
-              <a:rPr sz="3200" b="1" spc="-55" dirty="0">
-                <a:solidFill>
-                  <a:srgbClr val="FFFFFF"/>
-                </a:solidFill>
-                <a:latin typeface="Lucida Sans"/>
-                <a:cs typeface="Lucida Sans"/>
-              </a:rPr>
-              <a:t> </a:t>
-            </a:r>
-            <a:r>
-              <a:rPr sz="3200" b="1" dirty="0">
-                <a:solidFill>
-                  <a:srgbClr val="FFFFFF"/>
-                </a:solidFill>
-                <a:latin typeface="Lucida Sans"/>
-                <a:cs typeface="Lucida Sans"/>
-              </a:rPr>
-              <a:t>you</a:t>
-            </a:r>
-            <a:endParaRPr sz="3200">
-              <a:latin typeface="Lucida Sans"/>
-              <a:cs typeface="Lucida Sans"/>
-            </a:endParaRPr>
-          </a:p>
-        </p:txBody>
-      </p:sp>
-      <p:sp>
-        <p:nvSpPr>
-          <p:cNvPr id="5" name="Marcador de número de diapositiva 4">
-            <a:extLst>
-              <a:ext uri="{FF2B5EF4-FFF2-40B4-BE49-F238E27FC236}">
-                <a16:creationId xmlns:a16="http://schemas.microsoft.com/office/drawing/2014/main" id="{B052DA19-AD24-7D24-2AE9-51F8F5A7F5E0}"/>
-              </a:ext>
-            </a:extLst>
-          </p:cNvPr>
-          <p:cNvSpPr>
-            <a:spLocks noGrp="1"/>
-          </p:cNvSpPr>
-          <p:nvPr>
-            <p:ph type="sldNum" sz="quarter" idx="7"/>
-          </p:nvPr>
-        </p:nvSpPr>
-        <p:spPr/>
-        <p:txBody>
-          <a:bodyPr/>
-          <a:lstStyle/>
-          <a:p>
-            <a:fld id="{B6F15528-21DE-4FAA-801E-634DDDAF4B2B}" type="slidenum">
-              <a:rPr lang="es-ES" smtClean="0"/>
-              <a:t>9</a:t>
-            </a:fld>
-            <a:endParaRPr lang="es-ES"/>
-          </a:p>
-        </p:txBody>
-      </p:sp>
-    </p:spTree>
   </p:cSld>
   <p:clrMapOvr>
     <a:masterClrMapping/>
